--- a/site/slides/m06-spectral-bisection/m06-spectral-bisection.pptx
+++ b/site/slides/m06-spectral-bisection/m06-spectral-bisection.pptx
@@ -4348,7 +4348,7 @@
         <p:spPr>
           <a:xfrm>
             <a:off x="563880" y="6512052"/>
-            <a:ext cx="1503426" cy="205740"/>
+            <a:ext cx="1494790" cy="205740"/>
           </a:xfrm>
           <a:prstGeom prst="rect">
             <a:avLst/>
@@ -4383,8 +4383,8 @@
         </p:nvSpPr>
         <p:spPr>
           <a:xfrm>
-            <a:off x="11108524" y="6499098"/>
-            <a:ext cx="561505" cy="222885"/>
+            <a:off x="11113770" y="6499098"/>
+            <a:ext cx="556260" cy="222885"/>
           </a:xfrm>
           <a:prstGeom prst="rect">
             <a:avLst/>
@@ -4414,42 +4414,6 @@
       <p:sp>
         <p:nvSpPr>
           <p:cNvPr id="7" name="TextBox 6"/>
-          <p:cNvSpPr txBox="1"/>
-          <p:nvPr/>
-        </p:nvSpPr>
-        <p:spPr>
-          <a:xfrm>
-            <a:off x="10855147" y="377952"/>
-            <a:ext cx="811072" cy="205740"/>
-          </a:xfrm>
-          <a:prstGeom prst="rect">
-            <a:avLst/>
-          </a:prstGeom>
-          <a:noFill/>
-        </p:spPr>
-        <p:txBody>
-          <a:bodyPr wrap="none" lIns="0" rIns="0" tIns="0" bIns="0">
-            <a:spAutoFit/>
-          </a:bodyPr>
-          <a:lstStyle/>
-          <a:p>
-            <a:pPr algn="r"/>
-            <a:r>
-              <a:rPr sz="1200" b="0">
-                <a:solidFill>
-                  <a:srgbClr val="6F8F8F"/>
-                </a:solidFill>
-                <a:latin typeface="Noto Sans SC"/>
-                <a:ea typeface="Noto Sans SC"/>
-              </a:rPr>
-              <a:t>影片 00:00</a:t>
-            </a:r>
-          </a:p>
-        </p:txBody>
-      </p:sp>
-      <p:sp>
-        <p:nvSpPr>
-          <p:cNvPr id="8" name="TextBox 7"/>
           <p:cNvSpPr txBox="1"/>
           <p:nvPr/>
         </p:nvSpPr>
@@ -4485,50 +4449,50 @@
       </p:sp>
       <p:sp>
         <p:nvSpPr>
+          <p:cNvPr id="8" name="TextBox 7"/>
+          <p:cNvSpPr txBox="1"/>
+          <p:nvPr/>
+        </p:nvSpPr>
+        <p:spPr>
+          <a:xfrm>
+            <a:off x="3294379" y="3335782"/>
+            <a:ext cx="5603240" cy="291465"/>
+          </a:xfrm>
+          <a:prstGeom prst="rect">
+            <a:avLst/>
+          </a:prstGeom>
+          <a:noFill/>
+        </p:spPr>
+        <p:txBody>
+          <a:bodyPr wrap="none" lIns="0" rIns="0" tIns="0" bIns="0">
+            <a:spAutoFit/>
+          </a:bodyPr>
+          <a:lstStyle/>
+          <a:p>
+            <a:pPr algn="ctr"/>
+            <a:r>
+              <a:rPr sz="1700" b="0">
+                <a:solidFill>
+                  <a:srgbClr val="BCD2D0"/>
+                </a:solidFill>
+                <a:latin typeface="Noto Sans SC"/>
+                <a:ea typeface="Noto Sans SC"/>
+              </a:rPr>
+              <a:t>Spectral bisection · 拉普拉斯矩阵、Fiedler 向量与扫描</a:t>
+            </a:r>
+          </a:p>
+        </p:txBody>
+      </p:sp>
+      <p:sp>
+        <p:nvSpPr>
           <p:cNvPr id="9" name="TextBox 8"/>
           <p:cNvSpPr txBox="1"/>
           <p:nvPr/>
         </p:nvSpPr>
         <p:spPr>
           <a:xfrm>
-            <a:off x="3299231" y="3335782"/>
-            <a:ext cx="5593537" cy="291465"/>
-          </a:xfrm>
-          <a:prstGeom prst="rect">
-            <a:avLst/>
-          </a:prstGeom>
-          <a:noFill/>
-        </p:spPr>
-        <p:txBody>
-          <a:bodyPr wrap="none" lIns="0" rIns="0" tIns="0" bIns="0">
-            <a:spAutoFit/>
-          </a:bodyPr>
-          <a:lstStyle/>
-          <a:p>
-            <a:pPr algn="ctr"/>
-            <a:r>
-              <a:rPr sz="1700" b="0">
-                <a:solidFill>
-                  <a:srgbClr val="BCD2D0"/>
-                </a:solidFill>
-                <a:latin typeface="Noto Sans SC"/>
-                <a:ea typeface="Noto Sans SC"/>
-              </a:rPr>
-              <a:t>Spectral bisection · 拉普拉斯矩阵、Fiedler 向量与扫描</a:t>
-            </a:r>
-          </a:p>
-        </p:txBody>
-      </p:sp>
-      <p:sp>
-        <p:nvSpPr>
-          <p:cNvPr id="10" name="TextBox 9"/>
-          <p:cNvSpPr txBox="1"/>
-          <p:nvPr/>
-        </p:nvSpPr>
-        <p:spPr>
-          <a:xfrm>
-            <a:off x="3627691" y="4136644"/>
-            <a:ext cx="4936616" cy="240030"/>
+            <a:off x="3613785" y="4136644"/>
+            <a:ext cx="4964430" cy="240030"/>
           </a:xfrm>
           <a:prstGeom prst="rect">
             <a:avLst/>
@@ -4781,7 +4745,7 @@
         <p:spPr>
           <a:xfrm>
             <a:off x="563880" y="6512052"/>
-            <a:ext cx="1503426" cy="205740"/>
+            <a:ext cx="1494790" cy="205740"/>
           </a:xfrm>
           <a:prstGeom prst="rect">
             <a:avLst/>
@@ -4816,8 +4780,8 @@
         </p:nvSpPr>
         <p:spPr>
           <a:xfrm>
-            <a:off x="11011115" y="6499098"/>
-            <a:ext cx="658914" cy="222885"/>
+            <a:off x="11018520" y="6499098"/>
+            <a:ext cx="651510" cy="222885"/>
           </a:xfrm>
           <a:prstGeom prst="rect">
             <a:avLst/>
@@ -4846,43 +4810,7 @@
       </p:sp>
       <p:sp>
         <p:nvSpPr>
-          <p:cNvPr id="9" name="TextBox 8"/>
-          <p:cNvSpPr txBox="1"/>
-          <p:nvPr/>
-        </p:nvSpPr>
-        <p:spPr>
-          <a:xfrm>
-            <a:off x="10855147" y="377952"/>
-            <a:ext cx="811072" cy="205740"/>
-          </a:xfrm>
-          <a:prstGeom prst="rect">
-            <a:avLst/>
-          </a:prstGeom>
-          <a:noFill/>
-        </p:spPr>
-        <p:txBody>
-          <a:bodyPr wrap="none" lIns="0" rIns="0" tIns="0" bIns="0">
-            <a:spAutoFit/>
-          </a:bodyPr>
-          <a:lstStyle/>
-          <a:p>
-            <a:pPr algn="r"/>
-            <a:r>
-              <a:rPr sz="1200" b="0">
-                <a:solidFill>
-                  <a:srgbClr val="6F8F8F"/>
-                </a:solidFill>
-                <a:latin typeface="Noto Sans SC"/>
-                <a:ea typeface="Noto Sans SC"/>
-              </a:rPr>
-              <a:t>影片 03:26</a:t>
-            </a:r>
-          </a:p>
-        </p:txBody>
-      </p:sp>
-      <p:sp>
-        <p:nvSpPr>
-          <p:cNvPr id="10" name="Oval 9"/>
+          <p:cNvPr id="9" name="Oval 8"/>
           <p:cNvSpPr/>
           <p:nvPr/>
         </p:nvSpPr>
@@ -4924,7 +4852,7 @@
       </p:sp>
       <p:sp>
         <p:nvSpPr>
-          <p:cNvPr id="11" name="TextBox 10"/>
+          <p:cNvPr id="10" name="TextBox 9"/>
           <p:cNvSpPr txBox="1"/>
           <p:nvPr/>
         </p:nvSpPr>
@@ -4964,7 +4892,7 @@
       </p:sp>
       <p:sp>
         <p:nvSpPr>
-          <p:cNvPr id="12" name="Oval 11"/>
+          <p:cNvPr id="11" name="Oval 10"/>
           <p:cNvSpPr/>
           <p:nvPr/>
         </p:nvSpPr>
@@ -5006,7 +4934,7 @@
       </p:sp>
       <p:sp>
         <p:nvSpPr>
-          <p:cNvPr id="13" name="TextBox 12"/>
+          <p:cNvPr id="12" name="TextBox 11"/>
           <p:cNvSpPr txBox="1"/>
           <p:nvPr/>
         </p:nvSpPr>
@@ -5046,7 +4974,7 @@
       </p:sp>
       <p:sp>
         <p:nvSpPr>
-          <p:cNvPr id="14" name="Oval 13"/>
+          <p:cNvPr id="13" name="Oval 12"/>
           <p:cNvSpPr/>
           <p:nvPr/>
         </p:nvSpPr>
@@ -5088,7 +5016,7 @@
       </p:sp>
       <p:sp>
         <p:nvSpPr>
-          <p:cNvPr id="15" name="TextBox 14"/>
+          <p:cNvPr id="14" name="TextBox 13"/>
           <p:cNvSpPr txBox="1"/>
           <p:nvPr/>
         </p:nvSpPr>
@@ -5128,7 +5056,7 @@
       </p:sp>
       <p:sp>
         <p:nvSpPr>
-          <p:cNvPr id="16" name="Oval 15"/>
+          <p:cNvPr id="15" name="Oval 14"/>
           <p:cNvSpPr/>
           <p:nvPr/>
         </p:nvSpPr>
@@ -5170,7 +5098,7 @@
       </p:sp>
       <p:sp>
         <p:nvSpPr>
-          <p:cNvPr id="17" name="TextBox 16"/>
+          <p:cNvPr id="16" name="TextBox 15"/>
           <p:cNvSpPr txBox="1"/>
           <p:nvPr/>
         </p:nvSpPr>
@@ -5434,7 +5362,7 @@
         <p:spPr>
           <a:xfrm>
             <a:off x="563880" y="6512052"/>
-            <a:ext cx="1503426" cy="205740"/>
+            <a:ext cx="1494790" cy="205740"/>
           </a:xfrm>
           <a:prstGeom prst="rect">
             <a:avLst/>
@@ -5469,8 +5397,8 @@
         </p:nvSpPr>
         <p:spPr>
           <a:xfrm>
-            <a:off x="11011115" y="6499098"/>
-            <a:ext cx="658914" cy="222885"/>
+            <a:off x="11018520" y="6499098"/>
+            <a:ext cx="651510" cy="222885"/>
           </a:xfrm>
           <a:prstGeom prst="rect">
             <a:avLst/>
@@ -5843,7 +5771,7 @@
         <p:spPr>
           <a:xfrm>
             <a:off x="563880" y="6512052"/>
-            <a:ext cx="1503426" cy="205740"/>
+            <a:ext cx="1494790" cy="205740"/>
           </a:xfrm>
           <a:prstGeom prst="rect">
             <a:avLst/>
@@ -5878,8 +5806,8 @@
         </p:nvSpPr>
         <p:spPr>
           <a:xfrm>
-            <a:off x="11108524" y="6499098"/>
-            <a:ext cx="561505" cy="222885"/>
+            <a:off x="11113770" y="6499098"/>
+            <a:ext cx="556260" cy="222885"/>
           </a:xfrm>
           <a:prstGeom prst="rect">
             <a:avLst/>
@@ -5908,43 +5836,7 @@
       </p:sp>
       <p:sp>
         <p:nvSpPr>
-          <p:cNvPr id="9" name="TextBox 8"/>
-          <p:cNvSpPr txBox="1"/>
-          <p:nvPr/>
-        </p:nvSpPr>
-        <p:spPr>
-          <a:xfrm>
-            <a:off x="10855147" y="377952"/>
-            <a:ext cx="811072" cy="205740"/>
-          </a:xfrm>
-          <a:prstGeom prst="rect">
-            <a:avLst/>
-          </a:prstGeom>
-          <a:noFill/>
-        </p:spPr>
-        <p:txBody>
-          <a:bodyPr wrap="none" lIns="0" rIns="0" tIns="0" bIns="0">
-            <a:spAutoFit/>
-          </a:bodyPr>
-          <a:lstStyle/>
-          <a:p>
-            <a:pPr algn="r"/>
-            <a:r>
-              <a:rPr sz="1200" b="0">
-                <a:solidFill>
-                  <a:srgbClr val="6F8F8F"/>
-                </a:solidFill>
-                <a:latin typeface="Noto Sans SC"/>
-                <a:ea typeface="Noto Sans SC"/>
-              </a:rPr>
-              <a:t>影片 00:15</a:t>
-            </a:r>
-          </a:p>
-        </p:txBody>
-      </p:sp>
-      <p:sp>
-        <p:nvSpPr>
-          <p:cNvPr id="10" name="Oval 9"/>
+          <p:cNvPr id="9" name="Oval 8"/>
           <p:cNvSpPr/>
           <p:nvPr/>
         </p:nvSpPr>
@@ -5986,7 +5878,7 @@
       </p:sp>
       <p:sp>
         <p:nvSpPr>
-          <p:cNvPr id="11" name="TextBox 10"/>
+          <p:cNvPr id="10" name="TextBox 9"/>
           <p:cNvSpPr txBox="1"/>
           <p:nvPr/>
         </p:nvSpPr>
@@ -6026,7 +5918,7 @@
       </p:sp>
       <p:sp>
         <p:nvSpPr>
-          <p:cNvPr id="12" name="Oval 11"/>
+          <p:cNvPr id="11" name="Oval 10"/>
           <p:cNvSpPr/>
           <p:nvPr/>
         </p:nvSpPr>
@@ -6068,7 +5960,7 @@
       </p:sp>
       <p:sp>
         <p:nvSpPr>
-          <p:cNvPr id="13" name="TextBox 12"/>
+          <p:cNvPr id="12" name="TextBox 11"/>
           <p:cNvSpPr txBox="1"/>
           <p:nvPr/>
         </p:nvSpPr>
@@ -6128,7 +6020,7 @@
       </p:sp>
       <p:sp>
         <p:nvSpPr>
-          <p:cNvPr id="14" name="Oval 13"/>
+          <p:cNvPr id="13" name="Oval 12"/>
           <p:cNvSpPr/>
           <p:nvPr/>
         </p:nvSpPr>
@@ -6170,7 +6062,7 @@
       </p:sp>
       <p:sp>
         <p:nvSpPr>
-          <p:cNvPr id="15" name="TextBox 14"/>
+          <p:cNvPr id="14" name="TextBox 13"/>
           <p:cNvSpPr txBox="1"/>
           <p:nvPr/>
         </p:nvSpPr>
@@ -6210,7 +6102,7 @@
       </p:sp>
       <p:sp>
         <p:nvSpPr>
-          <p:cNvPr id="16" name="Oval 15"/>
+          <p:cNvPr id="15" name="Oval 14"/>
           <p:cNvSpPr/>
           <p:nvPr/>
         </p:nvSpPr>
@@ -6252,7 +6144,7 @@
       </p:sp>
       <p:sp>
         <p:nvSpPr>
-          <p:cNvPr id="17" name="TextBox 16"/>
+          <p:cNvPr id="16" name="TextBox 15"/>
           <p:cNvSpPr txBox="1"/>
           <p:nvPr/>
         </p:nvSpPr>
@@ -6292,7 +6184,7 @@
       </p:sp>
       <p:sp>
         <p:nvSpPr>
-          <p:cNvPr id="18" name="Oval 17"/>
+          <p:cNvPr id="17" name="Oval 16"/>
           <p:cNvSpPr/>
           <p:nvPr/>
         </p:nvSpPr>
@@ -6334,7 +6226,7 @@
       </p:sp>
       <p:sp>
         <p:nvSpPr>
-          <p:cNvPr id="19" name="TextBox 18"/>
+          <p:cNvPr id="18" name="TextBox 17"/>
           <p:cNvSpPr txBox="1"/>
           <p:nvPr/>
         </p:nvSpPr>
@@ -6374,14 +6266,14 @@
       </p:sp>
       <p:cxnSp>
         <p:nvCxnSpPr>
-          <p:cNvPr id="20" name="Connector 19"/>
+          <p:cNvPr id="19" name="Connector 18"/>
           <p:cNvCxnSpPr/>
           <p:nvPr/>
         </p:nvCxnSpPr>
         <p:spPr>
           <a:xfrm flipV="1">
-            <a:off x="6674654" y="1714500"/>
-            <a:ext cx="2164367" cy="147570"/>
+            <a:off x="6833852" y="1651000"/>
+            <a:ext cx="2125014" cy="144887"/>
           </a:xfrm>
           <a:prstGeom prst="line">
             <a:avLst/>
@@ -6409,13 +6301,13 @@
       </p:cxnSp>
       <p:sp>
         <p:nvSpPr>
-          <p:cNvPr id="21" name="Oval 20"/>
+          <p:cNvPr id="20" name="Oval 19"/>
           <p:cNvSpPr/>
           <p:nvPr/>
         </p:nvSpPr>
         <p:spPr>
           <a:xfrm>
-            <a:off x="7600167" y="1420846"/>
+            <a:off x="7739688" y="1356004"/>
             <a:ext cx="292608" cy="292608"/>
           </a:xfrm>
           <a:prstGeom prst="ellipse">
@@ -6453,14 +6345,14 @@
       </p:sp>
       <p:sp>
         <p:nvSpPr>
-          <p:cNvPr id="22" name="TextBox 21"/>
-          <p:cNvSpPr txBox="1"/>
-          <p:nvPr/>
-        </p:nvSpPr>
-        <p:spPr>
-          <a:xfrm>
-            <a:off x="7625567" y="1428974"/>
-            <a:ext cx="241808" cy="274320"/>
+          <p:cNvPr id="21" name="TextBox 20"/>
+          <p:cNvSpPr txBox="1"/>
+          <p:nvPr/>
+        </p:nvSpPr>
+        <p:spPr>
+          <a:xfrm>
+            <a:off x="7764707" y="1364132"/>
+            <a:ext cx="242570" cy="274320"/>
           </a:xfrm>
           <a:prstGeom prst="rect">
             <a:avLst/>
@@ -6489,14 +6381,14 @@
       </p:sp>
       <p:cxnSp>
         <p:nvCxnSpPr>
-          <p:cNvPr id="23" name="Connector 22"/>
+          <p:cNvPr id="22" name="Connector 21"/>
           <p:cNvCxnSpPr/>
           <p:nvPr/>
         </p:nvCxnSpPr>
         <p:spPr>
           <a:xfrm>
-            <a:off x="6674654" y="1862070"/>
-            <a:ext cx="1328134" cy="1672465"/>
+            <a:off x="6833852" y="1795887"/>
+            <a:ext cx="1303986" cy="1642056"/>
           </a:xfrm>
           <a:prstGeom prst="line">
             <a:avLst/>
@@ -6524,13 +6416,13 @@
       </p:cxnSp>
       <p:sp>
         <p:nvSpPr>
-          <p:cNvPr id="24" name="Oval 23"/>
+          <p:cNvPr id="23" name="Oval 22"/>
           <p:cNvSpPr/>
           <p:nvPr/>
         </p:nvSpPr>
         <p:spPr>
           <a:xfrm>
-            <a:off x="7311763" y="2388135"/>
+            <a:off x="7458887" y="2306748"/>
             <a:ext cx="292608" cy="292608"/>
           </a:xfrm>
           <a:prstGeom prst="ellipse">
@@ -6568,14 +6460,14 @@
       </p:sp>
       <p:sp>
         <p:nvSpPr>
-          <p:cNvPr id="25" name="TextBox 24"/>
-          <p:cNvSpPr txBox="1"/>
-          <p:nvPr/>
-        </p:nvSpPr>
-        <p:spPr>
-          <a:xfrm>
-            <a:off x="7337163" y="2396263"/>
-            <a:ext cx="241808" cy="274320"/>
+          <p:cNvPr id="24" name="TextBox 23"/>
+          <p:cNvSpPr txBox="1"/>
+          <p:nvPr/>
+        </p:nvSpPr>
+        <p:spPr>
+          <a:xfrm>
+            <a:off x="7483906" y="2314876"/>
+            <a:ext cx="242570" cy="274320"/>
           </a:xfrm>
           <a:prstGeom prst="rect">
             <a:avLst/>
@@ -6604,14 +6496,14 @@
       </p:sp>
       <p:cxnSp>
         <p:nvCxnSpPr>
-          <p:cNvPr id="26" name="Connector 25"/>
+          <p:cNvPr id="25" name="Connector 24"/>
           <p:cNvCxnSpPr/>
           <p:nvPr/>
         </p:nvCxnSpPr>
         <p:spPr>
           <a:xfrm flipH="1">
-            <a:off x="8002788" y="1714500"/>
-            <a:ext cx="836233" cy="1820035"/>
+            <a:off x="8137838" y="1651000"/>
+            <a:ext cx="821028" cy="1786943"/>
           </a:xfrm>
           <a:prstGeom prst="line">
             <a:avLst/>
@@ -6639,13 +6531,13 @@
       </p:cxnSp>
       <p:sp>
         <p:nvSpPr>
-          <p:cNvPr id="27" name="Oval 26"/>
+          <p:cNvPr id="26" name="Oval 25"/>
           <p:cNvSpPr/>
           <p:nvPr/>
         </p:nvSpPr>
         <p:spPr>
           <a:xfrm>
-            <a:off x="8413083" y="2472752"/>
+            <a:off x="8540530" y="2392706"/>
             <a:ext cx="292608" cy="292608"/>
           </a:xfrm>
           <a:prstGeom prst="ellipse">
@@ -6683,14 +6575,14 @@
       </p:sp>
       <p:sp>
         <p:nvSpPr>
-          <p:cNvPr id="28" name="TextBox 27"/>
-          <p:cNvSpPr txBox="1"/>
-          <p:nvPr/>
-        </p:nvSpPr>
-        <p:spPr>
-          <a:xfrm>
-            <a:off x="8438483" y="2480880"/>
-            <a:ext cx="241808" cy="274320"/>
+          <p:cNvPr id="27" name="TextBox 26"/>
+          <p:cNvSpPr txBox="1"/>
+          <p:nvPr/>
+        </p:nvSpPr>
+        <p:spPr>
+          <a:xfrm>
+            <a:off x="8565549" y="2400834"/>
+            <a:ext cx="242570" cy="274320"/>
           </a:xfrm>
           <a:prstGeom prst="rect">
             <a:avLst/>
@@ -6719,14 +6611,14 @@
       </p:sp>
       <p:cxnSp>
         <p:nvCxnSpPr>
-          <p:cNvPr id="29" name="Connector 28"/>
+          <p:cNvPr id="28" name="Connector 27"/>
           <p:cNvCxnSpPr/>
           <p:nvPr/>
         </p:nvCxnSpPr>
         <p:spPr>
           <a:xfrm>
-            <a:off x="8002788" y="3534535"/>
-            <a:ext cx="2213557" cy="1032993"/>
+            <a:off x="8137838" y="3437943"/>
+            <a:ext cx="2173309" cy="1014211"/>
           </a:xfrm>
           <a:prstGeom prst="line">
             <a:avLst/>
@@ -6754,13 +6646,13 @@
       </p:cxnSp>
       <p:sp>
         <p:nvSpPr>
-          <p:cNvPr id="30" name="Oval 29"/>
+          <p:cNvPr id="29" name="Oval 28"/>
           <p:cNvSpPr/>
           <p:nvPr/>
         </p:nvSpPr>
         <p:spPr>
           <a:xfrm>
-            <a:off x="9027710" y="3697537"/>
+            <a:off x="9142636" y="3591554"/>
             <a:ext cx="292608" cy="292608"/>
           </a:xfrm>
           <a:prstGeom prst="ellipse">
@@ -6798,14 +6690,14 @@
       </p:sp>
       <p:sp>
         <p:nvSpPr>
-          <p:cNvPr id="31" name="TextBox 30"/>
-          <p:cNvSpPr txBox="1"/>
-          <p:nvPr/>
-        </p:nvSpPr>
-        <p:spPr>
-          <a:xfrm>
-            <a:off x="9053110" y="3705665"/>
-            <a:ext cx="241808" cy="274320"/>
+          <p:cNvPr id="30" name="TextBox 29"/>
+          <p:cNvSpPr txBox="1"/>
+          <p:nvPr/>
+        </p:nvSpPr>
+        <p:spPr>
+          <a:xfrm>
+            <a:off x="9167655" y="3599682"/>
+            <a:ext cx="242570" cy="274320"/>
           </a:xfrm>
           <a:prstGeom prst="rect">
             <a:avLst/>
@@ -6834,14 +6726,14 @@
       </p:sp>
       <p:cxnSp>
         <p:nvCxnSpPr>
-          <p:cNvPr id="32" name="Connector 31"/>
+          <p:cNvPr id="31" name="Connector 30"/>
           <p:cNvCxnSpPr/>
           <p:nvPr/>
         </p:nvCxnSpPr>
         <p:spPr>
           <a:xfrm flipH="1">
-            <a:off x="7756838" y="3534535"/>
-            <a:ext cx="245950" cy="1672465"/>
+            <a:off x="7896359" y="3437943"/>
+            <a:ext cx="241479" cy="1642057"/>
           </a:xfrm>
           <a:prstGeom prst="line">
             <a:avLst/>
@@ -6869,13 +6761,13 @@
       </p:cxnSp>
       <p:sp>
         <p:nvSpPr>
-          <p:cNvPr id="33" name="Oval 32"/>
+          <p:cNvPr id="32" name="Oval 31"/>
           <p:cNvSpPr/>
           <p:nvPr/>
         </p:nvSpPr>
         <p:spPr>
           <a:xfrm>
-            <a:off x="7884287" y="4177548"/>
+            <a:off x="8021572" y="4065753"/>
             <a:ext cx="292608" cy="292608"/>
           </a:xfrm>
           <a:prstGeom prst="ellipse">
@@ -6913,14 +6805,14 @@
       </p:sp>
       <p:sp>
         <p:nvSpPr>
-          <p:cNvPr id="34" name="TextBox 33"/>
-          <p:cNvSpPr txBox="1"/>
-          <p:nvPr/>
-        </p:nvSpPr>
-        <p:spPr>
-          <a:xfrm>
-            <a:off x="7909687" y="4185676"/>
-            <a:ext cx="241808" cy="274320"/>
+          <p:cNvPr id="33" name="TextBox 32"/>
+          <p:cNvSpPr txBox="1"/>
+          <p:nvPr/>
+        </p:nvSpPr>
+        <p:spPr>
+          <a:xfrm>
+            <a:off x="8046591" y="4073881"/>
+            <a:ext cx="242570" cy="274320"/>
           </a:xfrm>
           <a:prstGeom prst="rect">
             <a:avLst/>
@@ -6949,14 +6841,14 @@
       </p:sp>
       <p:cxnSp>
         <p:nvCxnSpPr>
-          <p:cNvPr id="35" name="Connector 34"/>
+          <p:cNvPr id="34" name="Connector 33"/>
           <p:cNvCxnSpPr/>
           <p:nvPr/>
         </p:nvCxnSpPr>
         <p:spPr>
           <a:xfrm flipH="1">
-            <a:off x="7756838" y="4567528"/>
-            <a:ext cx="2459507" cy="639472"/>
+            <a:off x="7896359" y="4452154"/>
+            <a:ext cx="2414788" cy="627846"/>
           </a:xfrm>
           <a:prstGeom prst="line">
             <a:avLst/>
@@ -6984,13 +6876,13 @@
       </p:cxnSp>
       <p:sp>
         <p:nvSpPr>
-          <p:cNvPr id="36" name="Oval 35"/>
+          <p:cNvPr id="35" name="Oval 34"/>
           <p:cNvSpPr/>
           <p:nvPr/>
         </p:nvSpPr>
         <p:spPr>
           <a:xfrm>
-            <a:off x="8878636" y="4819368"/>
+            <a:off x="8995798" y="4698181"/>
             <a:ext cx="292608" cy="292608"/>
           </a:xfrm>
           <a:prstGeom prst="ellipse">
@@ -7028,14 +6920,14 @@
       </p:sp>
       <p:sp>
         <p:nvSpPr>
-          <p:cNvPr id="37" name="TextBox 36"/>
-          <p:cNvSpPr txBox="1"/>
-          <p:nvPr/>
-        </p:nvSpPr>
-        <p:spPr>
-          <a:xfrm>
-            <a:off x="8904036" y="4827496"/>
-            <a:ext cx="241808" cy="274320"/>
+          <p:cNvPr id="36" name="TextBox 35"/>
+          <p:cNvSpPr txBox="1"/>
+          <p:nvPr/>
+        </p:nvSpPr>
+        <p:spPr>
+          <a:xfrm>
+            <a:off x="9020817" y="4706309"/>
+            <a:ext cx="242570" cy="274320"/>
           </a:xfrm>
           <a:prstGeom prst="rect">
             <a:avLst/>
@@ -7064,13 +6956,13 @@
       </p:sp>
       <p:sp>
         <p:nvSpPr>
-          <p:cNvPr id="38" name="Oval 37"/>
+          <p:cNvPr id="37" name="Oval 36"/>
           <p:cNvSpPr/>
           <p:nvPr/>
         </p:nvSpPr>
         <p:spPr>
           <a:xfrm>
-            <a:off x="6420654" y="1608070"/>
+            <a:off x="6579852" y="1541887"/>
             <a:ext cx="508000" cy="508000"/>
           </a:xfrm>
           <a:prstGeom prst="ellipse">
@@ -7108,14 +7000,14 @@
       </p:sp>
       <p:sp>
         <p:nvSpPr>
-          <p:cNvPr id="39" name="TextBox 38"/>
-          <p:cNvSpPr txBox="1"/>
-          <p:nvPr/>
-        </p:nvSpPr>
-        <p:spPr>
-          <a:xfrm>
-            <a:off x="6539825" y="1719576"/>
-            <a:ext cx="269659" cy="291465"/>
+          <p:cNvPr id="38" name="TextBox 37"/>
+          <p:cNvSpPr txBox="1"/>
+          <p:nvPr/>
+        </p:nvSpPr>
+        <p:spPr>
+          <a:xfrm>
+            <a:off x="6699232" y="1653393"/>
+            <a:ext cx="269240" cy="291465"/>
           </a:xfrm>
           <a:prstGeom prst="rect">
             <a:avLst/>
@@ -7144,13 +7036,13 @@
       </p:sp>
       <p:sp>
         <p:nvSpPr>
-          <p:cNvPr id="40" name="Oval 39"/>
+          <p:cNvPr id="39" name="Oval 38"/>
           <p:cNvSpPr/>
           <p:nvPr/>
         </p:nvSpPr>
         <p:spPr>
           <a:xfrm>
-            <a:off x="8585021" y="1460500"/>
+            <a:off x="8704866" y="1397000"/>
             <a:ext cx="508000" cy="508000"/>
           </a:xfrm>
           <a:prstGeom prst="ellipse">
@@ -7188,14 +7080,14 @@
       </p:sp>
       <p:sp>
         <p:nvSpPr>
-          <p:cNvPr id="41" name="TextBox 40"/>
-          <p:cNvSpPr txBox="1"/>
-          <p:nvPr/>
-        </p:nvSpPr>
-        <p:spPr>
-          <a:xfrm>
-            <a:off x="8700737" y="1572006"/>
-            <a:ext cx="276567" cy="291465"/>
+          <p:cNvPr id="40" name="TextBox 39"/>
+          <p:cNvSpPr txBox="1"/>
+          <p:nvPr/>
+        </p:nvSpPr>
+        <p:spPr>
+          <a:xfrm>
+            <a:off x="8821071" y="1508506"/>
+            <a:ext cx="275590" cy="291465"/>
           </a:xfrm>
           <a:prstGeom prst="rect">
             <a:avLst/>
@@ -7224,13 +7116,13 @@
       </p:sp>
       <p:sp>
         <p:nvSpPr>
-          <p:cNvPr id="42" name="Oval 41"/>
+          <p:cNvPr id="41" name="Oval 40"/>
           <p:cNvSpPr/>
           <p:nvPr/>
         </p:nvSpPr>
         <p:spPr>
           <a:xfrm>
-            <a:off x="7748788" y="3280535"/>
+            <a:off x="7883838" y="3183943"/>
             <a:ext cx="508000" cy="508000"/>
           </a:xfrm>
           <a:prstGeom prst="ellipse">
@@ -7268,14 +7160,14 @@
       </p:sp>
       <p:sp>
         <p:nvSpPr>
-          <p:cNvPr id="43" name="TextBox 42"/>
-          <p:cNvSpPr txBox="1"/>
-          <p:nvPr/>
-        </p:nvSpPr>
-        <p:spPr>
-          <a:xfrm>
-            <a:off x="7867203" y="3392041"/>
-            <a:ext cx="271170" cy="291465"/>
+          <p:cNvPr id="42" name="TextBox 41"/>
+          <p:cNvSpPr txBox="1"/>
+          <p:nvPr/>
+        </p:nvSpPr>
+        <p:spPr>
+          <a:xfrm>
+            <a:off x="8003218" y="3295449"/>
+            <a:ext cx="269240" cy="291465"/>
           </a:xfrm>
           <a:prstGeom prst="rect">
             <a:avLst/>
@@ -7304,13 +7196,13 @@
       </p:sp>
       <p:sp>
         <p:nvSpPr>
-          <p:cNvPr id="44" name="Oval 43"/>
+          <p:cNvPr id="43" name="Oval 42"/>
           <p:cNvSpPr/>
           <p:nvPr/>
         </p:nvSpPr>
         <p:spPr>
           <a:xfrm>
-            <a:off x="9962345" y="4313528"/>
+            <a:off x="10057147" y="4198154"/>
             <a:ext cx="508000" cy="508000"/>
           </a:xfrm>
           <a:prstGeom prst="ellipse">
@@ -7348,14 +7240,14 @@
       </p:sp>
       <p:sp>
         <p:nvSpPr>
-          <p:cNvPr id="45" name="TextBox 44"/>
-          <p:cNvSpPr txBox="1"/>
-          <p:nvPr/>
-        </p:nvSpPr>
-        <p:spPr>
-          <a:xfrm>
-            <a:off x="10074498" y="4425034"/>
-            <a:ext cx="283692" cy="291465"/>
+          <p:cNvPr id="44" name="TextBox 43"/>
+          <p:cNvSpPr txBox="1"/>
+          <p:nvPr/>
+        </p:nvSpPr>
+        <p:spPr>
+          <a:xfrm>
+            <a:off x="10170177" y="4309660"/>
+            <a:ext cx="281939" cy="291465"/>
           </a:xfrm>
           <a:prstGeom prst="rect">
             <a:avLst/>
@@ -7384,13 +7276,13 @@
       </p:sp>
       <p:sp>
         <p:nvSpPr>
-          <p:cNvPr id="46" name="Oval 45"/>
+          <p:cNvPr id="45" name="Oval 44"/>
           <p:cNvSpPr/>
           <p:nvPr/>
         </p:nvSpPr>
         <p:spPr>
           <a:xfrm>
-            <a:off x="7502838" y="4953000"/>
+            <a:off x="7642359" y="4826000"/>
             <a:ext cx="508000" cy="508000"/>
           </a:xfrm>
           <a:prstGeom prst="ellipse">
@@ -7428,14 +7320,14 @@
       </p:sp>
       <p:sp>
         <p:nvSpPr>
-          <p:cNvPr id="47" name="TextBox 46"/>
-          <p:cNvSpPr txBox="1"/>
-          <p:nvPr/>
-        </p:nvSpPr>
-        <p:spPr>
-          <a:xfrm>
-            <a:off x="7625678" y="5064506"/>
-            <a:ext cx="262318" cy="291465"/>
+          <p:cNvPr id="46" name="TextBox 45"/>
+          <p:cNvSpPr txBox="1"/>
+          <p:nvPr/>
+        </p:nvSpPr>
+        <p:spPr>
+          <a:xfrm>
+            <a:off x="7764914" y="4937506"/>
+            <a:ext cx="262890" cy="291465"/>
           </a:xfrm>
           <a:prstGeom prst="rect">
             <a:avLst/>
@@ -7575,7 +7467,7 @@
         <p:spPr>
           <a:xfrm>
             <a:off x="553720" y="450088"/>
-            <a:ext cx="3793896" cy="480060"/>
+            <a:ext cx="3807460" cy="480060"/>
           </a:xfrm>
           <a:prstGeom prst="rect">
             <a:avLst/>
@@ -7688,7 +7580,7 @@
         <p:spPr>
           <a:xfrm>
             <a:off x="563880" y="6512052"/>
-            <a:ext cx="1503426" cy="205740"/>
+            <a:ext cx="1494790" cy="205740"/>
           </a:xfrm>
           <a:prstGeom prst="rect">
             <a:avLst/>
@@ -7723,8 +7615,8 @@
         </p:nvSpPr>
         <p:spPr>
           <a:xfrm>
-            <a:off x="11108524" y="6499098"/>
-            <a:ext cx="561505" cy="222885"/>
+            <a:off x="11113770" y="6499098"/>
+            <a:ext cx="556260" cy="222885"/>
           </a:xfrm>
           <a:prstGeom prst="rect">
             <a:avLst/>
@@ -7753,43 +7645,7 @@
       </p:sp>
       <p:sp>
         <p:nvSpPr>
-          <p:cNvPr id="9" name="TextBox 8"/>
-          <p:cNvSpPr txBox="1"/>
-          <p:nvPr/>
-        </p:nvSpPr>
-        <p:spPr>
-          <a:xfrm>
-            <a:off x="10855147" y="377952"/>
-            <a:ext cx="811072" cy="205740"/>
-          </a:xfrm>
-          <a:prstGeom prst="rect">
-            <a:avLst/>
-          </a:prstGeom>
-          <a:noFill/>
-        </p:spPr>
-        <p:txBody>
-          <a:bodyPr wrap="none" lIns="0" rIns="0" tIns="0" bIns="0">
-            <a:spAutoFit/>
-          </a:bodyPr>
-          <a:lstStyle/>
-          <a:p>
-            <a:pPr algn="r"/>
-            <a:r>
-              <a:rPr sz="1200" b="0">
-                <a:solidFill>
-                  <a:srgbClr val="6F8F8F"/>
-                </a:solidFill>
-                <a:latin typeface="Noto Sans SC"/>
-                <a:ea typeface="Noto Sans SC"/>
-              </a:rPr>
-              <a:t>影片 00:38</a:t>
-            </a:r>
-          </a:p>
-        </p:txBody>
-      </p:sp>
-      <p:sp>
-        <p:nvSpPr>
-          <p:cNvPr id="10" name="Oval 9"/>
+          <p:cNvPr id="9" name="Oval 8"/>
           <p:cNvSpPr/>
           <p:nvPr/>
         </p:nvSpPr>
@@ -7831,7 +7687,7 @@
       </p:sp>
       <p:sp>
         <p:nvSpPr>
-          <p:cNvPr id="11" name="TextBox 10"/>
+          <p:cNvPr id="10" name="TextBox 9"/>
           <p:cNvSpPr txBox="1"/>
           <p:nvPr/>
         </p:nvSpPr>
@@ -7871,7 +7727,7 @@
       </p:sp>
       <p:sp>
         <p:nvSpPr>
-          <p:cNvPr id="12" name="Oval 11"/>
+          <p:cNvPr id="11" name="Oval 10"/>
           <p:cNvSpPr/>
           <p:nvPr/>
         </p:nvSpPr>
@@ -7913,7 +7769,7 @@
       </p:sp>
       <p:sp>
         <p:nvSpPr>
-          <p:cNvPr id="13" name="TextBox 12"/>
+          <p:cNvPr id="12" name="TextBox 11"/>
           <p:cNvSpPr txBox="1"/>
           <p:nvPr/>
         </p:nvSpPr>
@@ -7953,7 +7809,7 @@
       </p:sp>
       <p:sp>
         <p:nvSpPr>
-          <p:cNvPr id="14" name="Oval 13"/>
+          <p:cNvPr id="13" name="Oval 12"/>
           <p:cNvSpPr/>
           <p:nvPr/>
         </p:nvSpPr>
@@ -7995,7 +7851,7 @@
       </p:sp>
       <p:sp>
         <p:nvSpPr>
-          <p:cNvPr id="15" name="TextBox 14"/>
+          <p:cNvPr id="14" name="TextBox 13"/>
           <p:cNvSpPr txBox="1"/>
           <p:nvPr/>
         </p:nvSpPr>
@@ -8035,7 +7891,7 @@
       </p:sp>
       <p:sp>
         <p:nvSpPr>
-          <p:cNvPr id="16" name="Oval 15"/>
+          <p:cNvPr id="15" name="Oval 14"/>
           <p:cNvSpPr/>
           <p:nvPr/>
         </p:nvSpPr>
@@ -8077,7 +7933,7 @@
       </p:sp>
       <p:sp>
         <p:nvSpPr>
-          <p:cNvPr id="17" name="TextBox 16"/>
+          <p:cNvPr id="16" name="TextBox 15"/>
           <p:cNvSpPr txBox="1"/>
           <p:nvPr/>
         </p:nvSpPr>
@@ -8117,7 +7973,7 @@
       </p:sp>
       <p:sp>
         <p:nvSpPr>
-          <p:cNvPr id="18" name="Oval 17"/>
+          <p:cNvPr id="17" name="Oval 16"/>
           <p:cNvSpPr/>
           <p:nvPr/>
         </p:nvSpPr>
@@ -8159,7 +8015,7 @@
       </p:sp>
       <p:sp>
         <p:nvSpPr>
-          <p:cNvPr id="19" name="TextBox 18"/>
+          <p:cNvPr id="18" name="TextBox 17"/>
           <p:cNvSpPr txBox="1"/>
           <p:nvPr/>
         </p:nvSpPr>
@@ -8199,14 +8055,50 @@
       </p:sp>
       <p:sp>
         <p:nvSpPr>
+          <p:cNvPr id="19" name="TextBox 18"/>
+          <p:cNvSpPr txBox="1"/>
+          <p:nvPr/>
+        </p:nvSpPr>
+        <p:spPr>
+          <a:xfrm>
+            <a:off x="6602095" y="1368298"/>
+            <a:ext cx="207010" cy="222885"/>
+          </a:xfrm>
+          <a:prstGeom prst="rect">
+            <a:avLst/>
+          </a:prstGeom>
+          <a:noFill/>
+        </p:spPr>
+        <p:txBody>
+          <a:bodyPr wrap="none" lIns="0" rIns="0" tIns="0" bIns="0">
+            <a:spAutoFit/>
+          </a:bodyPr>
+          <a:lstStyle/>
+          <a:p>
+            <a:pPr algn="ctr"/>
+            <a:r>
+              <a:rPr sz="1300" b="1">
+                <a:solidFill>
+                  <a:srgbClr val="BCD2D0"/>
+                </a:solidFill>
+                <a:latin typeface="Noto Sans SC"/>
+                <a:ea typeface="Noto Sans SC"/>
+              </a:rPr>
+              <a:t>A</a:t>
+            </a:r>
+          </a:p>
+        </p:txBody>
+      </p:sp>
+      <p:sp>
+        <p:nvSpPr>
           <p:cNvPr id="20" name="TextBox 19"/>
           <p:cNvSpPr txBox="1"/>
           <p:nvPr/>
         </p:nvSpPr>
         <p:spPr>
           <a:xfrm>
-            <a:off x="6602495" y="1368298"/>
-            <a:ext cx="206209" cy="222885"/>
+            <a:off x="6055995" y="1923542"/>
+            <a:ext cx="207010" cy="222885"/>
           </a:xfrm>
           <a:prstGeom prst="rect">
             <a:avLst/>
@@ -8241,8 +8133,8 @@
         </p:nvSpPr>
         <p:spPr>
           <a:xfrm>
-            <a:off x="6056395" y="1923542"/>
-            <a:ext cx="206209" cy="222885"/>
+            <a:off x="7310120" y="1368298"/>
+            <a:ext cx="213360" cy="222885"/>
           </a:xfrm>
           <a:prstGeom prst="rect">
             <a:avLst/>
@@ -8264,7 +8156,7 @@
                 <a:latin typeface="Noto Sans SC"/>
                 <a:ea typeface="Noto Sans SC"/>
               </a:rPr>
-              <a:t>A</a:t>
+              <a:t>B</a:t>
             </a:r>
           </a:p>
         </p:txBody>
@@ -8277,8 +8169,8 @@
         </p:nvSpPr>
         <p:spPr>
           <a:xfrm>
-            <a:off x="7311053" y="1368298"/>
-            <a:ext cx="211493" cy="222885"/>
+            <a:off x="6052820" y="2634742"/>
+            <a:ext cx="213360" cy="222885"/>
           </a:xfrm>
           <a:prstGeom prst="rect">
             <a:avLst/>
@@ -8313,8 +8205,8 @@
         </p:nvSpPr>
         <p:spPr>
           <a:xfrm>
-            <a:off x="6053753" y="2634742"/>
-            <a:ext cx="211493" cy="222885"/>
+            <a:off x="8024495" y="1368298"/>
+            <a:ext cx="207010" cy="222885"/>
           </a:xfrm>
           <a:prstGeom prst="rect">
             <a:avLst/>
@@ -8336,7 +8228,7 @@
                 <a:latin typeface="Noto Sans SC"/>
                 <a:ea typeface="Noto Sans SC"/>
               </a:rPr>
-              <a:t>B</a:t>
+              <a:t>C</a:t>
             </a:r>
           </a:p>
         </p:txBody>
@@ -8349,8 +8241,8 @@
         </p:nvSpPr>
         <p:spPr>
           <a:xfrm>
-            <a:off x="8024317" y="1368298"/>
-            <a:ext cx="207365" cy="222885"/>
+            <a:off x="6055995" y="3345942"/>
+            <a:ext cx="207010" cy="222885"/>
           </a:xfrm>
           <a:prstGeom prst="rect">
             <a:avLst/>
@@ -8385,8 +8277,8 @@
         </p:nvSpPr>
         <p:spPr>
           <a:xfrm>
-            <a:off x="6055817" y="3345942"/>
-            <a:ext cx="207365" cy="222885"/>
+            <a:off x="8729345" y="1368298"/>
+            <a:ext cx="219710" cy="222885"/>
           </a:xfrm>
           <a:prstGeom prst="rect">
             <a:avLst/>
@@ -8408,7 +8300,7 @@
                 <a:latin typeface="Noto Sans SC"/>
                 <a:ea typeface="Noto Sans SC"/>
               </a:rPr>
-              <a:t>C</a:t>
+              <a:t>D</a:t>
             </a:r>
           </a:p>
         </p:txBody>
@@ -8421,8 +8313,8 @@
         </p:nvSpPr>
         <p:spPr>
           <a:xfrm>
-            <a:off x="8730729" y="1368298"/>
-            <a:ext cx="216941" cy="222885"/>
+            <a:off x="6049645" y="4057142"/>
+            <a:ext cx="219710" cy="222885"/>
           </a:xfrm>
           <a:prstGeom prst="rect">
             <a:avLst/>
@@ -8457,8 +8349,8 @@
         </p:nvSpPr>
         <p:spPr>
           <a:xfrm>
-            <a:off x="6051029" y="4057142"/>
-            <a:ext cx="216941" cy="222885"/>
+            <a:off x="9450070" y="1368298"/>
+            <a:ext cx="200660" cy="222885"/>
           </a:xfrm>
           <a:prstGeom prst="rect">
             <a:avLst/>
@@ -8480,7 +8372,7 @@
                 <a:latin typeface="Noto Sans SC"/>
                 <a:ea typeface="Noto Sans SC"/>
               </a:rPr>
-              <a:t>D</a:t>
+              <a:t>E</a:t>
             </a:r>
           </a:p>
         </p:txBody>
@@ -8493,8 +8385,8 @@
         </p:nvSpPr>
         <p:spPr>
           <a:xfrm>
-            <a:off x="9450101" y="1368298"/>
-            <a:ext cx="200596" cy="222885"/>
+            <a:off x="6059170" y="4768342"/>
+            <a:ext cx="200660" cy="222885"/>
           </a:xfrm>
           <a:prstGeom prst="rect">
             <a:avLst/>
@@ -8523,43 +8415,7 @@
       </p:sp>
       <p:sp>
         <p:nvSpPr>
-          <p:cNvPr id="29" name="TextBox 28"/>
-          <p:cNvSpPr txBox="1"/>
-          <p:nvPr/>
-        </p:nvSpPr>
-        <p:spPr>
-          <a:xfrm>
-            <a:off x="6059201" y="4768342"/>
-            <a:ext cx="200596" cy="222885"/>
-          </a:xfrm>
-          <a:prstGeom prst="rect">
-            <a:avLst/>
-          </a:prstGeom>
-          <a:noFill/>
-        </p:spPr>
-        <p:txBody>
-          <a:bodyPr wrap="none" lIns="0" rIns="0" tIns="0" bIns="0">
-            <a:spAutoFit/>
-          </a:bodyPr>
-          <a:lstStyle/>
-          <a:p>
-            <a:pPr algn="ctr"/>
-            <a:r>
-              <a:rPr sz="1300" b="1">
-                <a:solidFill>
-                  <a:srgbClr val="BCD2D0"/>
-                </a:solidFill>
-                <a:latin typeface="Noto Sans SC"/>
-                <a:ea typeface="Noto Sans SC"/>
-              </a:rPr>
-              <a:t>E</a:t>
-            </a:r>
-          </a:p>
-        </p:txBody>
-      </p:sp>
-      <p:sp>
-        <p:nvSpPr>
-          <p:cNvPr id="30" name="Rounded Rectangle 29"/>
+          <p:cNvPr id="29" name="Rounded Rectangle 28"/>
           <p:cNvSpPr/>
           <p:nvPr/>
         </p:nvSpPr>
@@ -8605,14 +8461,14 @@
       </p:sp>
       <p:sp>
         <p:nvSpPr>
-          <p:cNvPr id="31" name="TextBox 30"/>
-          <p:cNvSpPr txBox="1"/>
-          <p:nvPr/>
-        </p:nvSpPr>
-        <p:spPr>
-          <a:xfrm>
-            <a:off x="6558089" y="1871726"/>
-            <a:ext cx="256920" cy="291465"/>
+          <p:cNvPr id="30" name="TextBox 29"/>
+          <p:cNvSpPr txBox="1"/>
+          <p:nvPr/>
+        </p:nvSpPr>
+        <p:spPr>
+          <a:xfrm>
+            <a:off x="6558280" y="1871726"/>
+            <a:ext cx="256540" cy="291465"/>
           </a:xfrm>
           <a:prstGeom prst="rect">
             <a:avLst/>
@@ -8641,7 +8497,7 @@
       </p:sp>
       <p:sp>
         <p:nvSpPr>
-          <p:cNvPr id="32" name="Rounded Rectangle 31"/>
+          <p:cNvPr id="31" name="Rounded Rectangle 30"/>
           <p:cNvSpPr/>
           <p:nvPr/>
         </p:nvSpPr>
@@ -8687,14 +8543,14 @@
       </p:sp>
       <p:sp>
         <p:nvSpPr>
-          <p:cNvPr id="33" name="TextBox 32"/>
-          <p:cNvSpPr txBox="1"/>
-          <p:nvPr/>
-        </p:nvSpPr>
-        <p:spPr>
-          <a:xfrm>
-            <a:off x="7213155" y="1871726"/>
-            <a:ext cx="369189" cy="291465"/>
+          <p:cNvPr id="32" name="TextBox 31"/>
+          <p:cNvSpPr txBox="1"/>
+          <p:nvPr/>
+        </p:nvSpPr>
+        <p:spPr>
+          <a:xfrm>
+            <a:off x="7212330" y="1871726"/>
+            <a:ext cx="370840" cy="291465"/>
           </a:xfrm>
           <a:prstGeom prst="rect">
             <a:avLst/>
@@ -8723,7 +8579,7 @@
       </p:sp>
       <p:sp>
         <p:nvSpPr>
-          <p:cNvPr id="34" name="Rounded Rectangle 33"/>
+          <p:cNvPr id="33" name="Rounded Rectangle 32"/>
           <p:cNvSpPr/>
           <p:nvPr/>
         </p:nvSpPr>
@@ -8769,14 +8625,14 @@
       </p:sp>
       <p:sp>
         <p:nvSpPr>
-          <p:cNvPr id="35" name="TextBox 34"/>
-          <p:cNvSpPr txBox="1"/>
-          <p:nvPr/>
-        </p:nvSpPr>
-        <p:spPr>
-          <a:xfrm>
-            <a:off x="7924355" y="1871726"/>
-            <a:ext cx="369189" cy="291465"/>
+          <p:cNvPr id="34" name="TextBox 33"/>
+          <p:cNvSpPr txBox="1"/>
+          <p:nvPr/>
+        </p:nvSpPr>
+        <p:spPr>
+          <a:xfrm>
+            <a:off x="7923530" y="1871726"/>
+            <a:ext cx="370840" cy="291465"/>
           </a:xfrm>
           <a:prstGeom prst="rect">
             <a:avLst/>
@@ -8805,7 +8661,7 @@
       </p:sp>
       <p:sp>
         <p:nvSpPr>
-          <p:cNvPr id="36" name="Rounded Rectangle 35"/>
+          <p:cNvPr id="35" name="Rounded Rectangle 34"/>
           <p:cNvSpPr/>
           <p:nvPr/>
         </p:nvSpPr>
@@ -8851,14 +8707,14 @@
       </p:sp>
       <p:sp>
         <p:nvSpPr>
-          <p:cNvPr id="37" name="TextBox 36"/>
-          <p:cNvSpPr txBox="1"/>
-          <p:nvPr/>
-        </p:nvSpPr>
-        <p:spPr>
-          <a:xfrm>
-            <a:off x="8695467" y="1871726"/>
-            <a:ext cx="249364" cy="291465"/>
+          <p:cNvPr id="36" name="TextBox 35"/>
+          <p:cNvSpPr txBox="1"/>
+          <p:nvPr/>
+        </p:nvSpPr>
+        <p:spPr>
+          <a:xfrm>
+            <a:off x="8695055" y="1871726"/>
+            <a:ext cx="250190" cy="291465"/>
           </a:xfrm>
           <a:prstGeom prst="rect">
             <a:avLst/>
@@ -8887,7 +8743,7 @@
       </p:sp>
       <p:sp>
         <p:nvSpPr>
-          <p:cNvPr id="38" name="Rounded Rectangle 37"/>
+          <p:cNvPr id="37" name="Rounded Rectangle 36"/>
           <p:cNvSpPr/>
           <p:nvPr/>
         </p:nvSpPr>
@@ -8933,14 +8789,14 @@
       </p:sp>
       <p:sp>
         <p:nvSpPr>
-          <p:cNvPr id="39" name="TextBox 38"/>
-          <p:cNvSpPr txBox="1"/>
-          <p:nvPr/>
-        </p:nvSpPr>
-        <p:spPr>
-          <a:xfrm>
-            <a:off x="9406667" y="1871726"/>
-            <a:ext cx="249364" cy="291465"/>
+          <p:cNvPr id="38" name="TextBox 37"/>
+          <p:cNvSpPr txBox="1"/>
+          <p:nvPr/>
+        </p:nvSpPr>
+        <p:spPr>
+          <a:xfrm>
+            <a:off x="9406255" y="1871726"/>
+            <a:ext cx="250190" cy="291465"/>
           </a:xfrm>
           <a:prstGeom prst="rect">
             <a:avLst/>
@@ -8969,7 +8825,7 @@
       </p:sp>
       <p:sp>
         <p:nvSpPr>
-          <p:cNvPr id="40" name="Rounded Rectangle 39"/>
+          <p:cNvPr id="39" name="Rounded Rectangle 38"/>
           <p:cNvSpPr/>
           <p:nvPr/>
         </p:nvSpPr>
@@ -9015,14 +8871,14 @@
       </p:sp>
       <p:sp>
         <p:nvSpPr>
-          <p:cNvPr id="41" name="TextBox 40"/>
-          <p:cNvSpPr txBox="1"/>
-          <p:nvPr/>
-        </p:nvSpPr>
-        <p:spPr>
-          <a:xfrm>
-            <a:off x="6501955" y="2582926"/>
-            <a:ext cx="369189" cy="291465"/>
+          <p:cNvPr id="40" name="TextBox 39"/>
+          <p:cNvSpPr txBox="1"/>
+          <p:nvPr/>
+        </p:nvSpPr>
+        <p:spPr>
+          <a:xfrm>
+            <a:off x="6501130" y="2582926"/>
+            <a:ext cx="370840" cy="291465"/>
           </a:xfrm>
           <a:prstGeom prst="rect">
             <a:avLst/>
@@ -9051,7 +8907,7 @@
       </p:sp>
       <p:sp>
         <p:nvSpPr>
-          <p:cNvPr id="42" name="Rounded Rectangle 41"/>
+          <p:cNvPr id="41" name="Rounded Rectangle 40"/>
           <p:cNvSpPr/>
           <p:nvPr/>
         </p:nvSpPr>
@@ -9097,14 +8953,14 @@
       </p:sp>
       <p:sp>
         <p:nvSpPr>
-          <p:cNvPr id="43" name="TextBox 42"/>
-          <p:cNvSpPr txBox="1"/>
-          <p:nvPr/>
-        </p:nvSpPr>
-        <p:spPr>
-          <a:xfrm>
-            <a:off x="7269289" y="2582926"/>
-            <a:ext cx="256920" cy="291465"/>
+          <p:cNvPr id="42" name="TextBox 41"/>
+          <p:cNvSpPr txBox="1"/>
+          <p:nvPr/>
+        </p:nvSpPr>
+        <p:spPr>
+          <a:xfrm>
+            <a:off x="7269480" y="2582926"/>
+            <a:ext cx="256540" cy="291465"/>
           </a:xfrm>
           <a:prstGeom prst="rect">
             <a:avLst/>
@@ -9133,7 +8989,7 @@
       </p:sp>
       <p:sp>
         <p:nvSpPr>
-          <p:cNvPr id="44" name="Rounded Rectangle 43"/>
+          <p:cNvPr id="43" name="Rounded Rectangle 42"/>
           <p:cNvSpPr/>
           <p:nvPr/>
         </p:nvSpPr>
@@ -9179,14 +9035,14 @@
       </p:sp>
       <p:sp>
         <p:nvSpPr>
-          <p:cNvPr id="45" name="TextBox 44"/>
-          <p:cNvSpPr txBox="1"/>
-          <p:nvPr/>
-        </p:nvSpPr>
-        <p:spPr>
-          <a:xfrm>
-            <a:off x="7924355" y="2582926"/>
-            <a:ext cx="369189" cy="291465"/>
+          <p:cNvPr id="44" name="TextBox 43"/>
+          <p:cNvSpPr txBox="1"/>
+          <p:nvPr/>
+        </p:nvSpPr>
+        <p:spPr>
+          <a:xfrm>
+            <a:off x="7923530" y="2582926"/>
+            <a:ext cx="370840" cy="291465"/>
           </a:xfrm>
           <a:prstGeom prst="rect">
             <a:avLst/>
@@ -9215,7 +9071,7 @@
       </p:sp>
       <p:sp>
         <p:nvSpPr>
-          <p:cNvPr id="46" name="Rounded Rectangle 45"/>
+          <p:cNvPr id="45" name="Rounded Rectangle 44"/>
           <p:cNvSpPr/>
           <p:nvPr/>
         </p:nvSpPr>
@@ -9261,14 +9117,14 @@
       </p:sp>
       <p:sp>
         <p:nvSpPr>
-          <p:cNvPr id="47" name="TextBox 46"/>
-          <p:cNvSpPr txBox="1"/>
-          <p:nvPr/>
-        </p:nvSpPr>
-        <p:spPr>
-          <a:xfrm>
-            <a:off x="8695467" y="2582926"/>
-            <a:ext cx="249364" cy="291465"/>
+          <p:cNvPr id="46" name="TextBox 45"/>
+          <p:cNvSpPr txBox="1"/>
+          <p:nvPr/>
+        </p:nvSpPr>
+        <p:spPr>
+          <a:xfrm>
+            <a:off x="8695055" y="2582926"/>
+            <a:ext cx="250190" cy="291465"/>
           </a:xfrm>
           <a:prstGeom prst="rect">
             <a:avLst/>
@@ -9297,7 +9153,7 @@
       </p:sp>
       <p:sp>
         <p:nvSpPr>
-          <p:cNvPr id="48" name="Rounded Rectangle 47"/>
+          <p:cNvPr id="47" name="Rounded Rectangle 46"/>
           <p:cNvSpPr/>
           <p:nvPr/>
         </p:nvSpPr>
@@ -9343,14 +9199,14 @@
       </p:sp>
       <p:sp>
         <p:nvSpPr>
-          <p:cNvPr id="49" name="TextBox 48"/>
-          <p:cNvSpPr txBox="1"/>
-          <p:nvPr/>
-        </p:nvSpPr>
-        <p:spPr>
-          <a:xfrm>
-            <a:off x="9406667" y="2582926"/>
-            <a:ext cx="249364" cy="291465"/>
+          <p:cNvPr id="48" name="TextBox 47"/>
+          <p:cNvSpPr txBox="1"/>
+          <p:nvPr/>
+        </p:nvSpPr>
+        <p:spPr>
+          <a:xfrm>
+            <a:off x="9406255" y="2582926"/>
+            <a:ext cx="250190" cy="291465"/>
           </a:xfrm>
           <a:prstGeom prst="rect">
             <a:avLst/>
@@ -9379,7 +9235,7 @@
       </p:sp>
       <p:sp>
         <p:nvSpPr>
-          <p:cNvPr id="50" name="Rounded Rectangle 49"/>
+          <p:cNvPr id="49" name="Rounded Rectangle 48"/>
           <p:cNvSpPr/>
           <p:nvPr/>
         </p:nvSpPr>
@@ -9425,14 +9281,14 @@
       </p:sp>
       <p:sp>
         <p:nvSpPr>
-          <p:cNvPr id="51" name="TextBox 50"/>
-          <p:cNvSpPr txBox="1"/>
-          <p:nvPr/>
-        </p:nvSpPr>
-        <p:spPr>
-          <a:xfrm>
-            <a:off x="6501955" y="3294126"/>
-            <a:ext cx="369189" cy="291465"/>
+          <p:cNvPr id="50" name="TextBox 49"/>
+          <p:cNvSpPr txBox="1"/>
+          <p:nvPr/>
+        </p:nvSpPr>
+        <p:spPr>
+          <a:xfrm>
+            <a:off x="6501130" y="3294126"/>
+            <a:ext cx="370840" cy="291465"/>
           </a:xfrm>
           <a:prstGeom prst="rect">
             <a:avLst/>
@@ -9461,7 +9317,7 @@
       </p:sp>
       <p:sp>
         <p:nvSpPr>
-          <p:cNvPr id="52" name="Rounded Rectangle 51"/>
+          <p:cNvPr id="51" name="Rounded Rectangle 50"/>
           <p:cNvSpPr/>
           <p:nvPr/>
         </p:nvSpPr>
@@ -9507,14 +9363,14 @@
       </p:sp>
       <p:sp>
         <p:nvSpPr>
-          <p:cNvPr id="53" name="TextBox 52"/>
-          <p:cNvSpPr txBox="1"/>
-          <p:nvPr/>
-        </p:nvSpPr>
-        <p:spPr>
-          <a:xfrm>
-            <a:off x="7213155" y="3294126"/>
-            <a:ext cx="369189" cy="291465"/>
+          <p:cNvPr id="52" name="TextBox 51"/>
+          <p:cNvSpPr txBox="1"/>
+          <p:nvPr/>
+        </p:nvSpPr>
+        <p:spPr>
+          <a:xfrm>
+            <a:off x="7212330" y="3294126"/>
+            <a:ext cx="370840" cy="291465"/>
           </a:xfrm>
           <a:prstGeom prst="rect">
             <a:avLst/>
@@ -9543,7 +9399,7 @@
       </p:sp>
       <p:sp>
         <p:nvSpPr>
-          <p:cNvPr id="54" name="Rounded Rectangle 53"/>
+          <p:cNvPr id="53" name="Rounded Rectangle 52"/>
           <p:cNvSpPr/>
           <p:nvPr/>
         </p:nvSpPr>
@@ -9589,14 +9445,14 @@
       </p:sp>
       <p:sp>
         <p:nvSpPr>
-          <p:cNvPr id="55" name="TextBox 54"/>
-          <p:cNvSpPr txBox="1"/>
-          <p:nvPr/>
-        </p:nvSpPr>
-        <p:spPr>
-          <a:xfrm>
-            <a:off x="7980489" y="3294126"/>
-            <a:ext cx="256920" cy="291465"/>
+          <p:cNvPr id="54" name="TextBox 53"/>
+          <p:cNvSpPr txBox="1"/>
+          <p:nvPr/>
+        </p:nvSpPr>
+        <p:spPr>
+          <a:xfrm>
+            <a:off x="7980680" y="3294126"/>
+            <a:ext cx="256540" cy="291465"/>
           </a:xfrm>
           <a:prstGeom prst="rect">
             <a:avLst/>
@@ -9625,7 +9481,7 @@
       </p:sp>
       <p:sp>
         <p:nvSpPr>
-          <p:cNvPr id="56" name="Rounded Rectangle 55"/>
+          <p:cNvPr id="55" name="Rounded Rectangle 54"/>
           <p:cNvSpPr/>
           <p:nvPr/>
         </p:nvSpPr>
@@ -9671,14 +9527,14 @@
       </p:sp>
       <p:sp>
         <p:nvSpPr>
-          <p:cNvPr id="57" name="TextBox 56"/>
-          <p:cNvSpPr txBox="1"/>
-          <p:nvPr/>
-        </p:nvSpPr>
-        <p:spPr>
-          <a:xfrm>
-            <a:off x="8635555" y="3294126"/>
-            <a:ext cx="369189" cy="291465"/>
+          <p:cNvPr id="56" name="TextBox 55"/>
+          <p:cNvSpPr txBox="1"/>
+          <p:nvPr/>
+        </p:nvSpPr>
+        <p:spPr>
+          <a:xfrm>
+            <a:off x="8634730" y="3294126"/>
+            <a:ext cx="370840" cy="291465"/>
           </a:xfrm>
           <a:prstGeom prst="rect">
             <a:avLst/>
@@ -9707,7 +9563,7 @@
       </p:sp>
       <p:sp>
         <p:nvSpPr>
-          <p:cNvPr id="58" name="Rounded Rectangle 57"/>
+          <p:cNvPr id="57" name="Rounded Rectangle 56"/>
           <p:cNvSpPr/>
           <p:nvPr/>
         </p:nvSpPr>
@@ -9753,14 +9609,14 @@
       </p:sp>
       <p:sp>
         <p:nvSpPr>
-          <p:cNvPr id="59" name="TextBox 58"/>
-          <p:cNvSpPr txBox="1"/>
-          <p:nvPr/>
-        </p:nvSpPr>
-        <p:spPr>
-          <a:xfrm>
-            <a:off x="9346755" y="3294126"/>
-            <a:ext cx="369189" cy="291465"/>
+          <p:cNvPr id="58" name="TextBox 57"/>
+          <p:cNvSpPr txBox="1"/>
+          <p:nvPr/>
+        </p:nvSpPr>
+        <p:spPr>
+          <a:xfrm>
+            <a:off x="9345930" y="3294126"/>
+            <a:ext cx="370840" cy="291465"/>
           </a:xfrm>
           <a:prstGeom prst="rect">
             <a:avLst/>
@@ -9789,7 +9645,7 @@
       </p:sp>
       <p:sp>
         <p:nvSpPr>
-          <p:cNvPr id="60" name="Rounded Rectangle 59"/>
+          <p:cNvPr id="59" name="Rounded Rectangle 58"/>
           <p:cNvSpPr/>
           <p:nvPr/>
         </p:nvSpPr>
@@ -9835,14 +9691,14 @@
       </p:sp>
       <p:sp>
         <p:nvSpPr>
-          <p:cNvPr id="61" name="TextBox 60"/>
-          <p:cNvSpPr txBox="1"/>
-          <p:nvPr/>
-        </p:nvSpPr>
-        <p:spPr>
-          <a:xfrm>
-            <a:off x="6561867" y="4005326"/>
-            <a:ext cx="249364" cy="291465"/>
+          <p:cNvPr id="60" name="TextBox 59"/>
+          <p:cNvSpPr txBox="1"/>
+          <p:nvPr/>
+        </p:nvSpPr>
+        <p:spPr>
+          <a:xfrm>
+            <a:off x="6561455" y="4005326"/>
+            <a:ext cx="250190" cy="291465"/>
           </a:xfrm>
           <a:prstGeom prst="rect">
             <a:avLst/>
@@ -9871,7 +9727,7 @@
       </p:sp>
       <p:sp>
         <p:nvSpPr>
-          <p:cNvPr id="62" name="Rounded Rectangle 61"/>
+          <p:cNvPr id="61" name="Rounded Rectangle 60"/>
           <p:cNvSpPr/>
           <p:nvPr/>
         </p:nvSpPr>
@@ -9917,14 +9773,14 @@
       </p:sp>
       <p:sp>
         <p:nvSpPr>
-          <p:cNvPr id="63" name="TextBox 62"/>
-          <p:cNvSpPr txBox="1"/>
-          <p:nvPr/>
-        </p:nvSpPr>
-        <p:spPr>
-          <a:xfrm>
-            <a:off x="7273067" y="4005326"/>
-            <a:ext cx="249364" cy="291465"/>
+          <p:cNvPr id="62" name="TextBox 61"/>
+          <p:cNvSpPr txBox="1"/>
+          <p:nvPr/>
+        </p:nvSpPr>
+        <p:spPr>
+          <a:xfrm>
+            <a:off x="7272655" y="4005326"/>
+            <a:ext cx="250190" cy="291465"/>
           </a:xfrm>
           <a:prstGeom prst="rect">
             <a:avLst/>
@@ -9953,7 +9809,7 @@
       </p:sp>
       <p:sp>
         <p:nvSpPr>
-          <p:cNvPr id="64" name="Rounded Rectangle 63"/>
+          <p:cNvPr id="63" name="Rounded Rectangle 62"/>
           <p:cNvSpPr/>
           <p:nvPr/>
         </p:nvSpPr>
@@ -9999,14 +9855,14 @@
       </p:sp>
       <p:sp>
         <p:nvSpPr>
-          <p:cNvPr id="65" name="TextBox 64"/>
-          <p:cNvSpPr txBox="1"/>
-          <p:nvPr/>
-        </p:nvSpPr>
-        <p:spPr>
-          <a:xfrm>
-            <a:off x="7924355" y="4005326"/>
-            <a:ext cx="369189" cy="291465"/>
+          <p:cNvPr id="64" name="TextBox 63"/>
+          <p:cNvSpPr txBox="1"/>
+          <p:nvPr/>
+        </p:nvSpPr>
+        <p:spPr>
+          <a:xfrm>
+            <a:off x="7923530" y="4005326"/>
+            <a:ext cx="370840" cy="291465"/>
           </a:xfrm>
           <a:prstGeom prst="rect">
             <a:avLst/>
@@ -10035,7 +9891,7 @@
       </p:sp>
       <p:sp>
         <p:nvSpPr>
-          <p:cNvPr id="66" name="Rounded Rectangle 65"/>
+          <p:cNvPr id="65" name="Rounded Rectangle 64"/>
           <p:cNvSpPr/>
           <p:nvPr/>
         </p:nvSpPr>
@@ -10081,14 +9937,14 @@
       </p:sp>
       <p:sp>
         <p:nvSpPr>
-          <p:cNvPr id="67" name="TextBox 66"/>
-          <p:cNvSpPr txBox="1"/>
-          <p:nvPr/>
-        </p:nvSpPr>
-        <p:spPr>
-          <a:xfrm>
-            <a:off x="8691689" y="4005326"/>
-            <a:ext cx="256920" cy="291465"/>
+          <p:cNvPr id="66" name="TextBox 65"/>
+          <p:cNvSpPr txBox="1"/>
+          <p:nvPr/>
+        </p:nvSpPr>
+        <p:spPr>
+          <a:xfrm>
+            <a:off x="8691880" y="4005326"/>
+            <a:ext cx="256540" cy="291465"/>
           </a:xfrm>
           <a:prstGeom prst="rect">
             <a:avLst/>
@@ -10117,7 +9973,7 @@
       </p:sp>
       <p:sp>
         <p:nvSpPr>
-          <p:cNvPr id="68" name="Rounded Rectangle 67"/>
+          <p:cNvPr id="67" name="Rounded Rectangle 66"/>
           <p:cNvSpPr/>
           <p:nvPr/>
         </p:nvSpPr>
@@ -10163,14 +10019,14 @@
       </p:sp>
       <p:sp>
         <p:nvSpPr>
-          <p:cNvPr id="69" name="TextBox 68"/>
-          <p:cNvSpPr txBox="1"/>
-          <p:nvPr/>
-        </p:nvSpPr>
-        <p:spPr>
-          <a:xfrm>
-            <a:off x="9346755" y="4005326"/>
-            <a:ext cx="369189" cy="291465"/>
+          <p:cNvPr id="68" name="TextBox 67"/>
+          <p:cNvSpPr txBox="1"/>
+          <p:nvPr/>
+        </p:nvSpPr>
+        <p:spPr>
+          <a:xfrm>
+            <a:off x="9345930" y="4005326"/>
+            <a:ext cx="370840" cy="291465"/>
           </a:xfrm>
           <a:prstGeom prst="rect">
             <a:avLst/>
@@ -10199,7 +10055,7 @@
       </p:sp>
       <p:sp>
         <p:nvSpPr>
-          <p:cNvPr id="70" name="Rounded Rectangle 69"/>
+          <p:cNvPr id="69" name="Rounded Rectangle 68"/>
           <p:cNvSpPr/>
           <p:nvPr/>
         </p:nvSpPr>
@@ -10245,14 +10101,14 @@
       </p:sp>
       <p:sp>
         <p:nvSpPr>
-          <p:cNvPr id="71" name="TextBox 70"/>
-          <p:cNvSpPr txBox="1"/>
-          <p:nvPr/>
-        </p:nvSpPr>
-        <p:spPr>
-          <a:xfrm>
-            <a:off x="6561867" y="4716526"/>
-            <a:ext cx="249364" cy="291465"/>
+          <p:cNvPr id="70" name="TextBox 69"/>
+          <p:cNvSpPr txBox="1"/>
+          <p:nvPr/>
+        </p:nvSpPr>
+        <p:spPr>
+          <a:xfrm>
+            <a:off x="6561455" y="4716526"/>
+            <a:ext cx="250190" cy="291465"/>
           </a:xfrm>
           <a:prstGeom prst="rect">
             <a:avLst/>
@@ -10281,7 +10137,7 @@
       </p:sp>
       <p:sp>
         <p:nvSpPr>
-          <p:cNvPr id="72" name="Rounded Rectangle 71"/>
+          <p:cNvPr id="71" name="Rounded Rectangle 70"/>
           <p:cNvSpPr/>
           <p:nvPr/>
         </p:nvSpPr>
@@ -10327,14 +10183,14 @@
       </p:sp>
       <p:sp>
         <p:nvSpPr>
-          <p:cNvPr id="73" name="TextBox 72"/>
-          <p:cNvSpPr txBox="1"/>
-          <p:nvPr/>
-        </p:nvSpPr>
-        <p:spPr>
-          <a:xfrm>
-            <a:off x="7273067" y="4716526"/>
-            <a:ext cx="249364" cy="291465"/>
+          <p:cNvPr id="72" name="TextBox 71"/>
+          <p:cNvSpPr txBox="1"/>
+          <p:nvPr/>
+        </p:nvSpPr>
+        <p:spPr>
+          <a:xfrm>
+            <a:off x="7272655" y="4716526"/>
+            <a:ext cx="250190" cy="291465"/>
           </a:xfrm>
           <a:prstGeom prst="rect">
             <a:avLst/>
@@ -10363,7 +10219,7 @@
       </p:sp>
       <p:sp>
         <p:nvSpPr>
-          <p:cNvPr id="74" name="Rounded Rectangle 73"/>
+          <p:cNvPr id="73" name="Rounded Rectangle 72"/>
           <p:cNvSpPr/>
           <p:nvPr/>
         </p:nvSpPr>
@@ -10409,14 +10265,14 @@
       </p:sp>
       <p:sp>
         <p:nvSpPr>
-          <p:cNvPr id="75" name="TextBox 74"/>
-          <p:cNvSpPr txBox="1"/>
-          <p:nvPr/>
-        </p:nvSpPr>
-        <p:spPr>
-          <a:xfrm>
-            <a:off x="7924355" y="4716526"/>
-            <a:ext cx="369189" cy="291465"/>
+          <p:cNvPr id="74" name="TextBox 73"/>
+          <p:cNvSpPr txBox="1"/>
+          <p:nvPr/>
+        </p:nvSpPr>
+        <p:spPr>
+          <a:xfrm>
+            <a:off x="7923530" y="4716526"/>
+            <a:ext cx="370840" cy="291465"/>
           </a:xfrm>
           <a:prstGeom prst="rect">
             <a:avLst/>
@@ -10445,7 +10301,7 @@
       </p:sp>
       <p:sp>
         <p:nvSpPr>
-          <p:cNvPr id="76" name="Rounded Rectangle 75"/>
+          <p:cNvPr id="75" name="Rounded Rectangle 74"/>
           <p:cNvSpPr/>
           <p:nvPr/>
         </p:nvSpPr>
@@ -10491,14 +10347,14 @@
       </p:sp>
       <p:sp>
         <p:nvSpPr>
-          <p:cNvPr id="77" name="TextBox 76"/>
-          <p:cNvSpPr txBox="1"/>
-          <p:nvPr/>
-        </p:nvSpPr>
-        <p:spPr>
-          <a:xfrm>
-            <a:off x="8635555" y="4716526"/>
-            <a:ext cx="369189" cy="291465"/>
+          <p:cNvPr id="76" name="TextBox 75"/>
+          <p:cNvSpPr txBox="1"/>
+          <p:nvPr/>
+        </p:nvSpPr>
+        <p:spPr>
+          <a:xfrm>
+            <a:off x="8634730" y="4716526"/>
+            <a:ext cx="370840" cy="291465"/>
           </a:xfrm>
           <a:prstGeom prst="rect">
             <a:avLst/>
@@ -10527,7 +10383,7 @@
       </p:sp>
       <p:sp>
         <p:nvSpPr>
-          <p:cNvPr id="78" name="Rounded Rectangle 77"/>
+          <p:cNvPr id="77" name="Rounded Rectangle 76"/>
           <p:cNvSpPr/>
           <p:nvPr/>
         </p:nvSpPr>
@@ -10573,14 +10429,50 @@
       </p:sp>
       <p:sp>
         <p:nvSpPr>
+          <p:cNvPr id="78" name="TextBox 77"/>
+          <p:cNvSpPr txBox="1"/>
+          <p:nvPr/>
+        </p:nvSpPr>
+        <p:spPr>
+          <a:xfrm>
+            <a:off x="9403080" y="4716526"/>
+            <a:ext cx="256540" cy="291465"/>
+          </a:xfrm>
+          <a:prstGeom prst="rect">
+            <a:avLst/>
+          </a:prstGeom>
+          <a:noFill/>
+        </p:spPr>
+        <p:txBody>
+          <a:bodyPr wrap="none" lIns="0" rIns="0" tIns="0" bIns="0">
+            <a:spAutoFit/>
+          </a:bodyPr>
+          <a:lstStyle/>
+          <a:p>
+            <a:pPr algn="ctr"/>
+            <a:r>
+              <a:rPr sz="1700" b="1">
+                <a:solidFill>
+                  <a:srgbClr val="D8BB78"/>
+                </a:solidFill>
+                <a:latin typeface="Noto Sans SC"/>
+                <a:ea typeface="Noto Sans SC"/>
+              </a:rPr>
+              <a:t>6</a:t>
+            </a:r>
+          </a:p>
+        </p:txBody>
+      </p:sp>
+      <p:sp>
+        <p:nvSpPr>
           <p:cNvPr id="79" name="TextBox 78"/>
           <p:cNvSpPr txBox="1"/>
           <p:nvPr/>
         </p:nvSpPr>
         <p:spPr>
           <a:xfrm>
-            <a:off x="9402889" y="4716526"/>
-            <a:ext cx="256920" cy="291465"/>
+            <a:off x="10024745" y="1927098"/>
+            <a:ext cx="562610" cy="222885"/>
           </a:xfrm>
           <a:prstGeom prst="rect">
             <a:avLst/>
@@ -10593,16 +10485,16 @@
           </a:bodyPr>
           <a:lstStyle/>
           <a:p>
-            <a:pPr algn="ctr"/>
-            <a:r>
-              <a:rPr sz="1700" b="1">
-                <a:solidFill>
-                  <a:srgbClr val="D8BB78"/>
-                </a:solidFill>
-                <a:latin typeface="Noto Sans SC"/>
-                <a:ea typeface="Noto Sans SC"/>
-              </a:rPr>
-              <a:t>6</a:t>
+            <a:pPr algn="l"/>
+            <a:r>
+              <a:rPr sz="1300" b="1">
+                <a:solidFill>
+                  <a:srgbClr val="77CDBB"/>
+                </a:solidFill>
+                <a:latin typeface="Noto Sans SC"/>
+                <a:ea typeface="Noto Sans SC"/>
+              </a:rPr>
+              <a:t>行和 0</a:t>
             </a:r>
           </a:p>
         </p:txBody>
@@ -10615,8 +10507,8 @@
         </p:nvSpPr>
         <p:spPr>
           <a:xfrm>
-            <a:off x="10024745" y="1927098"/>
-            <a:ext cx="564146" cy="222885"/>
+            <a:off x="10024745" y="2638298"/>
+            <a:ext cx="562610" cy="222885"/>
           </a:xfrm>
           <a:prstGeom prst="rect">
             <a:avLst/>
@@ -10651,8 +10543,8 @@
         </p:nvSpPr>
         <p:spPr>
           <a:xfrm>
-            <a:off x="10024745" y="2638298"/>
-            <a:ext cx="564146" cy="222885"/>
+            <a:off x="10024745" y="3349498"/>
+            <a:ext cx="562610" cy="222885"/>
           </a:xfrm>
           <a:prstGeom prst="rect">
             <a:avLst/>
@@ -10687,8 +10579,8 @@
         </p:nvSpPr>
         <p:spPr>
           <a:xfrm>
-            <a:off x="10024745" y="3349498"/>
-            <a:ext cx="564146" cy="222885"/>
+            <a:off x="10024745" y="4060698"/>
+            <a:ext cx="562610" cy="222885"/>
           </a:xfrm>
           <a:prstGeom prst="rect">
             <a:avLst/>
@@ -10723,44 +10615,8 @@
         </p:nvSpPr>
         <p:spPr>
           <a:xfrm>
-            <a:off x="10024745" y="4060698"/>
-            <a:ext cx="564146" cy="222885"/>
-          </a:xfrm>
-          <a:prstGeom prst="rect">
-            <a:avLst/>
-          </a:prstGeom>
-          <a:noFill/>
-        </p:spPr>
-        <p:txBody>
-          <a:bodyPr wrap="none" lIns="0" rIns="0" tIns="0" bIns="0">
-            <a:spAutoFit/>
-          </a:bodyPr>
-          <a:lstStyle/>
-          <a:p>
-            <a:pPr algn="l"/>
-            <a:r>
-              <a:rPr sz="1300" b="1">
-                <a:solidFill>
-                  <a:srgbClr val="77CDBB"/>
-                </a:solidFill>
-                <a:latin typeface="Noto Sans SC"/>
-                <a:ea typeface="Noto Sans SC"/>
-              </a:rPr>
-              <a:t>行和 0</a:t>
-            </a:r>
-          </a:p>
-        </p:txBody>
-      </p:sp>
-      <p:sp>
-        <p:nvSpPr>
-          <p:cNvPr id="84" name="TextBox 83"/>
-          <p:cNvSpPr txBox="1"/>
-          <p:nvPr/>
-        </p:nvSpPr>
-        <p:spPr>
-          <a:xfrm>
             <a:off x="10024745" y="4771898"/>
-            <a:ext cx="564146" cy="222885"/>
+            <a:ext cx="562610" cy="222885"/>
           </a:xfrm>
           <a:prstGeom prst="rect">
             <a:avLst/>
@@ -11013,7 +10869,7 @@
         <p:spPr>
           <a:xfrm>
             <a:off x="563880" y="6512052"/>
-            <a:ext cx="1503426" cy="205740"/>
+            <a:ext cx="1494790" cy="205740"/>
           </a:xfrm>
           <a:prstGeom prst="rect">
             <a:avLst/>
@@ -11048,8 +10904,8 @@
         </p:nvSpPr>
         <p:spPr>
           <a:xfrm>
-            <a:off x="11108524" y="6499098"/>
-            <a:ext cx="561505" cy="222885"/>
+            <a:off x="11113770" y="6499098"/>
+            <a:ext cx="556260" cy="222885"/>
           </a:xfrm>
           <a:prstGeom prst="rect">
             <a:avLst/>
@@ -11078,43 +10934,7 @@
       </p:sp>
       <p:sp>
         <p:nvSpPr>
-          <p:cNvPr id="9" name="TextBox 8"/>
-          <p:cNvSpPr txBox="1"/>
-          <p:nvPr/>
-        </p:nvSpPr>
-        <p:spPr>
-          <a:xfrm>
-            <a:off x="10855147" y="377952"/>
-            <a:ext cx="811072" cy="205740"/>
-          </a:xfrm>
-          <a:prstGeom prst="rect">
-            <a:avLst/>
-          </a:prstGeom>
-          <a:noFill/>
-        </p:spPr>
-        <p:txBody>
-          <a:bodyPr wrap="none" lIns="0" rIns="0" tIns="0" bIns="0">
-            <a:spAutoFit/>
-          </a:bodyPr>
-          <a:lstStyle/>
-          <a:p>
-            <a:pPr algn="r"/>
-            <a:r>
-              <a:rPr sz="1200" b="0">
-                <a:solidFill>
-                  <a:srgbClr val="6F8F8F"/>
-                </a:solidFill>
-                <a:latin typeface="Noto Sans SC"/>
-                <a:ea typeface="Noto Sans SC"/>
-              </a:rPr>
-              <a:t>影片 00:59</a:t>
-            </a:r>
-          </a:p>
-        </p:txBody>
-      </p:sp>
-      <p:sp>
-        <p:nvSpPr>
-          <p:cNvPr id="10" name="Oval 9"/>
+          <p:cNvPr id="9" name="Oval 8"/>
           <p:cNvSpPr/>
           <p:nvPr/>
         </p:nvSpPr>
@@ -11156,7 +10976,7 @@
       </p:sp>
       <p:sp>
         <p:nvSpPr>
-          <p:cNvPr id="11" name="TextBox 10"/>
+          <p:cNvPr id="10" name="TextBox 9"/>
           <p:cNvSpPr txBox="1"/>
           <p:nvPr/>
         </p:nvSpPr>
@@ -11226,7 +11046,7 @@
       </p:sp>
       <p:sp>
         <p:nvSpPr>
-          <p:cNvPr id="12" name="Oval 11"/>
+          <p:cNvPr id="11" name="Oval 10"/>
           <p:cNvSpPr/>
           <p:nvPr/>
         </p:nvSpPr>
@@ -11268,7 +11088,7 @@
       </p:sp>
       <p:sp>
         <p:nvSpPr>
-          <p:cNvPr id="13" name="TextBox 12"/>
+          <p:cNvPr id="12" name="TextBox 11"/>
           <p:cNvSpPr txBox="1"/>
           <p:nvPr/>
         </p:nvSpPr>
@@ -11328,7 +11148,7 @@
       </p:sp>
       <p:sp>
         <p:nvSpPr>
-          <p:cNvPr id="14" name="Oval 13"/>
+          <p:cNvPr id="13" name="Oval 12"/>
           <p:cNvSpPr/>
           <p:nvPr/>
         </p:nvSpPr>
@@ -11370,7 +11190,7 @@
       </p:sp>
       <p:sp>
         <p:nvSpPr>
-          <p:cNvPr id="15" name="TextBox 14"/>
+          <p:cNvPr id="14" name="TextBox 13"/>
           <p:cNvSpPr txBox="1"/>
           <p:nvPr/>
         </p:nvSpPr>
@@ -11410,7 +11230,7 @@
       </p:sp>
       <p:sp>
         <p:nvSpPr>
-          <p:cNvPr id="16" name="Oval 15"/>
+          <p:cNvPr id="15" name="Oval 14"/>
           <p:cNvSpPr/>
           <p:nvPr/>
         </p:nvSpPr>
@@ -11452,7 +11272,7 @@
       </p:sp>
       <p:sp>
         <p:nvSpPr>
-          <p:cNvPr id="17" name="TextBox 16"/>
+          <p:cNvPr id="16" name="TextBox 15"/>
           <p:cNvSpPr txBox="1"/>
           <p:nvPr/>
         </p:nvSpPr>
@@ -11492,7 +11312,7 @@
       </p:sp>
       <p:sp>
         <p:nvSpPr>
-          <p:cNvPr id="18" name="Oval 17"/>
+          <p:cNvPr id="17" name="Oval 16"/>
           <p:cNvSpPr/>
           <p:nvPr/>
         </p:nvSpPr>
@@ -11534,7 +11354,7 @@
       </p:sp>
       <p:sp>
         <p:nvSpPr>
-          <p:cNvPr id="19" name="TextBox 18"/>
+          <p:cNvPr id="18" name="TextBox 17"/>
           <p:cNvSpPr txBox="1"/>
           <p:nvPr/>
         </p:nvSpPr>
@@ -11574,7 +11394,7 @@
       </p:sp>
       <p:cxnSp>
         <p:nvCxnSpPr>
-          <p:cNvPr id="20" name="Connector 19"/>
+          <p:cNvPr id="19" name="Connector 18"/>
           <p:cNvCxnSpPr/>
           <p:nvPr/>
         </p:nvCxnSpPr>
@@ -11609,7 +11429,7 @@
       </p:cxnSp>
       <p:sp>
         <p:nvSpPr>
-          <p:cNvPr id="21" name="Oval 20"/>
+          <p:cNvPr id="20" name="Oval 19"/>
           <p:cNvSpPr/>
           <p:nvPr/>
         </p:nvSpPr>
@@ -11653,14 +11473,14 @@
       </p:sp>
       <p:sp>
         <p:nvSpPr>
-          <p:cNvPr id="22" name="TextBox 21"/>
-          <p:cNvSpPr txBox="1"/>
-          <p:nvPr/>
-        </p:nvSpPr>
-        <p:spPr>
-          <a:xfrm>
-            <a:off x="7815172" y="1358766"/>
-            <a:ext cx="241808" cy="274320"/>
+          <p:cNvPr id="21" name="TextBox 20"/>
+          <p:cNvSpPr txBox="1"/>
+          <p:nvPr/>
+        </p:nvSpPr>
+        <p:spPr>
+          <a:xfrm>
+            <a:off x="7814791" y="1358766"/>
+            <a:ext cx="242570" cy="274320"/>
           </a:xfrm>
           <a:prstGeom prst="rect">
             <a:avLst/>
@@ -11689,7 +11509,7 @@
       </p:sp>
       <p:cxnSp>
         <p:nvCxnSpPr>
-          <p:cNvPr id="23" name="Connector 22"/>
+          <p:cNvPr id="22" name="Connector 21"/>
           <p:cNvCxnSpPr/>
           <p:nvPr/>
         </p:nvCxnSpPr>
@@ -11724,7 +11544,7 @@
       </p:cxnSp>
       <p:sp>
         <p:nvSpPr>
-          <p:cNvPr id="24" name="Oval 23"/>
+          <p:cNvPr id="23" name="Oval 22"/>
           <p:cNvSpPr/>
           <p:nvPr/>
         </p:nvSpPr>
@@ -11768,14 +11588,14 @@
       </p:sp>
       <p:sp>
         <p:nvSpPr>
-          <p:cNvPr id="25" name="TextBox 24"/>
-          <p:cNvSpPr txBox="1"/>
-          <p:nvPr/>
-        </p:nvSpPr>
-        <p:spPr>
-          <a:xfrm>
-            <a:off x="7564780" y="2243327"/>
-            <a:ext cx="241808" cy="274320"/>
+          <p:cNvPr id="24" name="TextBox 23"/>
+          <p:cNvSpPr txBox="1"/>
+          <p:nvPr/>
+        </p:nvSpPr>
+        <p:spPr>
+          <a:xfrm>
+            <a:off x="7564399" y="2243327"/>
+            <a:ext cx="242570" cy="274320"/>
           </a:xfrm>
           <a:prstGeom prst="rect">
             <a:avLst/>
@@ -11804,7 +11624,7 @@
       </p:sp>
       <p:cxnSp>
         <p:nvCxnSpPr>
-          <p:cNvPr id="26" name="Connector 25"/>
+          <p:cNvPr id="25" name="Connector 24"/>
           <p:cNvCxnSpPr/>
           <p:nvPr/>
         </p:nvCxnSpPr>
@@ -11839,7 +11659,7 @@
       </p:cxnSp>
       <p:sp>
         <p:nvSpPr>
-          <p:cNvPr id="27" name="Oval 26"/>
+          <p:cNvPr id="26" name="Oval 25"/>
           <p:cNvSpPr/>
           <p:nvPr/>
         </p:nvSpPr>
@@ -11883,14 +11703,14 @@
       </p:sp>
       <p:sp>
         <p:nvSpPr>
-          <p:cNvPr id="28" name="TextBox 27"/>
-          <p:cNvSpPr txBox="1"/>
-          <p:nvPr/>
-        </p:nvSpPr>
-        <p:spPr>
-          <a:xfrm>
-            <a:off x="8567719" y="2334651"/>
-            <a:ext cx="241808" cy="274320"/>
+          <p:cNvPr id="27" name="TextBox 26"/>
+          <p:cNvSpPr txBox="1"/>
+          <p:nvPr/>
+        </p:nvSpPr>
+        <p:spPr>
+          <a:xfrm>
+            <a:off x="8567338" y="2334651"/>
+            <a:ext cx="242570" cy="274320"/>
           </a:xfrm>
           <a:prstGeom prst="rect">
             <a:avLst/>
@@ -11919,7 +11739,7 @@
       </p:sp>
       <p:cxnSp>
         <p:nvCxnSpPr>
-          <p:cNvPr id="29" name="Connector 28"/>
+          <p:cNvPr id="28" name="Connector 27"/>
           <p:cNvCxnSpPr/>
           <p:nvPr/>
         </p:nvCxnSpPr>
@@ -11955,7 +11775,7 @@
       </p:cxnSp>
       <p:sp>
         <p:nvSpPr>
-          <p:cNvPr id="30" name="Oval 29"/>
+          <p:cNvPr id="29" name="Oval 28"/>
           <p:cNvSpPr/>
           <p:nvPr/>
         </p:nvSpPr>
@@ -11999,14 +11819,14 @@
       </p:sp>
       <p:sp>
         <p:nvSpPr>
-          <p:cNvPr id="31" name="TextBox 30"/>
-          <p:cNvSpPr txBox="1"/>
-          <p:nvPr/>
-        </p:nvSpPr>
-        <p:spPr>
-          <a:xfrm>
-            <a:off x="9119740" y="3429753"/>
-            <a:ext cx="241808" cy="274320"/>
+          <p:cNvPr id="30" name="TextBox 29"/>
+          <p:cNvSpPr txBox="1"/>
+          <p:nvPr/>
+        </p:nvSpPr>
+        <p:spPr>
+          <a:xfrm>
+            <a:off x="9119359" y="3429753"/>
+            <a:ext cx="242570" cy="274320"/>
           </a:xfrm>
           <a:prstGeom prst="rect">
             <a:avLst/>
@@ -12035,7 +11855,7 @@
       </p:sp>
       <p:cxnSp>
         <p:nvCxnSpPr>
-          <p:cNvPr id="32" name="Connector 31"/>
+          <p:cNvPr id="31" name="Connector 30"/>
           <p:cNvCxnSpPr/>
           <p:nvPr/>
         </p:nvCxnSpPr>
@@ -12071,7 +11891,7 @@
       </p:cxnSp>
       <p:sp>
         <p:nvSpPr>
-          <p:cNvPr id="33" name="Oval 32"/>
+          <p:cNvPr id="32" name="Oval 31"/>
           <p:cNvSpPr/>
           <p:nvPr/>
         </p:nvSpPr>
@@ -12115,14 +11935,14 @@
       </p:sp>
       <p:sp>
         <p:nvSpPr>
-          <p:cNvPr id="34" name="TextBox 33"/>
-          <p:cNvSpPr txBox="1"/>
-          <p:nvPr/>
-        </p:nvSpPr>
-        <p:spPr>
-          <a:xfrm>
-            <a:off x="8088113" y="3880698"/>
-            <a:ext cx="241808" cy="274320"/>
+          <p:cNvPr id="33" name="TextBox 32"/>
+          <p:cNvSpPr txBox="1"/>
+          <p:nvPr/>
+        </p:nvSpPr>
+        <p:spPr>
+          <a:xfrm>
+            <a:off x="8087732" y="3880698"/>
+            <a:ext cx="242570" cy="274320"/>
           </a:xfrm>
           <a:prstGeom prst="rect">
             <a:avLst/>
@@ -12151,7 +11971,7 @@
       </p:sp>
       <p:cxnSp>
         <p:nvCxnSpPr>
-          <p:cNvPr id="35" name="Connector 34"/>
+          <p:cNvPr id="34" name="Connector 33"/>
           <p:cNvCxnSpPr/>
           <p:nvPr/>
         </p:nvCxnSpPr>
@@ -12186,7 +12006,7 @@
       </p:cxnSp>
       <p:sp>
         <p:nvSpPr>
-          <p:cNvPr id="36" name="Oval 35"/>
+          <p:cNvPr id="35" name="Oval 34"/>
           <p:cNvSpPr/>
           <p:nvPr/>
         </p:nvSpPr>
@@ -12230,14 +12050,14 @@
       </p:sp>
       <p:sp>
         <p:nvSpPr>
-          <p:cNvPr id="37" name="TextBox 36"/>
-          <p:cNvSpPr txBox="1"/>
-          <p:nvPr/>
-        </p:nvSpPr>
-        <p:spPr>
-          <a:xfrm>
-            <a:off x="8981846" y="4475563"/>
-            <a:ext cx="241808" cy="274320"/>
+          <p:cNvPr id="36" name="TextBox 35"/>
+          <p:cNvSpPr txBox="1"/>
+          <p:nvPr/>
+        </p:nvSpPr>
+        <p:spPr>
+          <a:xfrm>
+            <a:off x="8981465" y="4475563"/>
+            <a:ext cx="242570" cy="274320"/>
           </a:xfrm>
           <a:prstGeom prst="rect">
             <a:avLst/>
@@ -12266,7 +12086,7 @@
       </p:sp>
       <p:sp>
         <p:nvSpPr>
-          <p:cNvPr id="38" name="Oval 37"/>
+          <p:cNvPr id="37" name="Oval 36"/>
           <p:cNvSpPr/>
           <p:nvPr/>
         </p:nvSpPr>
@@ -12310,14 +12130,14 @@
       </p:sp>
       <p:sp>
         <p:nvSpPr>
-          <p:cNvPr id="39" name="TextBox 38"/>
-          <p:cNvSpPr txBox="1"/>
-          <p:nvPr/>
-        </p:nvSpPr>
-        <p:spPr>
-          <a:xfrm>
-            <a:off x="6827811" y="1642660"/>
-            <a:ext cx="269659" cy="291465"/>
+          <p:cNvPr id="38" name="TextBox 37"/>
+          <p:cNvSpPr txBox="1"/>
+          <p:nvPr/>
+        </p:nvSpPr>
+        <p:spPr>
+          <a:xfrm>
+            <a:off x="6828020" y="1642660"/>
+            <a:ext cx="269240" cy="291465"/>
           </a:xfrm>
           <a:prstGeom prst="rect">
             <a:avLst/>
@@ -12346,43 +12166,7 @@
       </p:sp>
       <p:sp>
         <p:nvSpPr>
-          <p:cNvPr id="40" name="TextBox 39"/>
-          <p:cNvSpPr txBox="1"/>
-          <p:nvPr/>
-        </p:nvSpPr>
-        <p:spPr>
-          <a:xfrm>
-            <a:off x="6815701" y="2112052"/>
-            <a:ext cx="293878" cy="222885"/>
-          </a:xfrm>
-          <a:prstGeom prst="rect">
-            <a:avLst/>
-          </a:prstGeom>
-          <a:noFill/>
-        </p:spPr>
-        <p:txBody>
-          <a:bodyPr wrap="none" lIns="0" rIns="0" tIns="0" bIns="0">
-            <a:spAutoFit/>
-          </a:bodyPr>
-          <a:lstStyle/>
-          <a:p>
-            <a:pPr algn="ctr"/>
-            <a:r>
-              <a:rPr sz="1300" b="1">
-                <a:solidFill>
-                  <a:srgbClr val="D8BB78"/>
-                </a:solidFill>
-                <a:latin typeface="Noto Sans SC"/>
-                <a:ea typeface="Noto Sans SC"/>
-              </a:rPr>
-              <a:t>+1</a:t>
-            </a:r>
-          </a:p>
-        </p:txBody>
-      </p:sp>
-      <p:sp>
-        <p:nvSpPr>
-          <p:cNvPr id="41" name="Oval 40"/>
+          <p:cNvPr id="39" name="Oval 38"/>
           <p:cNvSpPr/>
           <p:nvPr/>
         </p:nvSpPr>
@@ -12426,14 +12210,14 @@
       </p:sp>
       <p:sp>
         <p:nvSpPr>
-          <p:cNvPr id="42" name="TextBox 41"/>
-          <p:cNvSpPr txBox="1"/>
-          <p:nvPr/>
-        </p:nvSpPr>
-        <p:spPr>
-          <a:xfrm>
-            <a:off x="8791962" y="1508506"/>
-            <a:ext cx="276567" cy="291465"/>
+          <p:cNvPr id="40" name="TextBox 39"/>
+          <p:cNvSpPr txBox="1"/>
+          <p:nvPr/>
+        </p:nvSpPr>
+        <p:spPr>
+          <a:xfrm>
+            <a:off x="8792451" y="1508506"/>
+            <a:ext cx="275590" cy="291465"/>
           </a:xfrm>
           <a:prstGeom prst="rect">
             <a:avLst/>
@@ -12462,43 +12246,7 @@
       </p:sp>
       <p:sp>
         <p:nvSpPr>
-          <p:cNvPr id="43" name="TextBox 42"/>
-          <p:cNvSpPr txBox="1"/>
-          <p:nvPr/>
-        </p:nvSpPr>
-        <p:spPr>
-          <a:xfrm>
-            <a:off x="8783307" y="1977898"/>
-            <a:ext cx="293878" cy="222885"/>
-          </a:xfrm>
-          <a:prstGeom prst="rect">
-            <a:avLst/>
-          </a:prstGeom>
-          <a:noFill/>
-        </p:spPr>
-        <p:txBody>
-          <a:bodyPr wrap="none" lIns="0" rIns="0" tIns="0" bIns="0">
-            <a:spAutoFit/>
-          </a:bodyPr>
-          <a:lstStyle/>
-          <a:p>
-            <a:pPr algn="ctr"/>
-            <a:r>
-              <a:rPr sz="1300" b="1">
-                <a:solidFill>
-                  <a:srgbClr val="D8BB78"/>
-                </a:solidFill>
-                <a:latin typeface="Noto Sans SC"/>
-                <a:ea typeface="Noto Sans SC"/>
-              </a:rPr>
-              <a:t>+1</a:t>
-            </a:r>
-          </a:p>
-        </p:txBody>
-      </p:sp>
-      <p:sp>
-        <p:nvSpPr>
-          <p:cNvPr id="44" name="Oval 43"/>
+          <p:cNvPr id="41" name="Oval 40"/>
           <p:cNvSpPr/>
           <p:nvPr/>
         </p:nvSpPr>
@@ -12542,14 +12290,14 @@
       </p:sp>
       <p:sp>
         <p:nvSpPr>
-          <p:cNvPr id="45" name="TextBox 44"/>
-          <p:cNvSpPr txBox="1"/>
-          <p:nvPr/>
-        </p:nvSpPr>
-        <p:spPr>
-          <a:xfrm>
-            <a:off x="8034450" y="3163083"/>
-            <a:ext cx="271170" cy="291465"/>
+          <p:cNvPr id="42" name="TextBox 41"/>
+          <p:cNvSpPr txBox="1"/>
+          <p:nvPr/>
+        </p:nvSpPr>
+        <p:spPr>
+          <a:xfrm>
+            <a:off x="8035415" y="3163083"/>
+            <a:ext cx="269240" cy="291465"/>
           </a:xfrm>
           <a:prstGeom prst="rect">
             <a:avLst/>
@@ -12578,43 +12326,7 @@
       </p:sp>
       <p:sp>
         <p:nvSpPr>
-          <p:cNvPr id="46" name="TextBox 45"/>
-          <p:cNvSpPr txBox="1"/>
-          <p:nvPr/>
-        </p:nvSpPr>
-        <p:spPr>
-          <a:xfrm>
-            <a:off x="8023096" y="3632475"/>
-            <a:ext cx="293878" cy="222885"/>
-          </a:xfrm>
-          <a:prstGeom prst="rect">
-            <a:avLst/>
-          </a:prstGeom>
-          <a:noFill/>
-        </p:spPr>
-        <p:txBody>
-          <a:bodyPr wrap="none" lIns="0" rIns="0" tIns="0" bIns="0">
-            <a:spAutoFit/>
-          </a:bodyPr>
-          <a:lstStyle/>
-          <a:p>
-            <a:pPr algn="ctr"/>
-            <a:r>
-              <a:rPr sz="1300" b="1">
-                <a:solidFill>
-                  <a:srgbClr val="D8BB78"/>
-                </a:solidFill>
-                <a:latin typeface="Noto Sans SC"/>
-                <a:ea typeface="Noto Sans SC"/>
-              </a:rPr>
-              <a:t>+1</a:t>
-            </a:r>
-          </a:p>
-        </p:txBody>
-      </p:sp>
-      <p:sp>
-        <p:nvSpPr>
-          <p:cNvPr id="47" name="Oval 46"/>
+          <p:cNvPr id="43" name="Oval 42"/>
           <p:cNvSpPr/>
           <p:nvPr/>
         </p:nvSpPr>
@@ -12658,14 +12370,14 @@
       </p:sp>
       <p:sp>
         <p:nvSpPr>
-          <p:cNvPr id="48" name="TextBox 47"/>
-          <p:cNvSpPr txBox="1"/>
-          <p:nvPr/>
-        </p:nvSpPr>
-        <p:spPr>
-          <a:xfrm>
-            <a:off x="10040512" y="4102167"/>
-            <a:ext cx="283692" cy="291465"/>
+          <p:cNvPr id="44" name="TextBox 43"/>
+          <p:cNvSpPr txBox="1"/>
+          <p:nvPr/>
+        </p:nvSpPr>
+        <p:spPr>
+          <a:xfrm>
+            <a:off x="10041389" y="4102167"/>
+            <a:ext cx="281939" cy="291465"/>
           </a:xfrm>
           <a:prstGeom prst="rect">
             <a:avLst/>
@@ -12694,43 +12406,7 @@
       </p:sp>
       <p:sp>
         <p:nvSpPr>
-          <p:cNvPr id="49" name="TextBox 48"/>
-          <p:cNvSpPr txBox="1"/>
-          <p:nvPr/>
-        </p:nvSpPr>
-        <p:spPr>
-          <a:xfrm>
-            <a:off x="10053581" y="4571559"/>
-            <a:ext cx="257556" cy="222885"/>
-          </a:xfrm>
-          <a:prstGeom prst="rect">
-            <a:avLst/>
-          </a:prstGeom>
-          <a:noFill/>
-        </p:spPr>
-        <p:txBody>
-          <a:bodyPr wrap="none" lIns="0" rIns="0" tIns="0" bIns="0">
-            <a:spAutoFit/>
-          </a:bodyPr>
-          <a:lstStyle/>
-          <a:p>
-            <a:pPr algn="ctr"/>
-            <a:r>
-              <a:rPr sz="1300" b="1">
-                <a:solidFill>
-                  <a:srgbClr val="D8BB78"/>
-                </a:solidFill>
-                <a:latin typeface="Noto Sans SC"/>
-                <a:ea typeface="Noto Sans SC"/>
-              </a:rPr>
-              <a:t>-1</a:t>
-            </a:r>
-          </a:p>
-        </p:txBody>
-      </p:sp>
-      <p:sp>
-        <p:nvSpPr>
-          <p:cNvPr id="50" name="Oval 49"/>
+          <p:cNvPr id="45" name="Oval 44"/>
           <p:cNvSpPr/>
           <p:nvPr/>
         </p:nvSpPr>
@@ -12774,14 +12450,14 @@
       </p:sp>
       <p:sp>
         <p:nvSpPr>
-          <p:cNvPr id="51" name="TextBox 50"/>
-          <p:cNvSpPr txBox="1"/>
-          <p:nvPr/>
-        </p:nvSpPr>
-        <p:spPr>
-          <a:xfrm>
-            <a:off x="7815284" y="4683506"/>
-            <a:ext cx="262318" cy="291465"/>
+          <p:cNvPr id="46" name="TextBox 45"/>
+          <p:cNvSpPr txBox="1"/>
+          <p:nvPr/>
+        </p:nvSpPr>
+        <p:spPr>
+          <a:xfrm>
+            <a:off x="7814998" y="4683506"/>
+            <a:ext cx="262890" cy="291465"/>
           </a:xfrm>
           <a:prstGeom prst="rect">
             <a:avLst/>
@@ -12810,14 +12486,14 @@
       </p:sp>
       <p:sp>
         <p:nvSpPr>
-          <p:cNvPr id="52" name="TextBox 51"/>
-          <p:cNvSpPr txBox="1"/>
-          <p:nvPr/>
-        </p:nvSpPr>
-        <p:spPr>
-          <a:xfrm>
-            <a:off x="7817665" y="5152898"/>
-            <a:ext cx="257556" cy="222885"/>
+          <p:cNvPr id="47" name="TextBox 46"/>
+          <p:cNvSpPr txBox="1"/>
+          <p:nvPr/>
+        </p:nvSpPr>
+        <p:spPr>
+          <a:xfrm>
+            <a:off x="7014845" y="5229098"/>
+            <a:ext cx="3115310" cy="222885"/>
           </a:xfrm>
           <a:prstGeom prst="rect">
             <a:avLst/>
@@ -12832,28 +12508,28 @@
           <a:p>
             <a:pPr algn="ctr"/>
             <a:r>
-              <a:rPr sz="1300" b="1">
-                <a:solidFill>
-                  <a:srgbClr val="D8BB78"/>
-                </a:solidFill>
-                <a:latin typeface="Noto Sans SC"/>
-                <a:ea typeface="Noto Sans SC"/>
-              </a:rPr>
-              <a:t>-1</a:t>
-            </a:r>
-          </a:p>
-        </p:txBody>
-      </p:sp>
-      <p:sp>
-        <p:nvSpPr>
-          <p:cNvPr id="53" name="Rounded Rectangle 52"/>
+              <a:rPr sz="1300" b="0">
+                <a:solidFill>
+                  <a:srgbClr val="BCD2D0"/>
+                </a:solidFill>
+                <a:latin typeface="Noto Sans SC"/>
+                <a:ea typeface="Noto Sans SC"/>
+              </a:rPr>
+              <a:t>青 = +1（A、B、C）  ·  蓝 = −1（D、E）</a:t>
+            </a:r>
+          </a:p>
+        </p:txBody>
+      </p:sp>
+      <p:sp>
+        <p:nvSpPr>
+          <p:cNvPr id="48" name="Rounded Rectangle 47"/>
           <p:cNvSpPr/>
           <p:nvPr/>
         </p:nvSpPr>
         <p:spPr>
           <a:xfrm>
-            <a:off x="7735414" y="5689600"/>
-            <a:ext cx="1674171" cy="292100"/>
+            <a:off x="7734300" y="5689600"/>
+            <a:ext cx="1676400" cy="292100"/>
           </a:xfrm>
           <a:prstGeom prst="roundRect">
             <a:avLst>
@@ -12892,14 +12568,14 @@
       </p:sp>
       <p:sp>
         <p:nvSpPr>
-          <p:cNvPr id="54" name="TextBox 53"/>
-          <p:cNvSpPr txBox="1"/>
-          <p:nvPr/>
-        </p:nvSpPr>
-        <p:spPr>
-          <a:xfrm>
-            <a:off x="7781134" y="5749798"/>
-            <a:ext cx="1582731" cy="222885"/>
+          <p:cNvPr id="49" name="TextBox 48"/>
+          <p:cNvSpPr txBox="1"/>
+          <p:nvPr/>
+        </p:nvSpPr>
+        <p:spPr>
+          <a:xfrm>
+            <a:off x="7780020" y="5749798"/>
+            <a:ext cx="1584960" cy="222885"/>
           </a:xfrm>
           <a:prstGeom prst="rect">
             <a:avLst/>
@@ -13059,7 +12735,7 @@
         <p:spPr>
           <a:xfrm>
             <a:off x="553720" y="450088"/>
-            <a:ext cx="3929735" cy="480060"/>
+            <a:ext cx="3934460" cy="480060"/>
           </a:xfrm>
           <a:prstGeom prst="rect">
             <a:avLst/>
@@ -13172,7 +12848,7 @@
         <p:spPr>
           <a:xfrm>
             <a:off x="563880" y="6512052"/>
-            <a:ext cx="1503426" cy="205740"/>
+            <a:ext cx="1494790" cy="205740"/>
           </a:xfrm>
           <a:prstGeom prst="rect">
             <a:avLst/>
@@ -13207,8 +12883,8 @@
         </p:nvSpPr>
         <p:spPr>
           <a:xfrm>
-            <a:off x="11108524" y="6499098"/>
-            <a:ext cx="561505" cy="222885"/>
+            <a:off x="11113770" y="6499098"/>
+            <a:ext cx="556260" cy="222885"/>
           </a:xfrm>
           <a:prstGeom prst="rect">
             <a:avLst/>
@@ -13237,43 +12913,7 @@
       </p:sp>
       <p:sp>
         <p:nvSpPr>
-          <p:cNvPr id="9" name="TextBox 8"/>
-          <p:cNvSpPr txBox="1"/>
-          <p:nvPr/>
-        </p:nvSpPr>
-        <p:spPr>
-          <a:xfrm>
-            <a:off x="10855147" y="377952"/>
-            <a:ext cx="811072" cy="205740"/>
-          </a:xfrm>
-          <a:prstGeom prst="rect">
-            <a:avLst/>
-          </a:prstGeom>
-          <a:noFill/>
-        </p:spPr>
-        <p:txBody>
-          <a:bodyPr wrap="none" lIns="0" rIns="0" tIns="0" bIns="0">
-            <a:spAutoFit/>
-          </a:bodyPr>
-          <a:lstStyle/>
-          <a:p>
-            <a:pPr algn="r"/>
-            <a:r>
-              <a:rPr sz="1200" b="0">
-                <a:solidFill>
-                  <a:srgbClr val="6F8F8F"/>
-                </a:solidFill>
-                <a:latin typeface="Noto Sans SC"/>
-                <a:ea typeface="Noto Sans SC"/>
-              </a:rPr>
-              <a:t>影片 01:25</a:t>
-            </a:r>
-          </a:p>
-        </p:txBody>
-      </p:sp>
-      <p:sp>
-        <p:nvSpPr>
-          <p:cNvPr id="10" name="Oval 9"/>
+          <p:cNvPr id="9" name="Oval 8"/>
           <p:cNvSpPr/>
           <p:nvPr/>
         </p:nvSpPr>
@@ -13315,7 +12955,7 @@
       </p:sp>
       <p:sp>
         <p:nvSpPr>
-          <p:cNvPr id="11" name="TextBox 10"/>
+          <p:cNvPr id="10" name="TextBox 9"/>
           <p:cNvSpPr txBox="1"/>
           <p:nvPr/>
         </p:nvSpPr>
@@ -13355,7 +12995,7 @@
       </p:sp>
       <p:sp>
         <p:nvSpPr>
-          <p:cNvPr id="12" name="Oval 11"/>
+          <p:cNvPr id="11" name="Oval 10"/>
           <p:cNvSpPr/>
           <p:nvPr/>
         </p:nvSpPr>
@@ -13397,7 +13037,7 @@
       </p:sp>
       <p:sp>
         <p:nvSpPr>
-          <p:cNvPr id="13" name="TextBox 12"/>
+          <p:cNvPr id="12" name="TextBox 11"/>
           <p:cNvSpPr txBox="1"/>
           <p:nvPr/>
         </p:nvSpPr>
@@ -13437,7 +13077,7 @@
       </p:sp>
       <p:sp>
         <p:nvSpPr>
-          <p:cNvPr id="14" name="Oval 13"/>
+          <p:cNvPr id="13" name="Oval 12"/>
           <p:cNvSpPr/>
           <p:nvPr/>
         </p:nvSpPr>
@@ -13479,7 +13119,7 @@
       </p:sp>
       <p:sp>
         <p:nvSpPr>
-          <p:cNvPr id="15" name="TextBox 14"/>
+          <p:cNvPr id="14" name="TextBox 13"/>
           <p:cNvSpPr txBox="1"/>
           <p:nvPr/>
         </p:nvSpPr>
@@ -13519,7 +13159,7 @@
       </p:sp>
       <p:sp>
         <p:nvSpPr>
-          <p:cNvPr id="16" name="Oval 15"/>
+          <p:cNvPr id="15" name="Oval 14"/>
           <p:cNvSpPr/>
           <p:nvPr/>
         </p:nvSpPr>
@@ -13561,7 +13201,7 @@
       </p:sp>
       <p:sp>
         <p:nvSpPr>
-          <p:cNvPr id="17" name="TextBox 16"/>
+          <p:cNvPr id="16" name="TextBox 15"/>
           <p:cNvSpPr txBox="1"/>
           <p:nvPr/>
         </p:nvSpPr>
@@ -13601,7 +13241,7 @@
       </p:sp>
       <p:cxnSp>
         <p:nvCxnSpPr>
-          <p:cNvPr id="18" name="Connector 17"/>
+          <p:cNvPr id="17" name="Connector 16"/>
           <p:cNvCxnSpPr/>
           <p:nvPr/>
         </p:nvCxnSpPr>
@@ -13636,7 +13276,7 @@
       </p:cxnSp>
       <p:sp>
         <p:nvSpPr>
-          <p:cNvPr id="19" name="Oval 18"/>
+          <p:cNvPr id="18" name="Oval 17"/>
           <p:cNvSpPr/>
           <p:nvPr/>
         </p:nvSpPr>
@@ -13680,50 +13320,50 @@
       </p:sp>
       <p:sp>
         <p:nvSpPr>
+          <p:cNvPr id="19" name="TextBox 18"/>
+          <p:cNvSpPr txBox="1"/>
+          <p:nvPr/>
+        </p:nvSpPr>
+        <p:spPr>
+          <a:xfrm>
+            <a:off x="6115685" y="2549652"/>
+            <a:ext cx="214629" cy="240030"/>
+          </a:xfrm>
+          <a:prstGeom prst="rect">
+            <a:avLst/>
+          </a:prstGeom>
+          <a:noFill/>
+        </p:spPr>
+        <p:txBody>
+          <a:bodyPr wrap="none" lIns="0" rIns="0" tIns="0" bIns="0">
+            <a:spAutoFit/>
+          </a:bodyPr>
+          <a:lstStyle/>
+          <a:p>
+            <a:pPr algn="ctr"/>
+            <a:r>
+              <a:rPr sz="1400" b="1">
+                <a:solidFill>
+                  <a:srgbClr val="0B1B1F"/>
+                </a:solidFill>
+                <a:latin typeface="Noto Sans SC"/>
+                <a:ea typeface="Noto Sans SC"/>
+              </a:rPr>
+              <a:t>E</a:t>
+            </a:r>
+          </a:p>
+        </p:txBody>
+      </p:sp>
+      <p:sp>
+        <p:nvSpPr>
           <p:cNvPr id="20" name="TextBox 19"/>
           <p:cNvSpPr txBox="1"/>
           <p:nvPr/>
         </p:nvSpPr>
         <p:spPr>
           <a:xfrm>
-            <a:off x="6114986" y="2549652"/>
-            <a:ext cx="216026" cy="240030"/>
-          </a:xfrm>
-          <a:prstGeom prst="rect">
-            <a:avLst/>
-          </a:prstGeom>
-          <a:noFill/>
-        </p:spPr>
-        <p:txBody>
-          <a:bodyPr wrap="none" lIns="0" rIns="0" tIns="0" bIns="0">
-            <a:spAutoFit/>
-          </a:bodyPr>
-          <a:lstStyle/>
-          <a:p>
-            <a:pPr algn="ctr"/>
-            <a:r>
-              <a:rPr sz="1400" b="1">
-                <a:solidFill>
-                  <a:srgbClr val="0B1B1F"/>
-                </a:solidFill>
-                <a:latin typeface="Noto Sans SC"/>
-                <a:ea typeface="Noto Sans SC"/>
-              </a:rPr>
-              <a:t>E</a:t>
-            </a:r>
-          </a:p>
-        </p:txBody>
-      </p:sp>
-      <p:sp>
-        <p:nvSpPr>
-          <p:cNvPr id="21" name="TextBox 20"/>
-          <p:cNvSpPr txBox="1"/>
-          <p:nvPr/>
-        </p:nvSpPr>
-        <p:spPr>
-          <a:xfrm>
-            <a:off x="5960491" y="2905252"/>
-            <a:ext cx="525018" cy="205740"/>
+            <a:off x="5964555" y="2905252"/>
+            <a:ext cx="516890" cy="205740"/>
           </a:xfrm>
           <a:prstGeom prst="rect">
             <a:avLst/>
@@ -13752,7 +13392,7 @@
       </p:sp>
       <p:cxnSp>
         <p:nvCxnSpPr>
-          <p:cNvPr id="22" name="Connector 21"/>
+          <p:cNvPr id="21" name="Connector 20"/>
           <p:cNvCxnSpPr/>
           <p:nvPr/>
         </p:nvCxnSpPr>
@@ -13787,7 +13427,7 @@
       </p:cxnSp>
       <p:sp>
         <p:nvSpPr>
-          <p:cNvPr id="23" name="Oval 22"/>
+          <p:cNvPr id="22" name="Oval 21"/>
           <p:cNvSpPr/>
           <p:nvPr/>
         </p:nvSpPr>
@@ -13829,7 +13469,7 @@
       </p:sp>
       <p:sp>
         <p:nvSpPr>
-          <p:cNvPr id="24" name="Oval 23"/>
+          <p:cNvPr id="23" name="Oval 22"/>
           <p:cNvSpPr/>
           <p:nvPr/>
         </p:nvSpPr>
@@ -13873,14 +13513,50 @@
       </p:sp>
       <p:sp>
         <p:nvSpPr>
+          <p:cNvPr id="24" name="TextBox 23"/>
+          <p:cNvSpPr txBox="1"/>
+          <p:nvPr/>
+        </p:nvSpPr>
+        <p:spPr>
+          <a:xfrm>
+            <a:off x="6403818" y="2031491"/>
+            <a:ext cx="233679" cy="240030"/>
+          </a:xfrm>
+          <a:prstGeom prst="rect">
+            <a:avLst/>
+          </a:prstGeom>
+          <a:noFill/>
+        </p:spPr>
+        <p:txBody>
+          <a:bodyPr wrap="none" lIns="0" rIns="0" tIns="0" bIns="0">
+            <a:spAutoFit/>
+          </a:bodyPr>
+          <a:lstStyle/>
+          <a:p>
+            <a:pPr algn="ctr"/>
+            <a:r>
+              <a:rPr sz="1400" b="1">
+                <a:solidFill>
+                  <a:srgbClr val="0B1B1F"/>
+                </a:solidFill>
+                <a:latin typeface="Noto Sans SC"/>
+                <a:ea typeface="Noto Sans SC"/>
+              </a:rPr>
+              <a:t>D</a:t>
+            </a:r>
+          </a:p>
+        </p:txBody>
+      </p:sp>
+      <p:sp>
+        <p:nvSpPr>
           <p:cNvPr id="25" name="TextBox 24"/>
           <p:cNvSpPr txBox="1"/>
           <p:nvPr/>
         </p:nvSpPr>
         <p:spPr>
           <a:xfrm>
-            <a:off x="6403844" y="2031491"/>
-            <a:ext cx="233629" cy="240030"/>
+            <a:off x="6262213" y="3083052"/>
+            <a:ext cx="516890" cy="205740"/>
           </a:xfrm>
           <a:prstGeom prst="rect">
             <a:avLst/>
@@ -13895,42 +13571,6 @@
           <a:p>
             <a:pPr algn="ctr"/>
             <a:r>
-              <a:rPr sz="1400" b="1">
-                <a:solidFill>
-                  <a:srgbClr val="0B1B1F"/>
-                </a:solidFill>
-                <a:latin typeface="Noto Sans SC"/>
-                <a:ea typeface="Noto Sans SC"/>
-              </a:rPr>
-              <a:t>D</a:t>
-            </a:r>
-          </a:p>
-        </p:txBody>
-      </p:sp>
-      <p:sp>
-        <p:nvSpPr>
-          <p:cNvPr id="26" name="TextBox 25"/>
-          <p:cNvSpPr txBox="1"/>
-          <p:nvPr/>
-        </p:nvSpPr>
-        <p:spPr>
-          <a:xfrm>
-            <a:off x="6258149" y="3083052"/>
-            <a:ext cx="525018" cy="205740"/>
-          </a:xfrm>
-          <a:prstGeom prst="rect">
-            <a:avLst/>
-          </a:prstGeom>
-          <a:noFill/>
-        </p:spPr>
-        <p:txBody>
-          <a:bodyPr wrap="none" lIns="0" rIns="0" tIns="0" bIns="0">
-            <a:spAutoFit/>
-          </a:bodyPr>
-          <a:lstStyle/>
-          <a:p>
-            <a:pPr algn="ctr"/>
-            <a:r>
               <a:rPr sz="1200" b="0">
                 <a:solidFill>
                   <a:srgbClr val="BCD2D0"/>
@@ -13945,7 +13585,7 @@
       </p:sp>
       <p:sp>
         <p:nvSpPr>
-          <p:cNvPr id="27" name="Oval 26"/>
+          <p:cNvPr id="26" name="Oval 25"/>
           <p:cNvSpPr/>
           <p:nvPr/>
         </p:nvSpPr>
@@ -13989,14 +13629,50 @@
       </p:sp>
       <p:sp>
         <p:nvSpPr>
+          <p:cNvPr id="27" name="TextBox 26"/>
+          <p:cNvSpPr txBox="1"/>
+          <p:nvPr/>
+        </p:nvSpPr>
+        <p:spPr>
+          <a:xfrm>
+            <a:off x="9156571" y="2549652"/>
+            <a:ext cx="220979" cy="240030"/>
+          </a:xfrm>
+          <a:prstGeom prst="rect">
+            <a:avLst/>
+          </a:prstGeom>
+          <a:noFill/>
+        </p:spPr>
+        <p:txBody>
+          <a:bodyPr wrap="none" lIns="0" rIns="0" tIns="0" bIns="0">
+            <a:spAutoFit/>
+          </a:bodyPr>
+          <a:lstStyle/>
+          <a:p>
+            <a:pPr algn="ctr"/>
+            <a:r>
+              <a:rPr sz="1400" b="1">
+                <a:solidFill>
+                  <a:srgbClr val="0B1B1F"/>
+                </a:solidFill>
+                <a:latin typeface="Noto Sans SC"/>
+                <a:ea typeface="Noto Sans SC"/>
+              </a:rPr>
+              <a:t>C</a:t>
+            </a:r>
+          </a:p>
+        </p:txBody>
+      </p:sp>
+      <p:sp>
+        <p:nvSpPr>
           <p:cNvPr id="28" name="TextBox 27"/>
           <p:cNvSpPr txBox="1"/>
           <p:nvPr/>
         </p:nvSpPr>
         <p:spPr>
           <a:xfrm>
-            <a:off x="9155403" y="2549652"/>
-            <a:ext cx="223316" cy="240030"/>
+            <a:off x="8992741" y="2905252"/>
+            <a:ext cx="548640" cy="205740"/>
           </a:xfrm>
           <a:prstGeom prst="rect">
             <a:avLst/>
@@ -14011,42 +13687,6 @@
           <a:p>
             <a:pPr algn="ctr"/>
             <a:r>
-              <a:rPr sz="1400" b="1">
-                <a:solidFill>
-                  <a:srgbClr val="0B1B1F"/>
-                </a:solidFill>
-                <a:latin typeface="Noto Sans SC"/>
-                <a:ea typeface="Noto Sans SC"/>
-              </a:rPr>
-              <a:t>C</a:t>
-            </a:r>
-          </a:p>
-        </p:txBody>
-      </p:sp>
-      <p:sp>
-        <p:nvSpPr>
-          <p:cNvPr id="29" name="TextBox 28"/>
-          <p:cNvSpPr txBox="1"/>
-          <p:nvPr/>
-        </p:nvSpPr>
-        <p:spPr>
-          <a:xfrm>
-            <a:off x="8988703" y="2905252"/>
-            <a:ext cx="556717" cy="205740"/>
-          </a:xfrm>
-          <a:prstGeom prst="rect">
-            <a:avLst/>
-          </a:prstGeom>
-          <a:noFill/>
-        </p:spPr>
-        <p:txBody>
-          <a:bodyPr wrap="none" lIns="0" rIns="0" tIns="0" bIns="0">
-            <a:spAutoFit/>
-          </a:bodyPr>
-          <a:lstStyle/>
-          <a:p>
-            <a:pPr algn="ctr"/>
-            <a:r>
               <a:rPr sz="1200" b="0">
                 <a:solidFill>
                   <a:srgbClr val="BCD2D0"/>
@@ -14061,7 +13701,7 @@
       </p:sp>
       <p:sp>
         <p:nvSpPr>
-          <p:cNvPr id="30" name="Oval 29"/>
+          <p:cNvPr id="29" name="Oval 28"/>
           <p:cNvSpPr/>
           <p:nvPr/>
         </p:nvSpPr>
@@ -14105,50 +13745,50 @@
       </p:sp>
       <p:sp>
         <p:nvSpPr>
+          <p:cNvPr id="30" name="TextBox 29"/>
+          <p:cNvSpPr txBox="1"/>
+          <p:nvPr/>
+        </p:nvSpPr>
+        <p:spPr>
+          <a:xfrm>
+            <a:off x="10593948" y="2549652"/>
+            <a:ext cx="227329" cy="240030"/>
+          </a:xfrm>
+          <a:prstGeom prst="rect">
+            <a:avLst/>
+          </a:prstGeom>
+          <a:noFill/>
+        </p:spPr>
+        <p:txBody>
+          <a:bodyPr wrap="none" lIns="0" rIns="0" tIns="0" bIns="0">
+            <a:spAutoFit/>
+          </a:bodyPr>
+          <a:lstStyle/>
+          <a:p>
+            <a:pPr algn="ctr"/>
+            <a:r>
+              <a:rPr sz="1400" b="1">
+                <a:solidFill>
+                  <a:srgbClr val="0B1B1F"/>
+                </a:solidFill>
+                <a:latin typeface="Noto Sans SC"/>
+                <a:ea typeface="Noto Sans SC"/>
+              </a:rPr>
+              <a:t>B</a:t>
+            </a:r>
+          </a:p>
+        </p:txBody>
+      </p:sp>
+      <p:sp>
+        <p:nvSpPr>
           <p:cNvPr id="31" name="TextBox 30"/>
           <p:cNvSpPr txBox="1"/>
           <p:nvPr/>
         </p:nvSpPr>
         <p:spPr>
           <a:xfrm>
-            <a:off x="10593732" y="2549652"/>
-            <a:ext cx="227761" cy="240030"/>
-          </a:xfrm>
-          <a:prstGeom prst="rect">
-            <a:avLst/>
-          </a:prstGeom>
-          <a:noFill/>
-        </p:spPr>
-        <p:txBody>
-          <a:bodyPr wrap="none" lIns="0" rIns="0" tIns="0" bIns="0">
-            <a:spAutoFit/>
-          </a:bodyPr>
-          <a:lstStyle/>
-          <a:p>
-            <a:pPr algn="ctr"/>
-            <a:r>
-              <a:rPr sz="1400" b="1">
-                <a:solidFill>
-                  <a:srgbClr val="0B1B1F"/>
-                </a:solidFill>
-                <a:latin typeface="Noto Sans SC"/>
-                <a:ea typeface="Noto Sans SC"/>
-              </a:rPr>
-              <a:t>B</a:t>
-            </a:r>
-          </a:p>
-        </p:txBody>
-      </p:sp>
-      <p:sp>
-        <p:nvSpPr>
-          <p:cNvPr id="32" name="TextBox 31"/>
-          <p:cNvSpPr txBox="1"/>
-          <p:nvPr/>
-        </p:nvSpPr>
-        <p:spPr>
-          <a:xfrm>
-            <a:off x="10429254" y="3083052"/>
-            <a:ext cx="556717" cy="205740"/>
+            <a:off x="10433293" y="3083052"/>
+            <a:ext cx="548640" cy="205740"/>
           </a:xfrm>
           <a:prstGeom prst="rect">
             <a:avLst/>
@@ -14177,7 +13817,7 @@
       </p:sp>
       <p:cxnSp>
         <p:nvCxnSpPr>
-          <p:cNvPr id="33" name="Connector 32"/>
+          <p:cNvPr id="32" name="Connector 31"/>
           <p:cNvCxnSpPr/>
           <p:nvPr/>
         </p:nvCxnSpPr>
@@ -14212,7 +13852,7 @@
       </p:cxnSp>
       <p:sp>
         <p:nvSpPr>
-          <p:cNvPr id="34" name="Oval 33"/>
+          <p:cNvPr id="33" name="Oval 32"/>
           <p:cNvSpPr/>
           <p:nvPr/>
         </p:nvSpPr>
@@ -14254,7 +13894,7 @@
       </p:sp>
       <p:sp>
         <p:nvSpPr>
-          <p:cNvPr id="35" name="Oval 34"/>
+          <p:cNvPr id="34" name="Oval 33"/>
           <p:cNvSpPr/>
           <p:nvPr/>
         </p:nvSpPr>
@@ -14298,14 +13938,50 @@
       </p:sp>
       <p:sp>
         <p:nvSpPr>
+          <p:cNvPr id="35" name="TextBox 34"/>
+          <p:cNvSpPr txBox="1"/>
+          <p:nvPr/>
+        </p:nvSpPr>
+        <p:spPr>
+          <a:xfrm>
+            <a:off x="11065510" y="2031491"/>
+            <a:ext cx="220979" cy="240030"/>
+          </a:xfrm>
+          <a:prstGeom prst="rect">
+            <a:avLst/>
+          </a:prstGeom>
+          <a:noFill/>
+        </p:spPr>
+        <p:txBody>
+          <a:bodyPr wrap="none" lIns="0" rIns="0" tIns="0" bIns="0">
+            <a:spAutoFit/>
+          </a:bodyPr>
+          <a:lstStyle/>
+          <a:p>
+            <a:pPr algn="ctr"/>
+            <a:r>
+              <a:rPr sz="1400" b="1">
+                <a:solidFill>
+                  <a:srgbClr val="0B1B1F"/>
+                </a:solidFill>
+                <a:latin typeface="Noto Sans SC"/>
+                <a:ea typeface="Noto Sans SC"/>
+              </a:rPr>
+              <a:t>A</a:t>
+            </a:r>
+          </a:p>
+        </p:txBody>
+      </p:sp>
+      <p:sp>
+        <p:nvSpPr>
           <p:cNvPr id="36" name="TextBox 35"/>
           <p:cNvSpPr txBox="1"/>
           <p:nvPr/>
         </p:nvSpPr>
         <p:spPr>
           <a:xfrm>
-            <a:off x="11064963" y="2031491"/>
-            <a:ext cx="222072" cy="240030"/>
+            <a:off x="10901680" y="2905252"/>
+            <a:ext cx="548640" cy="205740"/>
           </a:xfrm>
           <a:prstGeom prst="rect">
             <a:avLst/>
@@ -14320,14 +13996,14 @@
           <a:p>
             <a:pPr algn="ctr"/>
             <a:r>
-              <a:rPr sz="1400" b="1">
-                <a:solidFill>
-                  <a:srgbClr val="0B1B1F"/>
-                </a:solidFill>
-                <a:latin typeface="Noto Sans SC"/>
-                <a:ea typeface="Noto Sans SC"/>
-              </a:rPr>
-              <a:t>A</a:t>
+              <a:rPr sz="1200" b="0">
+                <a:solidFill>
+                  <a:srgbClr val="BCD2D0"/>
+                </a:solidFill>
+                <a:latin typeface="Noto Sans SC"/>
+                <a:ea typeface="Noto Sans SC"/>
+              </a:rPr>
+              <a:t>+0.519</a:t>
             </a:r>
           </a:p>
         </p:txBody>
@@ -14340,8 +14016,8 @@
         </p:nvSpPr>
         <p:spPr>
           <a:xfrm>
-            <a:off x="10897641" y="2905252"/>
-            <a:ext cx="556717" cy="205740"/>
+            <a:off x="6214110" y="3882644"/>
+            <a:ext cx="3630929" cy="240030"/>
           </a:xfrm>
           <a:prstGeom prst="rect">
             <a:avLst/>
@@ -14354,16 +14030,16 @@
           </a:bodyPr>
           <a:lstStyle/>
           <a:p>
-            <a:pPr algn="ctr"/>
-            <a:r>
-              <a:rPr sz="1200" b="0">
-                <a:solidFill>
-                  <a:srgbClr val="BCD2D0"/>
-                </a:solidFill>
-                <a:latin typeface="Noto Sans SC"/>
-                <a:ea typeface="Noto Sans SC"/>
-              </a:rPr>
-              <a:t>+0.519</a:t>
+            <a:pPr algn="l"/>
+            <a:r>
+              <a:rPr sz="1400" b="0">
+                <a:solidFill>
+                  <a:srgbClr val="F2F3E9"/>
+                </a:solidFill>
+                <a:latin typeface="Noto Sans SC"/>
+                <a:ea typeface="Noto Sans SC"/>
+              </a:rPr>
+              <a:t>λ = 0，1.7733，8.4551，11.6053，14.1663</a:t>
             </a:r>
           </a:p>
         </p:txBody>
@@ -14376,44 +14052,8 @@
         </p:nvSpPr>
         <p:spPr>
           <a:xfrm>
-            <a:off x="6214110" y="3882644"/>
-            <a:ext cx="3561689" cy="240030"/>
-          </a:xfrm>
-          <a:prstGeom prst="rect">
-            <a:avLst/>
-          </a:prstGeom>
-          <a:noFill/>
-        </p:spPr>
-        <p:txBody>
-          <a:bodyPr wrap="none" lIns="0" rIns="0" tIns="0" bIns="0">
-            <a:spAutoFit/>
-          </a:bodyPr>
-          <a:lstStyle/>
-          <a:p>
-            <a:pPr algn="l"/>
-            <a:r>
-              <a:rPr sz="1400" b="0">
-                <a:solidFill>
-                  <a:srgbClr val="F2F3E9"/>
-                </a:solidFill>
-                <a:latin typeface="Noto Sans SC"/>
-                <a:ea typeface="Noto Sans SC"/>
-              </a:rPr>
-              <a:t>λ = 0，1.7733，8.4551，11.6053，14.1663</a:t>
-            </a:r>
-          </a:p>
-        </p:txBody>
-      </p:sp>
-      <p:sp>
-        <p:nvSpPr>
-          <p:cNvPr id="39" name="TextBox 38"/>
-          <p:cNvSpPr txBox="1"/>
-          <p:nvPr/>
-        </p:nvSpPr>
-        <p:spPr>
-          <a:xfrm>
             <a:off x="6213475" y="4250690"/>
-            <a:ext cx="2779014" cy="257175"/>
+            <a:ext cx="2762250" cy="257175"/>
           </a:xfrm>
           <a:prstGeom prst="rect">
             <a:avLst/>
@@ -14666,7 +14306,7 @@
         <p:spPr>
           <a:xfrm>
             <a:off x="563880" y="6512052"/>
-            <a:ext cx="1503426" cy="205740"/>
+            <a:ext cx="1494790" cy="205740"/>
           </a:xfrm>
           <a:prstGeom prst="rect">
             <a:avLst/>
@@ -14701,8 +14341,8 @@
         </p:nvSpPr>
         <p:spPr>
           <a:xfrm>
-            <a:off x="11108524" y="6499098"/>
-            <a:ext cx="561505" cy="222885"/>
+            <a:off x="11113770" y="6499098"/>
+            <a:ext cx="556260" cy="222885"/>
           </a:xfrm>
           <a:prstGeom prst="rect">
             <a:avLst/>
@@ -14731,43 +14371,7 @@
       </p:sp>
       <p:sp>
         <p:nvSpPr>
-          <p:cNvPr id="9" name="TextBox 8"/>
-          <p:cNvSpPr txBox="1"/>
-          <p:nvPr/>
-        </p:nvSpPr>
-        <p:spPr>
-          <a:xfrm>
-            <a:off x="10855147" y="377952"/>
-            <a:ext cx="811072" cy="205740"/>
-          </a:xfrm>
-          <a:prstGeom prst="rect">
-            <a:avLst/>
-          </a:prstGeom>
-          <a:noFill/>
-        </p:spPr>
-        <p:txBody>
-          <a:bodyPr wrap="none" lIns="0" rIns="0" tIns="0" bIns="0">
-            <a:spAutoFit/>
-          </a:bodyPr>
-          <a:lstStyle/>
-          <a:p>
-            <a:pPr algn="r"/>
-            <a:r>
-              <a:rPr sz="1200" b="0">
-                <a:solidFill>
-                  <a:srgbClr val="6F8F8F"/>
-                </a:solidFill>
-                <a:latin typeface="Noto Sans SC"/>
-                <a:ea typeface="Noto Sans SC"/>
-              </a:rPr>
-              <a:t>影片 01:47</a:t>
-            </a:r>
-          </a:p>
-        </p:txBody>
-      </p:sp>
-      <p:sp>
-        <p:nvSpPr>
-          <p:cNvPr id="10" name="Oval 9"/>
+          <p:cNvPr id="9" name="Oval 8"/>
           <p:cNvSpPr/>
           <p:nvPr/>
         </p:nvSpPr>
@@ -14809,7 +14413,7 @@
       </p:sp>
       <p:sp>
         <p:nvSpPr>
-          <p:cNvPr id="11" name="TextBox 10"/>
+          <p:cNvPr id="10" name="TextBox 9"/>
           <p:cNvSpPr txBox="1"/>
           <p:nvPr/>
         </p:nvSpPr>
@@ -14849,7 +14453,7 @@
       </p:sp>
       <p:sp>
         <p:nvSpPr>
-          <p:cNvPr id="12" name="Oval 11"/>
+          <p:cNvPr id="11" name="Oval 10"/>
           <p:cNvSpPr/>
           <p:nvPr/>
         </p:nvSpPr>
@@ -14891,7 +14495,7 @@
       </p:sp>
       <p:sp>
         <p:nvSpPr>
-          <p:cNvPr id="13" name="TextBox 12"/>
+          <p:cNvPr id="12" name="TextBox 11"/>
           <p:cNvSpPr txBox="1"/>
           <p:nvPr/>
         </p:nvSpPr>
@@ -14931,7 +14535,7 @@
       </p:sp>
       <p:sp>
         <p:nvSpPr>
-          <p:cNvPr id="14" name="Oval 13"/>
+          <p:cNvPr id="13" name="Oval 12"/>
           <p:cNvSpPr/>
           <p:nvPr/>
         </p:nvSpPr>
@@ -14973,7 +14577,7 @@
       </p:sp>
       <p:sp>
         <p:nvSpPr>
-          <p:cNvPr id="15" name="TextBox 14"/>
+          <p:cNvPr id="14" name="TextBox 13"/>
           <p:cNvSpPr txBox="1"/>
           <p:nvPr/>
         </p:nvSpPr>
@@ -15013,7 +14617,7 @@
       </p:sp>
       <p:sp>
         <p:nvSpPr>
-          <p:cNvPr id="16" name="Oval 15"/>
+          <p:cNvPr id="15" name="Oval 14"/>
           <p:cNvSpPr/>
           <p:nvPr/>
         </p:nvSpPr>
@@ -15055,7 +14659,7 @@
       </p:sp>
       <p:sp>
         <p:nvSpPr>
-          <p:cNvPr id="17" name="TextBox 16"/>
+          <p:cNvPr id="16" name="TextBox 15"/>
           <p:cNvSpPr txBox="1"/>
           <p:nvPr/>
         </p:nvSpPr>
@@ -15095,7 +14699,7 @@
       </p:sp>
       <p:sp>
         <p:nvSpPr>
-          <p:cNvPr id="18" name="Oval 17"/>
+          <p:cNvPr id="17" name="Oval 16"/>
           <p:cNvSpPr/>
           <p:nvPr/>
         </p:nvSpPr>
@@ -15137,7 +14741,7 @@
       </p:sp>
       <p:sp>
         <p:nvSpPr>
-          <p:cNvPr id="19" name="TextBox 18"/>
+          <p:cNvPr id="18" name="TextBox 17"/>
           <p:cNvSpPr txBox="1"/>
           <p:nvPr/>
         </p:nvSpPr>
@@ -15177,7 +14781,7 @@
       </p:sp>
       <p:cxnSp>
         <p:nvCxnSpPr>
-          <p:cNvPr id="20" name="Connector 19"/>
+          <p:cNvPr id="19" name="Connector 18"/>
           <p:cNvCxnSpPr/>
           <p:nvPr/>
         </p:nvCxnSpPr>
@@ -15212,7 +14816,7 @@
       </p:cxnSp>
       <p:sp>
         <p:nvSpPr>
-          <p:cNvPr id="21" name="Oval 20"/>
+          <p:cNvPr id="20" name="Oval 19"/>
           <p:cNvSpPr/>
           <p:nvPr/>
         </p:nvSpPr>
@@ -15256,50 +14860,50 @@
       </p:sp>
       <p:sp>
         <p:nvSpPr>
+          <p:cNvPr id="21" name="TextBox 20"/>
+          <p:cNvSpPr txBox="1"/>
+          <p:nvPr/>
+        </p:nvSpPr>
+        <p:spPr>
+          <a:xfrm>
+            <a:off x="6115685" y="1978152"/>
+            <a:ext cx="214629" cy="240030"/>
+          </a:xfrm>
+          <a:prstGeom prst="rect">
+            <a:avLst/>
+          </a:prstGeom>
+          <a:noFill/>
+        </p:spPr>
+        <p:txBody>
+          <a:bodyPr wrap="none" lIns="0" rIns="0" tIns="0" bIns="0">
+            <a:spAutoFit/>
+          </a:bodyPr>
+          <a:lstStyle/>
+          <a:p>
+            <a:pPr algn="ctr"/>
+            <a:r>
+              <a:rPr sz="1400" b="1">
+                <a:solidFill>
+                  <a:srgbClr val="0B1B1F"/>
+                </a:solidFill>
+                <a:latin typeface="Noto Sans SC"/>
+                <a:ea typeface="Noto Sans SC"/>
+              </a:rPr>
+              <a:t>E</a:t>
+            </a:r>
+          </a:p>
+        </p:txBody>
+      </p:sp>
+      <p:sp>
+        <p:nvSpPr>
           <p:cNvPr id="22" name="TextBox 21"/>
           <p:cNvSpPr txBox="1"/>
           <p:nvPr/>
         </p:nvSpPr>
         <p:spPr>
           <a:xfrm>
-            <a:off x="6114986" y="1978152"/>
-            <a:ext cx="216026" cy="240030"/>
-          </a:xfrm>
-          <a:prstGeom prst="rect">
-            <a:avLst/>
-          </a:prstGeom>
-          <a:noFill/>
-        </p:spPr>
-        <p:txBody>
-          <a:bodyPr wrap="none" lIns="0" rIns="0" tIns="0" bIns="0">
-            <a:spAutoFit/>
-          </a:bodyPr>
-          <a:lstStyle/>
-          <a:p>
-            <a:pPr algn="ctr"/>
-            <a:r>
-              <a:rPr sz="1400" b="1">
-                <a:solidFill>
-                  <a:srgbClr val="0B1B1F"/>
-                </a:solidFill>
-                <a:latin typeface="Noto Sans SC"/>
-                <a:ea typeface="Noto Sans SC"/>
-              </a:rPr>
-              <a:t>E</a:t>
-            </a:r>
-          </a:p>
-        </p:txBody>
-      </p:sp>
-      <p:sp>
-        <p:nvSpPr>
-          <p:cNvPr id="23" name="TextBox 22"/>
-          <p:cNvSpPr txBox="1"/>
-          <p:nvPr/>
-        </p:nvSpPr>
-        <p:spPr>
-          <a:xfrm>
-            <a:off x="5960491" y="2333752"/>
-            <a:ext cx="525018" cy="205740"/>
+            <a:off x="5964555" y="2333752"/>
+            <a:ext cx="516890" cy="205740"/>
           </a:xfrm>
           <a:prstGeom prst="rect">
             <a:avLst/>
@@ -15328,7 +14932,7 @@
       </p:sp>
       <p:cxnSp>
         <p:nvCxnSpPr>
-          <p:cNvPr id="24" name="Connector 23"/>
+          <p:cNvPr id="23" name="Connector 22"/>
           <p:cNvCxnSpPr/>
           <p:nvPr/>
         </p:nvCxnSpPr>
@@ -15363,7 +14967,7 @@
       </p:cxnSp>
       <p:sp>
         <p:nvSpPr>
-          <p:cNvPr id="25" name="Oval 24"/>
+          <p:cNvPr id="24" name="Oval 23"/>
           <p:cNvSpPr/>
           <p:nvPr/>
         </p:nvSpPr>
@@ -15405,7 +15009,7 @@
       </p:sp>
       <p:sp>
         <p:nvSpPr>
-          <p:cNvPr id="26" name="Oval 25"/>
+          <p:cNvPr id="25" name="Oval 24"/>
           <p:cNvSpPr/>
           <p:nvPr/>
         </p:nvSpPr>
@@ -15449,14 +15053,50 @@
       </p:sp>
       <p:sp>
         <p:nvSpPr>
+          <p:cNvPr id="26" name="TextBox 25"/>
+          <p:cNvSpPr txBox="1"/>
+          <p:nvPr/>
+        </p:nvSpPr>
+        <p:spPr>
+          <a:xfrm>
+            <a:off x="6403818" y="1459992"/>
+            <a:ext cx="233679" cy="240030"/>
+          </a:xfrm>
+          <a:prstGeom prst="rect">
+            <a:avLst/>
+          </a:prstGeom>
+          <a:noFill/>
+        </p:spPr>
+        <p:txBody>
+          <a:bodyPr wrap="none" lIns="0" rIns="0" tIns="0" bIns="0">
+            <a:spAutoFit/>
+          </a:bodyPr>
+          <a:lstStyle/>
+          <a:p>
+            <a:pPr algn="ctr"/>
+            <a:r>
+              <a:rPr sz="1400" b="1">
+                <a:solidFill>
+                  <a:srgbClr val="0B1B1F"/>
+                </a:solidFill>
+                <a:latin typeface="Noto Sans SC"/>
+                <a:ea typeface="Noto Sans SC"/>
+              </a:rPr>
+              <a:t>D</a:t>
+            </a:r>
+          </a:p>
+        </p:txBody>
+      </p:sp>
+      <p:sp>
+        <p:nvSpPr>
           <p:cNvPr id="27" name="TextBox 26"/>
           <p:cNvSpPr txBox="1"/>
           <p:nvPr/>
         </p:nvSpPr>
         <p:spPr>
           <a:xfrm>
-            <a:off x="6403844" y="1459992"/>
-            <a:ext cx="233629" cy="240030"/>
+            <a:off x="6262213" y="2511552"/>
+            <a:ext cx="516890" cy="205740"/>
           </a:xfrm>
           <a:prstGeom prst="rect">
             <a:avLst/>
@@ -15471,42 +15111,6 @@
           <a:p>
             <a:pPr algn="ctr"/>
             <a:r>
-              <a:rPr sz="1400" b="1">
-                <a:solidFill>
-                  <a:srgbClr val="0B1B1F"/>
-                </a:solidFill>
-                <a:latin typeface="Noto Sans SC"/>
-                <a:ea typeface="Noto Sans SC"/>
-              </a:rPr>
-              <a:t>D</a:t>
-            </a:r>
-          </a:p>
-        </p:txBody>
-      </p:sp>
-      <p:sp>
-        <p:nvSpPr>
-          <p:cNvPr id="28" name="TextBox 27"/>
-          <p:cNvSpPr txBox="1"/>
-          <p:nvPr/>
-        </p:nvSpPr>
-        <p:spPr>
-          <a:xfrm>
-            <a:off x="6258149" y="2511552"/>
-            <a:ext cx="525018" cy="205740"/>
-          </a:xfrm>
-          <a:prstGeom prst="rect">
-            <a:avLst/>
-          </a:prstGeom>
-          <a:noFill/>
-        </p:spPr>
-        <p:txBody>
-          <a:bodyPr wrap="none" lIns="0" rIns="0" tIns="0" bIns="0">
-            <a:spAutoFit/>
-          </a:bodyPr>
-          <a:lstStyle/>
-          <a:p>
-            <a:pPr algn="ctr"/>
-            <a:r>
               <a:rPr sz="1200" b="0">
                 <a:solidFill>
                   <a:srgbClr val="BCD2D0"/>
@@ -15521,7 +15125,7 @@
       </p:sp>
       <p:sp>
         <p:nvSpPr>
-          <p:cNvPr id="29" name="Oval 28"/>
+          <p:cNvPr id="28" name="Oval 27"/>
           <p:cNvSpPr/>
           <p:nvPr/>
         </p:nvSpPr>
@@ -15565,14 +15169,50 @@
       </p:sp>
       <p:sp>
         <p:nvSpPr>
+          <p:cNvPr id="29" name="TextBox 28"/>
+          <p:cNvSpPr txBox="1"/>
+          <p:nvPr/>
+        </p:nvSpPr>
+        <p:spPr>
+          <a:xfrm>
+            <a:off x="9156571" y="1978152"/>
+            <a:ext cx="220979" cy="240030"/>
+          </a:xfrm>
+          <a:prstGeom prst="rect">
+            <a:avLst/>
+          </a:prstGeom>
+          <a:noFill/>
+        </p:spPr>
+        <p:txBody>
+          <a:bodyPr wrap="none" lIns="0" rIns="0" tIns="0" bIns="0">
+            <a:spAutoFit/>
+          </a:bodyPr>
+          <a:lstStyle/>
+          <a:p>
+            <a:pPr algn="ctr"/>
+            <a:r>
+              <a:rPr sz="1400" b="1">
+                <a:solidFill>
+                  <a:srgbClr val="0B1B1F"/>
+                </a:solidFill>
+                <a:latin typeface="Noto Sans SC"/>
+                <a:ea typeface="Noto Sans SC"/>
+              </a:rPr>
+              <a:t>C</a:t>
+            </a:r>
+          </a:p>
+        </p:txBody>
+      </p:sp>
+      <p:sp>
+        <p:nvSpPr>
           <p:cNvPr id="30" name="TextBox 29"/>
           <p:cNvSpPr txBox="1"/>
           <p:nvPr/>
         </p:nvSpPr>
         <p:spPr>
           <a:xfrm>
-            <a:off x="9155403" y="1978152"/>
-            <a:ext cx="223316" cy="240030"/>
+            <a:off x="8992741" y="2333752"/>
+            <a:ext cx="548640" cy="205740"/>
           </a:xfrm>
           <a:prstGeom prst="rect">
             <a:avLst/>
@@ -15587,42 +15227,6 @@
           <a:p>
             <a:pPr algn="ctr"/>
             <a:r>
-              <a:rPr sz="1400" b="1">
-                <a:solidFill>
-                  <a:srgbClr val="0B1B1F"/>
-                </a:solidFill>
-                <a:latin typeface="Noto Sans SC"/>
-                <a:ea typeface="Noto Sans SC"/>
-              </a:rPr>
-              <a:t>C</a:t>
-            </a:r>
-          </a:p>
-        </p:txBody>
-      </p:sp>
-      <p:sp>
-        <p:nvSpPr>
-          <p:cNvPr id="31" name="TextBox 30"/>
-          <p:cNvSpPr txBox="1"/>
-          <p:nvPr/>
-        </p:nvSpPr>
-        <p:spPr>
-          <a:xfrm>
-            <a:off x="8988703" y="2333752"/>
-            <a:ext cx="556717" cy="205740"/>
-          </a:xfrm>
-          <a:prstGeom prst="rect">
-            <a:avLst/>
-          </a:prstGeom>
-          <a:noFill/>
-        </p:spPr>
-        <p:txBody>
-          <a:bodyPr wrap="none" lIns="0" rIns="0" tIns="0" bIns="0">
-            <a:spAutoFit/>
-          </a:bodyPr>
-          <a:lstStyle/>
-          <a:p>
-            <a:pPr algn="ctr"/>
-            <a:r>
               <a:rPr sz="1200" b="0">
                 <a:solidFill>
                   <a:srgbClr val="BCD2D0"/>
@@ -15637,7 +15241,7 @@
       </p:sp>
       <p:sp>
         <p:nvSpPr>
-          <p:cNvPr id="32" name="Oval 31"/>
+          <p:cNvPr id="31" name="Oval 30"/>
           <p:cNvSpPr/>
           <p:nvPr/>
         </p:nvSpPr>
@@ -15681,50 +15285,50 @@
       </p:sp>
       <p:sp>
         <p:nvSpPr>
+          <p:cNvPr id="32" name="TextBox 31"/>
+          <p:cNvSpPr txBox="1"/>
+          <p:nvPr/>
+        </p:nvSpPr>
+        <p:spPr>
+          <a:xfrm>
+            <a:off x="10593948" y="1978152"/>
+            <a:ext cx="227329" cy="240030"/>
+          </a:xfrm>
+          <a:prstGeom prst="rect">
+            <a:avLst/>
+          </a:prstGeom>
+          <a:noFill/>
+        </p:spPr>
+        <p:txBody>
+          <a:bodyPr wrap="none" lIns="0" rIns="0" tIns="0" bIns="0">
+            <a:spAutoFit/>
+          </a:bodyPr>
+          <a:lstStyle/>
+          <a:p>
+            <a:pPr algn="ctr"/>
+            <a:r>
+              <a:rPr sz="1400" b="1">
+                <a:solidFill>
+                  <a:srgbClr val="0B1B1F"/>
+                </a:solidFill>
+                <a:latin typeface="Noto Sans SC"/>
+                <a:ea typeface="Noto Sans SC"/>
+              </a:rPr>
+              <a:t>B</a:t>
+            </a:r>
+          </a:p>
+        </p:txBody>
+      </p:sp>
+      <p:sp>
+        <p:nvSpPr>
           <p:cNvPr id="33" name="TextBox 32"/>
           <p:cNvSpPr txBox="1"/>
           <p:nvPr/>
         </p:nvSpPr>
         <p:spPr>
           <a:xfrm>
-            <a:off x="10593732" y="1978152"/>
-            <a:ext cx="227761" cy="240030"/>
-          </a:xfrm>
-          <a:prstGeom prst="rect">
-            <a:avLst/>
-          </a:prstGeom>
-          <a:noFill/>
-        </p:spPr>
-        <p:txBody>
-          <a:bodyPr wrap="none" lIns="0" rIns="0" tIns="0" bIns="0">
-            <a:spAutoFit/>
-          </a:bodyPr>
-          <a:lstStyle/>
-          <a:p>
-            <a:pPr algn="ctr"/>
-            <a:r>
-              <a:rPr sz="1400" b="1">
-                <a:solidFill>
-                  <a:srgbClr val="0B1B1F"/>
-                </a:solidFill>
-                <a:latin typeface="Noto Sans SC"/>
-                <a:ea typeface="Noto Sans SC"/>
-              </a:rPr>
-              <a:t>B</a:t>
-            </a:r>
-          </a:p>
-        </p:txBody>
-      </p:sp>
-      <p:sp>
-        <p:nvSpPr>
-          <p:cNvPr id="34" name="TextBox 33"/>
-          <p:cNvSpPr txBox="1"/>
-          <p:nvPr/>
-        </p:nvSpPr>
-        <p:spPr>
-          <a:xfrm>
-            <a:off x="10429254" y="2511552"/>
-            <a:ext cx="556717" cy="205740"/>
+            <a:off x="10433293" y="2511552"/>
+            <a:ext cx="548640" cy="205740"/>
           </a:xfrm>
           <a:prstGeom prst="rect">
             <a:avLst/>
@@ -15753,7 +15357,7 @@
       </p:sp>
       <p:cxnSp>
         <p:nvCxnSpPr>
-          <p:cNvPr id="35" name="Connector 34"/>
+          <p:cNvPr id="34" name="Connector 33"/>
           <p:cNvCxnSpPr/>
           <p:nvPr/>
         </p:nvCxnSpPr>
@@ -15788,7 +15392,7 @@
       </p:cxnSp>
       <p:sp>
         <p:nvSpPr>
-          <p:cNvPr id="36" name="Oval 35"/>
+          <p:cNvPr id="35" name="Oval 34"/>
           <p:cNvSpPr/>
           <p:nvPr/>
         </p:nvSpPr>
@@ -15830,7 +15434,7 @@
       </p:sp>
       <p:sp>
         <p:nvSpPr>
-          <p:cNvPr id="37" name="Oval 36"/>
+          <p:cNvPr id="36" name="Oval 35"/>
           <p:cNvSpPr/>
           <p:nvPr/>
         </p:nvSpPr>
@@ -15874,50 +15478,50 @@
       </p:sp>
       <p:sp>
         <p:nvSpPr>
+          <p:cNvPr id="37" name="TextBox 36"/>
+          <p:cNvSpPr txBox="1"/>
+          <p:nvPr/>
+        </p:nvSpPr>
+        <p:spPr>
+          <a:xfrm>
+            <a:off x="11065510" y="1459992"/>
+            <a:ext cx="220979" cy="240030"/>
+          </a:xfrm>
+          <a:prstGeom prst="rect">
+            <a:avLst/>
+          </a:prstGeom>
+          <a:noFill/>
+        </p:spPr>
+        <p:txBody>
+          <a:bodyPr wrap="none" lIns="0" rIns="0" tIns="0" bIns="0">
+            <a:spAutoFit/>
+          </a:bodyPr>
+          <a:lstStyle/>
+          <a:p>
+            <a:pPr algn="ctr"/>
+            <a:r>
+              <a:rPr sz="1400" b="1">
+                <a:solidFill>
+                  <a:srgbClr val="0B1B1F"/>
+                </a:solidFill>
+                <a:latin typeface="Noto Sans SC"/>
+                <a:ea typeface="Noto Sans SC"/>
+              </a:rPr>
+              <a:t>A</a:t>
+            </a:r>
+          </a:p>
+        </p:txBody>
+      </p:sp>
+      <p:sp>
+        <p:nvSpPr>
           <p:cNvPr id="38" name="TextBox 37"/>
           <p:cNvSpPr txBox="1"/>
           <p:nvPr/>
         </p:nvSpPr>
         <p:spPr>
           <a:xfrm>
-            <a:off x="11064963" y="1459992"/>
-            <a:ext cx="222072" cy="240030"/>
-          </a:xfrm>
-          <a:prstGeom prst="rect">
-            <a:avLst/>
-          </a:prstGeom>
-          <a:noFill/>
-        </p:spPr>
-        <p:txBody>
-          <a:bodyPr wrap="none" lIns="0" rIns="0" tIns="0" bIns="0">
-            <a:spAutoFit/>
-          </a:bodyPr>
-          <a:lstStyle/>
-          <a:p>
-            <a:pPr algn="ctr"/>
-            <a:r>
-              <a:rPr sz="1400" b="1">
-                <a:solidFill>
-                  <a:srgbClr val="0B1B1F"/>
-                </a:solidFill>
-                <a:latin typeface="Noto Sans SC"/>
-                <a:ea typeface="Noto Sans SC"/>
-              </a:rPr>
-              <a:t>A</a:t>
-            </a:r>
-          </a:p>
-        </p:txBody>
-      </p:sp>
-      <p:sp>
-        <p:nvSpPr>
-          <p:cNvPr id="39" name="TextBox 38"/>
-          <p:cNvSpPr txBox="1"/>
-          <p:nvPr/>
-        </p:nvSpPr>
-        <p:spPr>
-          <a:xfrm>
-            <a:off x="10897641" y="2333752"/>
-            <a:ext cx="556717" cy="205740"/>
+            <a:off x="10901680" y="2333752"/>
+            <a:ext cx="548640" cy="205740"/>
           </a:xfrm>
           <a:prstGeom prst="rect">
             <a:avLst/>
@@ -15946,7 +15550,7 @@
       </p:sp>
       <p:cxnSp>
         <p:nvCxnSpPr>
-          <p:cNvPr id="40" name="Connector 39"/>
+          <p:cNvPr id="39" name="Connector 38"/>
           <p:cNvCxnSpPr/>
           <p:nvPr/>
         </p:nvCxnSpPr>
@@ -15982,43 +15586,43 @@
       </p:cxnSp>
       <p:sp>
         <p:nvSpPr>
+          <p:cNvPr id="40" name="TextBox 39"/>
+          <p:cNvSpPr txBox="1"/>
+          <p:nvPr/>
+        </p:nvSpPr>
+        <p:spPr>
+          <a:xfrm>
+            <a:off x="6341110" y="3374644"/>
+            <a:ext cx="214629" cy="240030"/>
+          </a:xfrm>
+          <a:prstGeom prst="rect">
+            <a:avLst/>
+          </a:prstGeom>
+          <a:noFill/>
+        </p:spPr>
+        <p:txBody>
+          <a:bodyPr wrap="none" lIns="0" rIns="0" tIns="0" bIns="0">
+            <a:spAutoFit/>
+          </a:bodyPr>
+          <a:lstStyle/>
+          <a:p>
+            <a:pPr algn="l"/>
+            <a:r>
+              <a:rPr sz="1400" b="1">
+                <a:solidFill>
+                  <a:srgbClr val="BCD2D0"/>
+                </a:solidFill>
+                <a:latin typeface="Noto Sans SC"/>
+                <a:ea typeface="Noto Sans SC"/>
+              </a:rPr>
+              <a:t>k</a:t>
+            </a:r>
+          </a:p>
+        </p:txBody>
+      </p:sp>
+      <p:sp>
+        <p:nvSpPr>
           <p:cNvPr id="41" name="TextBox 40"/>
-          <p:cNvSpPr txBox="1"/>
-          <p:nvPr/>
-        </p:nvSpPr>
-        <p:spPr>
-          <a:xfrm>
-            <a:off x="6341110" y="3374644"/>
-            <a:ext cx="214071" cy="240030"/>
-          </a:xfrm>
-          <a:prstGeom prst="rect">
-            <a:avLst/>
-          </a:prstGeom>
-          <a:noFill/>
-        </p:spPr>
-        <p:txBody>
-          <a:bodyPr wrap="none" lIns="0" rIns="0" tIns="0" bIns="0">
-            <a:spAutoFit/>
-          </a:bodyPr>
-          <a:lstStyle/>
-          <a:p>
-            <a:pPr algn="l"/>
-            <a:r>
-              <a:rPr sz="1400" b="1">
-                <a:solidFill>
-                  <a:srgbClr val="BCD2D0"/>
-                </a:solidFill>
-                <a:latin typeface="Noto Sans SC"/>
-                <a:ea typeface="Noto Sans SC"/>
-              </a:rPr>
-              <a:t>k</a:t>
-            </a:r>
-          </a:p>
-        </p:txBody>
-      </p:sp>
-      <p:sp>
-        <p:nvSpPr>
-          <p:cNvPr id="42" name="TextBox 41"/>
           <p:cNvSpPr txBox="1"/>
           <p:nvPr/>
         </p:nvSpPr>
@@ -16054,50 +15658,50 @@
       </p:sp>
       <p:sp>
         <p:nvSpPr>
+          <p:cNvPr id="42" name="TextBox 41"/>
+          <p:cNvSpPr txBox="1"/>
+          <p:nvPr/>
+        </p:nvSpPr>
+        <p:spPr>
+          <a:xfrm>
+            <a:off x="8373109" y="3374644"/>
+            <a:ext cx="392430" cy="240030"/>
+          </a:xfrm>
+          <a:prstGeom prst="rect">
+            <a:avLst/>
+          </a:prstGeom>
+          <a:noFill/>
+        </p:spPr>
+        <p:txBody>
+          <a:bodyPr wrap="none" lIns="0" rIns="0" tIns="0" bIns="0">
+            <a:spAutoFit/>
+          </a:bodyPr>
+          <a:lstStyle/>
+          <a:p>
+            <a:pPr algn="l"/>
+            <a:r>
+              <a:rPr sz="1400" b="1">
+                <a:solidFill>
+                  <a:srgbClr val="BCD2D0"/>
+                </a:solidFill>
+                <a:latin typeface="Noto Sans SC"/>
+                <a:ea typeface="Noto Sans SC"/>
+              </a:rPr>
+              <a:t>cut</a:t>
+            </a:r>
+          </a:p>
+        </p:txBody>
+      </p:sp>
+      <p:sp>
+        <p:nvSpPr>
           <p:cNvPr id="43" name="TextBox 42"/>
           <p:cNvSpPr txBox="1"/>
           <p:nvPr/>
         </p:nvSpPr>
         <p:spPr>
           <a:xfrm>
-            <a:off x="8373109" y="3374644"/>
-            <a:ext cx="388492" cy="240030"/>
-          </a:xfrm>
-          <a:prstGeom prst="rect">
-            <a:avLst/>
-          </a:prstGeom>
-          <a:noFill/>
-        </p:spPr>
-        <p:txBody>
-          <a:bodyPr wrap="none" lIns="0" rIns="0" tIns="0" bIns="0">
-            <a:spAutoFit/>
-          </a:bodyPr>
-          <a:lstStyle/>
-          <a:p>
-            <a:pPr algn="l"/>
-            <a:r>
-              <a:rPr sz="1400" b="1">
-                <a:solidFill>
-                  <a:srgbClr val="BCD2D0"/>
-                </a:solidFill>
-                <a:latin typeface="Noto Sans SC"/>
-                <a:ea typeface="Noto Sans SC"/>
-              </a:rPr>
-              <a:t>cut</a:t>
-            </a:r>
-          </a:p>
-        </p:txBody>
-      </p:sp>
-      <p:sp>
-        <p:nvSpPr>
-          <p:cNvPr id="44" name="TextBox 43"/>
-          <p:cNvSpPr txBox="1"/>
-          <p:nvPr/>
-        </p:nvSpPr>
-        <p:spPr>
-          <a:xfrm>
             <a:off x="9135110" y="3374644"/>
-            <a:ext cx="991057" cy="240030"/>
+            <a:ext cx="1002030" cy="240030"/>
           </a:xfrm>
           <a:prstGeom prst="rect">
             <a:avLst/>
@@ -16126,14 +15730,14 @@
       </p:sp>
       <p:cxnSp>
         <p:nvCxnSpPr>
-          <p:cNvPr id="45" name="Connector 44"/>
+          <p:cNvPr id="44" name="Connector 43"/>
           <p:cNvCxnSpPr/>
           <p:nvPr/>
         </p:nvCxnSpPr>
         <p:spPr>
           <a:xfrm>
             <a:off x="6311900" y="3657600"/>
-            <a:ext cx="4102100" cy="0"/>
+            <a:ext cx="4229100" cy="0"/>
           </a:xfrm>
           <a:prstGeom prst="line">
             <a:avLst/>
@@ -16161,14 +15765,50 @@
       </p:cxnSp>
       <p:sp>
         <p:nvSpPr>
+          <p:cNvPr id="45" name="TextBox 44"/>
+          <p:cNvSpPr txBox="1"/>
+          <p:nvPr/>
+        </p:nvSpPr>
+        <p:spPr>
+          <a:xfrm>
+            <a:off x="6339840" y="3767836"/>
+            <a:ext cx="236220" cy="274320"/>
+          </a:xfrm>
+          <a:prstGeom prst="rect">
+            <a:avLst/>
+          </a:prstGeom>
+          <a:noFill/>
+        </p:spPr>
+        <p:txBody>
+          <a:bodyPr wrap="none" lIns="0" rIns="0" tIns="0" bIns="0">
+            <a:spAutoFit/>
+          </a:bodyPr>
+          <a:lstStyle/>
+          <a:p>
+            <a:pPr algn="l"/>
+            <a:r>
+              <a:rPr sz="1600" b="0">
+                <a:solidFill>
+                  <a:srgbClr val="F2F3E9"/>
+                </a:solidFill>
+                <a:latin typeface="Noto Sans SC"/>
+                <a:ea typeface="Noto Sans SC"/>
+              </a:rPr>
+              <a:t>1</a:t>
+            </a:r>
+          </a:p>
+        </p:txBody>
+      </p:sp>
+      <p:sp>
+        <p:nvSpPr>
           <p:cNvPr id="46" name="TextBox 45"/>
           <p:cNvSpPr txBox="1"/>
           <p:nvPr/>
         </p:nvSpPr>
         <p:spPr>
           <a:xfrm>
-            <a:off x="6339840" y="3767836"/>
-            <a:ext cx="234696" cy="274320"/>
+            <a:off x="6911340" y="3767836"/>
+            <a:ext cx="242570" cy="274320"/>
           </a:xfrm>
           <a:prstGeom prst="rect">
             <a:avLst/>
@@ -16190,7 +15830,7 @@
                 <a:latin typeface="Noto Sans SC"/>
                 <a:ea typeface="Noto Sans SC"/>
               </a:rPr>
-              <a:t>1</a:t>
+              <a:t>E</a:t>
             </a:r>
           </a:p>
         </p:txBody>
@@ -16203,8 +15843,8 @@
         </p:nvSpPr>
         <p:spPr>
           <a:xfrm>
-            <a:off x="6911340" y="3767836"/>
-            <a:ext cx="241604" cy="274320"/>
+            <a:off x="8371840" y="3767836"/>
+            <a:ext cx="236220" cy="274320"/>
           </a:xfrm>
           <a:prstGeom prst="rect">
             <a:avLst/>
@@ -16226,7 +15866,7 @@
                 <a:latin typeface="Noto Sans SC"/>
                 <a:ea typeface="Noto Sans SC"/>
               </a:rPr>
-              <a:t>E</a:t>
+              <a:t>6</a:t>
             </a:r>
           </a:p>
         </p:txBody>
@@ -16239,8 +15879,8 @@
         </p:nvSpPr>
         <p:spPr>
           <a:xfrm>
-            <a:off x="8371840" y="3767836"/>
-            <a:ext cx="234696" cy="274320"/>
+            <a:off x="9133840" y="3767836"/>
+            <a:ext cx="306070" cy="274320"/>
           </a:xfrm>
           <a:prstGeom prst="rect">
             <a:avLst/>
@@ -16262,42 +15902,6 @@
                 <a:latin typeface="Noto Sans SC"/>
                 <a:ea typeface="Noto Sans SC"/>
               </a:rPr>
-              <a:t>6</a:t>
-            </a:r>
-          </a:p>
-        </p:txBody>
-      </p:sp>
-      <p:sp>
-        <p:nvSpPr>
-          <p:cNvPr id="49" name="TextBox 48"/>
-          <p:cNvSpPr txBox="1"/>
-          <p:nvPr/>
-        </p:nvSpPr>
-        <p:spPr>
-          <a:xfrm>
-            <a:off x="9133840" y="3767836"/>
-            <a:ext cx="303580" cy="274320"/>
-          </a:xfrm>
-          <a:prstGeom prst="rect">
-            <a:avLst/>
-          </a:prstGeom>
-          <a:noFill/>
-        </p:spPr>
-        <p:txBody>
-          <a:bodyPr wrap="none" lIns="0" rIns="0" tIns="0" bIns="0">
-            <a:spAutoFit/>
-          </a:bodyPr>
-          <a:lstStyle/>
-          <a:p>
-            <a:pPr algn="l"/>
-            <a:r>
-              <a:rPr sz="1600" b="0">
-                <a:solidFill>
-                  <a:srgbClr val="F2F3E9"/>
-                </a:solidFill>
-                <a:latin typeface="Noto Sans SC"/>
-                <a:ea typeface="Noto Sans SC"/>
-              </a:rPr>
               <a:t>—</a:t>
             </a:r>
           </a:p>
@@ -16305,14 +15909,14 @@
       </p:sp>
       <p:sp>
         <p:nvSpPr>
-          <p:cNvPr id="50" name="Rounded Rectangle 49"/>
+          <p:cNvPr id="49" name="Rounded Rectangle 48"/>
           <p:cNvSpPr/>
           <p:nvPr/>
         </p:nvSpPr>
         <p:spPr>
           <a:xfrm>
             <a:off x="6261100" y="4140200"/>
-            <a:ext cx="4241800" cy="393700"/>
+            <a:ext cx="4368800" cy="393700"/>
           </a:xfrm>
           <a:prstGeom prst="roundRect">
             <a:avLst>
@@ -16351,14 +15955,50 @@
       </p:sp>
       <p:sp>
         <p:nvSpPr>
+          <p:cNvPr id="50" name="TextBox 49"/>
+          <p:cNvSpPr txBox="1"/>
+          <p:nvPr/>
+        </p:nvSpPr>
+        <p:spPr>
+          <a:xfrm>
+            <a:off x="6339840" y="4186936"/>
+            <a:ext cx="236220" cy="274320"/>
+          </a:xfrm>
+          <a:prstGeom prst="rect">
+            <a:avLst/>
+          </a:prstGeom>
+          <a:noFill/>
+        </p:spPr>
+        <p:txBody>
+          <a:bodyPr wrap="none" lIns="0" rIns="0" tIns="0" bIns="0">
+            <a:spAutoFit/>
+          </a:bodyPr>
+          <a:lstStyle/>
+          <a:p>
+            <a:pPr algn="l"/>
+            <a:r>
+              <a:rPr sz="1600" b="0">
+                <a:solidFill>
+                  <a:srgbClr val="F2F3E9"/>
+                </a:solidFill>
+                <a:latin typeface="Noto Sans SC"/>
+                <a:ea typeface="Noto Sans SC"/>
+              </a:rPr>
+              <a:t>2</a:t>
+            </a:r>
+          </a:p>
+        </p:txBody>
+      </p:sp>
+      <p:sp>
+        <p:nvSpPr>
           <p:cNvPr id="51" name="TextBox 50"/>
           <p:cNvSpPr txBox="1"/>
           <p:nvPr/>
         </p:nvSpPr>
         <p:spPr>
           <a:xfrm>
-            <a:off x="6339840" y="4186936"/>
-            <a:ext cx="234696" cy="274320"/>
+            <a:off x="6911340" y="4186936"/>
+            <a:ext cx="382270" cy="274320"/>
           </a:xfrm>
           <a:prstGeom prst="rect">
             <a:avLst/>
@@ -16380,7 +16020,7 @@
                 <a:latin typeface="Noto Sans SC"/>
                 <a:ea typeface="Noto Sans SC"/>
               </a:rPr>
-              <a:t>2</a:t>
+              <a:t>ED</a:t>
             </a:r>
           </a:p>
         </p:txBody>
@@ -16393,8 +16033,8 @@
         </p:nvSpPr>
         <p:spPr>
           <a:xfrm>
-            <a:off x="6911340" y="4186936"/>
-            <a:ext cx="381406" cy="274320"/>
+            <a:off x="8371840" y="4186936"/>
+            <a:ext cx="236220" cy="274320"/>
           </a:xfrm>
           <a:prstGeom prst="rect">
             <a:avLst/>
@@ -16416,7 +16056,7 @@
                 <a:latin typeface="Noto Sans SC"/>
                 <a:ea typeface="Noto Sans SC"/>
               </a:rPr>
-              <a:t>ED</a:t>
+              <a:t>3</a:t>
             </a:r>
           </a:p>
         </p:txBody>
@@ -16424,42 +16064,6 @@
       <p:sp>
         <p:nvSpPr>
           <p:cNvPr id="53" name="TextBox 52"/>
-          <p:cNvSpPr txBox="1"/>
-          <p:nvPr/>
-        </p:nvSpPr>
-        <p:spPr>
-          <a:xfrm>
-            <a:off x="8371840" y="4186936"/>
-            <a:ext cx="234696" cy="274320"/>
-          </a:xfrm>
-          <a:prstGeom prst="rect">
-            <a:avLst/>
-          </a:prstGeom>
-          <a:noFill/>
-        </p:spPr>
-        <p:txBody>
-          <a:bodyPr wrap="none" lIns="0" rIns="0" tIns="0" bIns="0">
-            <a:spAutoFit/>
-          </a:bodyPr>
-          <a:lstStyle/>
-          <a:p>
-            <a:pPr algn="l"/>
-            <a:r>
-              <a:rPr sz="1600" b="0">
-                <a:solidFill>
-                  <a:srgbClr val="F2F3E9"/>
-                </a:solidFill>
-                <a:latin typeface="Noto Sans SC"/>
-                <a:ea typeface="Noto Sans SC"/>
-              </a:rPr>
-              <a:t>3</a:t>
-            </a:r>
-          </a:p>
-        </p:txBody>
-      </p:sp>
-      <p:sp>
-        <p:nvSpPr>
-          <p:cNvPr id="54" name="TextBox 53"/>
           <p:cNvSpPr txBox="1"/>
           <p:nvPr/>
         </p:nvSpPr>
@@ -16495,14 +16099,50 @@
       </p:sp>
       <p:sp>
         <p:nvSpPr>
+          <p:cNvPr id="54" name="TextBox 53"/>
+          <p:cNvSpPr txBox="1"/>
+          <p:nvPr/>
+        </p:nvSpPr>
+        <p:spPr>
+          <a:xfrm>
+            <a:off x="6339840" y="4606036"/>
+            <a:ext cx="236220" cy="274320"/>
+          </a:xfrm>
+          <a:prstGeom prst="rect">
+            <a:avLst/>
+          </a:prstGeom>
+          <a:noFill/>
+        </p:spPr>
+        <p:txBody>
+          <a:bodyPr wrap="none" lIns="0" rIns="0" tIns="0" bIns="0">
+            <a:spAutoFit/>
+          </a:bodyPr>
+          <a:lstStyle/>
+          <a:p>
+            <a:pPr algn="l"/>
+            <a:r>
+              <a:rPr sz="1600" b="0">
+                <a:solidFill>
+                  <a:srgbClr val="F2F3E9"/>
+                </a:solidFill>
+                <a:latin typeface="Noto Sans SC"/>
+                <a:ea typeface="Noto Sans SC"/>
+              </a:rPr>
+              <a:t>3</a:t>
+            </a:r>
+          </a:p>
+        </p:txBody>
+      </p:sp>
+      <p:sp>
+        <p:nvSpPr>
           <p:cNvPr id="55" name="TextBox 54"/>
           <p:cNvSpPr txBox="1"/>
           <p:nvPr/>
         </p:nvSpPr>
         <p:spPr>
           <a:xfrm>
-            <a:off x="6339840" y="4606036"/>
-            <a:ext cx="234696" cy="274320"/>
+            <a:off x="6911340" y="4606036"/>
+            <a:ext cx="509270" cy="274320"/>
           </a:xfrm>
           <a:prstGeom prst="rect">
             <a:avLst/>
@@ -16524,7 +16164,7 @@
                 <a:latin typeface="Noto Sans SC"/>
                 <a:ea typeface="Noto Sans SC"/>
               </a:rPr>
-              <a:t>3</a:t>
+              <a:t>EDC</a:t>
             </a:r>
           </a:p>
         </p:txBody>
@@ -16537,8 +16177,8 @@
         </p:nvSpPr>
         <p:spPr>
           <a:xfrm>
-            <a:off x="6911340" y="4606036"/>
-            <a:ext cx="511048" cy="274320"/>
+            <a:off x="8371840" y="4606036"/>
+            <a:ext cx="236220" cy="274320"/>
           </a:xfrm>
           <a:prstGeom prst="rect">
             <a:avLst/>
@@ -16560,7 +16200,7 @@
                 <a:latin typeface="Noto Sans SC"/>
                 <a:ea typeface="Noto Sans SC"/>
               </a:rPr>
-              <a:t>EDC</a:t>
+              <a:t>5</a:t>
             </a:r>
           </a:p>
         </p:txBody>
@@ -16568,42 +16208,6 @@
       <p:sp>
         <p:nvSpPr>
           <p:cNvPr id="57" name="TextBox 56"/>
-          <p:cNvSpPr txBox="1"/>
-          <p:nvPr/>
-        </p:nvSpPr>
-        <p:spPr>
-          <a:xfrm>
-            <a:off x="8371840" y="4606036"/>
-            <a:ext cx="234696" cy="274320"/>
-          </a:xfrm>
-          <a:prstGeom prst="rect">
-            <a:avLst/>
-          </a:prstGeom>
-          <a:noFill/>
-        </p:spPr>
-        <p:txBody>
-          <a:bodyPr wrap="none" lIns="0" rIns="0" tIns="0" bIns="0">
-            <a:spAutoFit/>
-          </a:bodyPr>
-          <a:lstStyle/>
-          <a:p>
-            <a:pPr algn="l"/>
-            <a:r>
-              <a:rPr sz="1600" b="0">
-                <a:solidFill>
-                  <a:srgbClr val="F2F3E9"/>
-                </a:solidFill>
-                <a:latin typeface="Noto Sans SC"/>
-                <a:ea typeface="Noto Sans SC"/>
-              </a:rPr>
-              <a:t>5</a:t>
-            </a:r>
-          </a:p>
-        </p:txBody>
-      </p:sp>
-      <p:sp>
-        <p:nvSpPr>
-          <p:cNvPr id="58" name="TextBox 57"/>
           <p:cNvSpPr txBox="1"/>
           <p:nvPr/>
         </p:nvSpPr>
@@ -16639,14 +16243,50 @@
       </p:sp>
       <p:sp>
         <p:nvSpPr>
+          <p:cNvPr id="58" name="TextBox 57"/>
+          <p:cNvSpPr txBox="1"/>
+          <p:nvPr/>
+        </p:nvSpPr>
+        <p:spPr>
+          <a:xfrm>
+            <a:off x="6339840" y="5025136"/>
+            <a:ext cx="236220" cy="274320"/>
+          </a:xfrm>
+          <a:prstGeom prst="rect">
+            <a:avLst/>
+          </a:prstGeom>
+          <a:noFill/>
+        </p:spPr>
+        <p:txBody>
+          <a:bodyPr wrap="none" lIns="0" rIns="0" tIns="0" bIns="0">
+            <a:spAutoFit/>
+          </a:bodyPr>
+          <a:lstStyle/>
+          <a:p>
+            <a:pPr algn="l"/>
+            <a:r>
+              <a:rPr sz="1600" b="0">
+                <a:solidFill>
+                  <a:srgbClr val="F2F3E9"/>
+                </a:solidFill>
+                <a:latin typeface="Noto Sans SC"/>
+                <a:ea typeface="Noto Sans SC"/>
+              </a:rPr>
+              <a:t>4</a:t>
+            </a:r>
+          </a:p>
+        </p:txBody>
+      </p:sp>
+      <p:sp>
+        <p:nvSpPr>
           <p:cNvPr id="59" name="TextBox 58"/>
           <p:cNvSpPr txBox="1"/>
           <p:nvPr/>
         </p:nvSpPr>
         <p:spPr>
           <a:xfrm>
-            <a:off x="6339840" y="5025136"/>
-            <a:ext cx="234696" cy="274320"/>
+            <a:off x="6911340" y="5025136"/>
+            <a:ext cx="642620" cy="274320"/>
           </a:xfrm>
           <a:prstGeom prst="rect">
             <a:avLst/>
@@ -16668,7 +16308,7 @@
                 <a:latin typeface="Noto Sans SC"/>
                 <a:ea typeface="Noto Sans SC"/>
               </a:rPr>
-              <a:t>4</a:t>
+              <a:t>EDCB</a:t>
             </a:r>
           </a:p>
         </p:txBody>
@@ -16681,8 +16321,8 @@
         </p:nvSpPr>
         <p:spPr>
           <a:xfrm>
-            <a:off x="6911340" y="5025136"/>
-            <a:ext cx="644550" cy="274320"/>
+            <a:off x="8371840" y="5025136"/>
+            <a:ext cx="236220" cy="274320"/>
           </a:xfrm>
           <a:prstGeom prst="rect">
             <a:avLst/>
@@ -16704,7 +16344,7 @@
                 <a:latin typeface="Noto Sans SC"/>
                 <a:ea typeface="Noto Sans SC"/>
               </a:rPr>
-              <a:t>EDCB</a:t>
+              <a:t>6</a:t>
             </a:r>
           </a:p>
         </p:txBody>
@@ -16717,44 +16357,8 @@
         </p:nvSpPr>
         <p:spPr>
           <a:xfrm>
-            <a:off x="8371840" y="5025136"/>
-            <a:ext cx="234696" cy="274320"/>
-          </a:xfrm>
-          <a:prstGeom prst="rect">
-            <a:avLst/>
-          </a:prstGeom>
-          <a:noFill/>
-        </p:spPr>
-        <p:txBody>
-          <a:bodyPr wrap="none" lIns="0" rIns="0" tIns="0" bIns="0">
-            <a:spAutoFit/>
-          </a:bodyPr>
-          <a:lstStyle/>
-          <a:p>
-            <a:pPr algn="l"/>
-            <a:r>
-              <a:rPr sz="1600" b="0">
-                <a:solidFill>
-                  <a:srgbClr val="F2F3E9"/>
-                </a:solidFill>
-                <a:latin typeface="Noto Sans SC"/>
-                <a:ea typeface="Noto Sans SC"/>
-              </a:rPr>
-              <a:t>6</a:t>
-            </a:r>
-          </a:p>
-        </p:txBody>
-      </p:sp>
-      <p:sp>
-        <p:nvSpPr>
-          <p:cNvPr id="62" name="TextBox 61"/>
-          <p:cNvSpPr txBox="1"/>
-          <p:nvPr/>
-        </p:nvSpPr>
-        <p:spPr>
-          <a:xfrm>
             <a:off x="9133840" y="5025136"/>
-            <a:ext cx="303580" cy="274320"/>
+            <a:ext cx="306070" cy="274320"/>
           </a:xfrm>
           <a:prstGeom prst="rect">
             <a:avLst/>
@@ -17007,7 +16611,7 @@
         <p:spPr>
           <a:xfrm>
             <a:off x="563880" y="6512052"/>
-            <a:ext cx="1503426" cy="205740"/>
+            <a:ext cx="1494790" cy="205740"/>
           </a:xfrm>
           <a:prstGeom prst="rect">
             <a:avLst/>
@@ -17042,8 +16646,8 @@
         </p:nvSpPr>
         <p:spPr>
           <a:xfrm>
-            <a:off x="11108524" y="6499098"/>
-            <a:ext cx="561505" cy="222885"/>
+            <a:off x="11113770" y="6499098"/>
+            <a:ext cx="556260" cy="222885"/>
           </a:xfrm>
           <a:prstGeom prst="rect">
             <a:avLst/>
@@ -17072,43 +16676,7 @@
       </p:sp>
       <p:sp>
         <p:nvSpPr>
-          <p:cNvPr id="9" name="TextBox 8"/>
-          <p:cNvSpPr txBox="1"/>
-          <p:nvPr/>
-        </p:nvSpPr>
-        <p:spPr>
-          <a:xfrm>
-            <a:off x="10855147" y="377952"/>
-            <a:ext cx="811072" cy="205740"/>
-          </a:xfrm>
-          <a:prstGeom prst="rect">
-            <a:avLst/>
-          </a:prstGeom>
-          <a:noFill/>
-        </p:spPr>
-        <p:txBody>
-          <a:bodyPr wrap="none" lIns="0" rIns="0" tIns="0" bIns="0">
-            <a:spAutoFit/>
-          </a:bodyPr>
-          <a:lstStyle/>
-          <a:p>
-            <a:pPr algn="r"/>
-            <a:r>
-              <a:rPr sz="1200" b="0">
-                <a:solidFill>
-                  <a:srgbClr val="6F8F8F"/>
-                </a:solidFill>
-                <a:latin typeface="Noto Sans SC"/>
-                <a:ea typeface="Noto Sans SC"/>
-              </a:rPr>
-              <a:t>影片 02:31</a:t>
-            </a:r>
-          </a:p>
-        </p:txBody>
-      </p:sp>
-      <p:sp>
-        <p:nvSpPr>
-          <p:cNvPr id="10" name="Oval 9"/>
+          <p:cNvPr id="9" name="Oval 8"/>
           <p:cNvSpPr/>
           <p:nvPr/>
         </p:nvSpPr>
@@ -17150,7 +16718,7 @@
       </p:sp>
       <p:sp>
         <p:nvSpPr>
-          <p:cNvPr id="11" name="TextBox 10"/>
+          <p:cNvPr id="10" name="TextBox 9"/>
           <p:cNvSpPr txBox="1"/>
           <p:nvPr/>
         </p:nvSpPr>
@@ -17190,7 +16758,7 @@
       </p:sp>
       <p:sp>
         <p:nvSpPr>
-          <p:cNvPr id="12" name="Oval 11"/>
+          <p:cNvPr id="11" name="Oval 10"/>
           <p:cNvSpPr/>
           <p:nvPr/>
         </p:nvSpPr>
@@ -17232,7 +16800,7 @@
       </p:sp>
       <p:sp>
         <p:nvSpPr>
-          <p:cNvPr id="13" name="TextBox 12"/>
+          <p:cNvPr id="12" name="TextBox 11"/>
           <p:cNvSpPr txBox="1"/>
           <p:nvPr/>
         </p:nvSpPr>
@@ -17272,7 +16840,7 @@
       </p:sp>
       <p:sp>
         <p:nvSpPr>
-          <p:cNvPr id="14" name="Oval 13"/>
+          <p:cNvPr id="13" name="Oval 12"/>
           <p:cNvSpPr/>
           <p:nvPr/>
         </p:nvSpPr>
@@ -17314,7 +16882,7 @@
       </p:sp>
       <p:sp>
         <p:nvSpPr>
-          <p:cNvPr id="15" name="TextBox 14"/>
+          <p:cNvPr id="14" name="TextBox 13"/>
           <p:cNvSpPr txBox="1"/>
           <p:nvPr/>
         </p:nvSpPr>
@@ -17354,7 +16922,7 @@
       </p:sp>
       <p:sp>
         <p:nvSpPr>
-          <p:cNvPr id="16" name="Oval 15"/>
+          <p:cNvPr id="15" name="Oval 14"/>
           <p:cNvSpPr/>
           <p:nvPr/>
         </p:nvSpPr>
@@ -17396,7 +16964,7 @@
       </p:sp>
       <p:sp>
         <p:nvSpPr>
-          <p:cNvPr id="17" name="TextBox 16"/>
+          <p:cNvPr id="16" name="TextBox 15"/>
           <p:cNvSpPr txBox="1"/>
           <p:nvPr/>
         </p:nvSpPr>
@@ -17446,7 +17014,7 @@
       </p:sp>
       <p:sp>
         <p:nvSpPr>
-          <p:cNvPr id="18" name="TextBox 17"/>
+          <p:cNvPr id="17" name="TextBox 16"/>
           <p:cNvSpPr txBox="1"/>
           <p:nvPr/>
         </p:nvSpPr>
@@ -17482,14 +17050,14 @@
       </p:sp>
       <p:sp>
         <p:nvSpPr>
-          <p:cNvPr id="19" name="TextBox 18"/>
+          <p:cNvPr id="18" name="TextBox 17"/>
           <p:cNvSpPr txBox="1"/>
           <p:nvPr/>
         </p:nvSpPr>
         <p:spPr>
           <a:xfrm>
             <a:off x="7484109" y="1596644"/>
-            <a:ext cx="929716" cy="240030"/>
+            <a:ext cx="932180" cy="240030"/>
           </a:xfrm>
           <a:prstGeom prst="rect">
             <a:avLst/>
@@ -17518,7 +17086,7 @@
       </p:sp>
       <p:cxnSp>
         <p:nvCxnSpPr>
-          <p:cNvPr id="20" name="Connector 19"/>
+          <p:cNvPr id="19" name="Connector 18"/>
           <p:cNvCxnSpPr/>
           <p:nvPr/>
         </p:nvCxnSpPr>
@@ -17553,14 +17121,50 @@
       </p:cxnSp>
       <p:sp>
         <p:nvSpPr>
+          <p:cNvPr id="20" name="TextBox 19"/>
+          <p:cNvSpPr txBox="1"/>
+          <p:nvPr/>
+        </p:nvSpPr>
+        <p:spPr>
+          <a:xfrm>
+            <a:off x="6339840" y="1977136"/>
+            <a:ext cx="242570" cy="274320"/>
+          </a:xfrm>
+          <a:prstGeom prst="rect">
+            <a:avLst/>
+          </a:prstGeom>
+          <a:noFill/>
+        </p:spPr>
+        <p:txBody>
+          <a:bodyPr wrap="none" lIns="0" rIns="0" tIns="0" bIns="0">
+            <a:spAutoFit/>
+          </a:bodyPr>
+          <a:lstStyle/>
+          <a:p>
+            <a:pPr algn="l"/>
+            <a:r>
+              <a:rPr sz="1600" b="0">
+                <a:solidFill>
+                  <a:srgbClr val="F2F3E9"/>
+                </a:solidFill>
+                <a:latin typeface="Noto Sans SC"/>
+                <a:ea typeface="Noto Sans SC"/>
+              </a:rPr>
+              <a:t>A</a:t>
+            </a:r>
+          </a:p>
+        </p:txBody>
+      </p:sp>
+      <p:sp>
+        <p:nvSpPr>
           <p:cNvPr id="21" name="TextBox 20"/>
           <p:cNvSpPr txBox="1"/>
           <p:nvPr/>
         </p:nvSpPr>
         <p:spPr>
           <a:xfrm>
-            <a:off x="6339840" y="1977136"/>
-            <a:ext cx="245465" cy="274320"/>
+            <a:off x="7482840" y="1977136"/>
+            <a:ext cx="236220" cy="274320"/>
           </a:xfrm>
           <a:prstGeom prst="rect">
             <a:avLst/>
@@ -17582,7 +17186,7 @@
                 <a:latin typeface="Noto Sans SC"/>
                 <a:ea typeface="Noto Sans SC"/>
               </a:rPr>
-              <a:t>A</a:t>
+              <a:t>6</a:t>
             </a:r>
           </a:p>
         </p:txBody>
@@ -17595,8 +17199,8 @@
         </p:nvSpPr>
         <p:spPr>
           <a:xfrm>
-            <a:off x="7482840" y="1977136"/>
-            <a:ext cx="234696" cy="274320"/>
+            <a:off x="6339840" y="2383536"/>
+            <a:ext cx="255270" cy="274320"/>
           </a:xfrm>
           <a:prstGeom prst="rect">
             <a:avLst/>
@@ -17618,6 +17222,258 @@
                 <a:latin typeface="Noto Sans SC"/>
                 <a:ea typeface="Noto Sans SC"/>
               </a:rPr>
+              <a:t>B</a:t>
+            </a:r>
+          </a:p>
+        </p:txBody>
+      </p:sp>
+      <p:sp>
+        <p:nvSpPr>
+          <p:cNvPr id="23" name="TextBox 22"/>
+          <p:cNvSpPr txBox="1"/>
+          <p:nvPr/>
+        </p:nvSpPr>
+        <p:spPr>
+          <a:xfrm>
+            <a:off x="7482840" y="2383536"/>
+            <a:ext cx="236220" cy="274320"/>
+          </a:xfrm>
+          <a:prstGeom prst="rect">
+            <a:avLst/>
+          </a:prstGeom>
+          <a:noFill/>
+        </p:spPr>
+        <p:txBody>
+          <a:bodyPr wrap="none" lIns="0" rIns="0" tIns="0" bIns="0">
+            <a:spAutoFit/>
+          </a:bodyPr>
+          <a:lstStyle/>
+          <a:p>
+            <a:pPr algn="l"/>
+            <a:r>
+              <a:rPr sz="1600" b="0">
+                <a:solidFill>
+                  <a:srgbClr val="F2F3E9"/>
+                </a:solidFill>
+                <a:latin typeface="Noto Sans SC"/>
+                <a:ea typeface="Noto Sans SC"/>
+              </a:rPr>
+              <a:t>9</a:t>
+            </a:r>
+          </a:p>
+        </p:txBody>
+      </p:sp>
+      <p:sp>
+        <p:nvSpPr>
+          <p:cNvPr id="24" name="TextBox 23"/>
+          <p:cNvSpPr txBox="1"/>
+          <p:nvPr/>
+        </p:nvSpPr>
+        <p:spPr>
+          <a:xfrm>
+            <a:off x="6339840" y="2789936"/>
+            <a:ext cx="248920" cy="274320"/>
+          </a:xfrm>
+          <a:prstGeom prst="rect">
+            <a:avLst/>
+          </a:prstGeom>
+          <a:noFill/>
+        </p:spPr>
+        <p:txBody>
+          <a:bodyPr wrap="none" lIns="0" rIns="0" tIns="0" bIns="0">
+            <a:spAutoFit/>
+          </a:bodyPr>
+          <a:lstStyle/>
+          <a:p>
+            <a:pPr algn="l"/>
+            <a:r>
+              <a:rPr sz="1600" b="0">
+                <a:solidFill>
+                  <a:srgbClr val="F2F3E9"/>
+                </a:solidFill>
+                <a:latin typeface="Noto Sans SC"/>
+                <a:ea typeface="Noto Sans SC"/>
+              </a:rPr>
+              <a:t>C</a:t>
+            </a:r>
+          </a:p>
+        </p:txBody>
+      </p:sp>
+      <p:sp>
+        <p:nvSpPr>
+          <p:cNvPr id="25" name="TextBox 24"/>
+          <p:cNvSpPr txBox="1"/>
+          <p:nvPr/>
+        </p:nvSpPr>
+        <p:spPr>
+          <a:xfrm>
+            <a:off x="7482840" y="2789936"/>
+            <a:ext cx="236220" cy="274320"/>
+          </a:xfrm>
+          <a:prstGeom prst="rect">
+            <a:avLst/>
+          </a:prstGeom>
+          <a:noFill/>
+        </p:spPr>
+        <p:txBody>
+          <a:bodyPr wrap="none" lIns="0" rIns="0" tIns="0" bIns="0">
+            <a:spAutoFit/>
+          </a:bodyPr>
+          <a:lstStyle/>
+          <a:p>
+            <a:pPr algn="l"/>
+            <a:r>
+              <a:rPr sz="1600" b="0">
+                <a:solidFill>
+                  <a:srgbClr val="F2F3E9"/>
+                </a:solidFill>
+                <a:latin typeface="Noto Sans SC"/>
+                <a:ea typeface="Noto Sans SC"/>
+              </a:rPr>
+              <a:t>8</a:t>
+            </a:r>
+          </a:p>
+        </p:txBody>
+      </p:sp>
+      <p:sp>
+        <p:nvSpPr>
+          <p:cNvPr id="26" name="TextBox 25"/>
+          <p:cNvSpPr txBox="1"/>
+          <p:nvPr/>
+        </p:nvSpPr>
+        <p:spPr>
+          <a:xfrm>
+            <a:off x="6339840" y="3196336"/>
+            <a:ext cx="261620" cy="274320"/>
+          </a:xfrm>
+          <a:prstGeom prst="rect">
+            <a:avLst/>
+          </a:prstGeom>
+          <a:noFill/>
+        </p:spPr>
+        <p:txBody>
+          <a:bodyPr wrap="none" lIns="0" rIns="0" tIns="0" bIns="0">
+            <a:spAutoFit/>
+          </a:bodyPr>
+          <a:lstStyle/>
+          <a:p>
+            <a:pPr algn="l"/>
+            <a:r>
+              <a:rPr sz="1600" b="0">
+                <a:solidFill>
+                  <a:srgbClr val="F2F3E9"/>
+                </a:solidFill>
+                <a:latin typeface="Noto Sans SC"/>
+                <a:ea typeface="Noto Sans SC"/>
+              </a:rPr>
+              <a:t>D</a:t>
+            </a:r>
+          </a:p>
+        </p:txBody>
+      </p:sp>
+      <p:sp>
+        <p:nvSpPr>
+          <p:cNvPr id="27" name="TextBox 26"/>
+          <p:cNvSpPr txBox="1"/>
+          <p:nvPr/>
+        </p:nvSpPr>
+        <p:spPr>
+          <a:xfrm>
+            <a:off x="7482840" y="3196336"/>
+            <a:ext cx="236220" cy="274320"/>
+          </a:xfrm>
+          <a:prstGeom prst="rect">
+            <a:avLst/>
+          </a:prstGeom>
+          <a:noFill/>
+        </p:spPr>
+        <p:txBody>
+          <a:bodyPr wrap="none" lIns="0" rIns="0" tIns="0" bIns="0">
+            <a:spAutoFit/>
+          </a:bodyPr>
+          <a:lstStyle/>
+          <a:p>
+            <a:pPr algn="l"/>
+            <a:r>
+              <a:rPr sz="1600" b="0">
+                <a:solidFill>
+                  <a:srgbClr val="F2F3E9"/>
+                </a:solidFill>
+                <a:latin typeface="Noto Sans SC"/>
+                <a:ea typeface="Noto Sans SC"/>
+              </a:rPr>
+              <a:t>7</a:t>
+            </a:r>
+          </a:p>
+        </p:txBody>
+      </p:sp>
+      <p:sp>
+        <p:nvSpPr>
+          <p:cNvPr id="28" name="TextBox 27"/>
+          <p:cNvSpPr txBox="1"/>
+          <p:nvPr/>
+        </p:nvSpPr>
+        <p:spPr>
+          <a:xfrm>
+            <a:off x="6339840" y="3602736"/>
+            <a:ext cx="242570" cy="274320"/>
+          </a:xfrm>
+          <a:prstGeom prst="rect">
+            <a:avLst/>
+          </a:prstGeom>
+          <a:noFill/>
+        </p:spPr>
+        <p:txBody>
+          <a:bodyPr wrap="none" lIns="0" rIns="0" tIns="0" bIns="0">
+            <a:spAutoFit/>
+          </a:bodyPr>
+          <a:lstStyle/>
+          <a:p>
+            <a:pPr algn="l"/>
+            <a:r>
+              <a:rPr sz="1600" b="0">
+                <a:solidFill>
+                  <a:srgbClr val="F2F3E9"/>
+                </a:solidFill>
+                <a:latin typeface="Noto Sans SC"/>
+                <a:ea typeface="Noto Sans SC"/>
+              </a:rPr>
+              <a:t>E</a:t>
+            </a:r>
+          </a:p>
+        </p:txBody>
+      </p:sp>
+      <p:sp>
+        <p:nvSpPr>
+          <p:cNvPr id="29" name="TextBox 28"/>
+          <p:cNvSpPr txBox="1"/>
+          <p:nvPr/>
+        </p:nvSpPr>
+        <p:spPr>
+          <a:xfrm>
+            <a:off x="7482840" y="3602736"/>
+            <a:ext cx="236220" cy="274320"/>
+          </a:xfrm>
+          <a:prstGeom prst="rect">
+            <a:avLst/>
+          </a:prstGeom>
+          <a:noFill/>
+        </p:spPr>
+        <p:txBody>
+          <a:bodyPr wrap="none" lIns="0" rIns="0" tIns="0" bIns="0">
+            <a:spAutoFit/>
+          </a:bodyPr>
+          <a:lstStyle/>
+          <a:p>
+            <a:pPr algn="l"/>
+            <a:r>
+              <a:rPr sz="1600" b="0">
+                <a:solidFill>
+                  <a:srgbClr val="F2F3E9"/>
+                </a:solidFill>
+                <a:latin typeface="Noto Sans SC"/>
+                <a:ea typeface="Noto Sans SC"/>
+              </a:rPr>
               <a:t>6</a:t>
             </a:r>
           </a:p>
@@ -17625,295 +17481,7 @@
       </p:sp>
       <p:sp>
         <p:nvSpPr>
-          <p:cNvPr id="23" name="TextBox 22"/>
-          <p:cNvSpPr txBox="1"/>
-          <p:nvPr/>
-        </p:nvSpPr>
-        <p:spPr>
-          <a:xfrm>
-            <a:off x="6339840" y="2383536"/>
-            <a:ext cx="255422" cy="274320"/>
-          </a:xfrm>
-          <a:prstGeom prst="rect">
-            <a:avLst/>
-          </a:prstGeom>
-          <a:noFill/>
-        </p:spPr>
-        <p:txBody>
-          <a:bodyPr wrap="none" lIns="0" rIns="0" tIns="0" bIns="0">
-            <a:spAutoFit/>
-          </a:bodyPr>
-          <a:lstStyle/>
-          <a:p>
-            <a:pPr algn="l"/>
-            <a:r>
-              <a:rPr sz="1600" b="0">
-                <a:solidFill>
-                  <a:srgbClr val="F2F3E9"/>
-                </a:solidFill>
-                <a:latin typeface="Noto Sans SC"/>
-                <a:ea typeface="Noto Sans SC"/>
-              </a:rPr>
-              <a:t>B</a:t>
-            </a:r>
-          </a:p>
-        </p:txBody>
-      </p:sp>
-      <p:sp>
-        <p:nvSpPr>
-          <p:cNvPr id="24" name="TextBox 23"/>
-          <p:cNvSpPr txBox="1"/>
-          <p:nvPr/>
-        </p:nvSpPr>
-        <p:spPr>
-          <a:xfrm>
-            <a:off x="7482840" y="2383536"/>
-            <a:ext cx="234696" cy="274320"/>
-          </a:xfrm>
-          <a:prstGeom prst="rect">
-            <a:avLst/>
-          </a:prstGeom>
-          <a:noFill/>
-        </p:spPr>
-        <p:txBody>
-          <a:bodyPr wrap="none" lIns="0" rIns="0" tIns="0" bIns="0">
-            <a:spAutoFit/>
-          </a:bodyPr>
-          <a:lstStyle/>
-          <a:p>
-            <a:pPr algn="l"/>
-            <a:r>
-              <a:rPr sz="1600" b="0">
-                <a:solidFill>
-                  <a:srgbClr val="F2F3E9"/>
-                </a:solidFill>
-                <a:latin typeface="Noto Sans SC"/>
-                <a:ea typeface="Noto Sans SC"/>
-              </a:rPr>
-              <a:t>9</a:t>
-            </a:r>
-          </a:p>
-        </p:txBody>
-      </p:sp>
-      <p:sp>
-        <p:nvSpPr>
-          <p:cNvPr id="25" name="TextBox 24"/>
-          <p:cNvSpPr txBox="1"/>
-          <p:nvPr/>
-        </p:nvSpPr>
-        <p:spPr>
-          <a:xfrm>
-            <a:off x="6339840" y="2789936"/>
-            <a:ext cx="251561" cy="274320"/>
-          </a:xfrm>
-          <a:prstGeom prst="rect">
-            <a:avLst/>
-          </a:prstGeom>
-          <a:noFill/>
-        </p:spPr>
-        <p:txBody>
-          <a:bodyPr wrap="none" lIns="0" rIns="0" tIns="0" bIns="0">
-            <a:spAutoFit/>
-          </a:bodyPr>
-          <a:lstStyle/>
-          <a:p>
-            <a:pPr algn="l"/>
-            <a:r>
-              <a:rPr sz="1600" b="0">
-                <a:solidFill>
-                  <a:srgbClr val="F2F3E9"/>
-                </a:solidFill>
-                <a:latin typeface="Noto Sans SC"/>
-                <a:ea typeface="Noto Sans SC"/>
-              </a:rPr>
-              <a:t>C</a:t>
-            </a:r>
-          </a:p>
-        </p:txBody>
-      </p:sp>
-      <p:sp>
-        <p:nvSpPr>
-          <p:cNvPr id="26" name="TextBox 25"/>
-          <p:cNvSpPr txBox="1"/>
-          <p:nvPr/>
-        </p:nvSpPr>
-        <p:spPr>
-          <a:xfrm>
-            <a:off x="7482840" y="2789936"/>
-            <a:ext cx="234696" cy="274320"/>
-          </a:xfrm>
-          <a:prstGeom prst="rect">
-            <a:avLst/>
-          </a:prstGeom>
-          <a:noFill/>
-        </p:spPr>
-        <p:txBody>
-          <a:bodyPr wrap="none" lIns="0" rIns="0" tIns="0" bIns="0">
-            <a:spAutoFit/>
-          </a:bodyPr>
-          <a:lstStyle/>
-          <a:p>
-            <a:pPr algn="l"/>
-            <a:r>
-              <a:rPr sz="1600" b="0">
-                <a:solidFill>
-                  <a:srgbClr val="F2F3E9"/>
-                </a:solidFill>
-                <a:latin typeface="Noto Sans SC"/>
-                <a:ea typeface="Noto Sans SC"/>
-              </a:rPr>
-              <a:t>8</a:t>
-            </a:r>
-          </a:p>
-        </p:txBody>
-      </p:sp>
-      <p:sp>
-        <p:nvSpPr>
-          <p:cNvPr id="27" name="TextBox 26"/>
-          <p:cNvSpPr txBox="1"/>
-          <p:nvPr/>
-        </p:nvSpPr>
-        <p:spPr>
-          <a:xfrm>
-            <a:off x="6339840" y="3196336"/>
-            <a:ext cx="261721" cy="274320"/>
-          </a:xfrm>
-          <a:prstGeom prst="rect">
-            <a:avLst/>
-          </a:prstGeom>
-          <a:noFill/>
-        </p:spPr>
-        <p:txBody>
-          <a:bodyPr wrap="none" lIns="0" rIns="0" tIns="0" bIns="0">
-            <a:spAutoFit/>
-          </a:bodyPr>
-          <a:lstStyle/>
-          <a:p>
-            <a:pPr algn="l"/>
-            <a:r>
-              <a:rPr sz="1600" b="0">
-                <a:solidFill>
-                  <a:srgbClr val="F2F3E9"/>
-                </a:solidFill>
-                <a:latin typeface="Noto Sans SC"/>
-                <a:ea typeface="Noto Sans SC"/>
-              </a:rPr>
-              <a:t>D</a:t>
-            </a:r>
-          </a:p>
-        </p:txBody>
-      </p:sp>
-      <p:sp>
-        <p:nvSpPr>
-          <p:cNvPr id="28" name="TextBox 27"/>
-          <p:cNvSpPr txBox="1"/>
-          <p:nvPr/>
-        </p:nvSpPr>
-        <p:spPr>
-          <a:xfrm>
-            <a:off x="7482840" y="3196336"/>
-            <a:ext cx="234696" cy="274320"/>
-          </a:xfrm>
-          <a:prstGeom prst="rect">
-            <a:avLst/>
-          </a:prstGeom>
-          <a:noFill/>
-        </p:spPr>
-        <p:txBody>
-          <a:bodyPr wrap="none" lIns="0" rIns="0" tIns="0" bIns="0">
-            <a:spAutoFit/>
-          </a:bodyPr>
-          <a:lstStyle/>
-          <a:p>
-            <a:pPr algn="l"/>
-            <a:r>
-              <a:rPr sz="1600" b="0">
-                <a:solidFill>
-                  <a:srgbClr val="F2F3E9"/>
-                </a:solidFill>
-                <a:latin typeface="Noto Sans SC"/>
-                <a:ea typeface="Noto Sans SC"/>
-              </a:rPr>
-              <a:t>7</a:t>
-            </a:r>
-          </a:p>
-        </p:txBody>
-      </p:sp>
-      <p:sp>
-        <p:nvSpPr>
-          <p:cNvPr id="29" name="TextBox 28"/>
-          <p:cNvSpPr txBox="1"/>
-          <p:nvPr/>
-        </p:nvSpPr>
-        <p:spPr>
-          <a:xfrm>
-            <a:off x="6339840" y="3602736"/>
-            <a:ext cx="241604" cy="274320"/>
-          </a:xfrm>
-          <a:prstGeom prst="rect">
-            <a:avLst/>
-          </a:prstGeom>
-          <a:noFill/>
-        </p:spPr>
-        <p:txBody>
-          <a:bodyPr wrap="none" lIns="0" rIns="0" tIns="0" bIns="0">
-            <a:spAutoFit/>
-          </a:bodyPr>
-          <a:lstStyle/>
-          <a:p>
-            <a:pPr algn="l"/>
-            <a:r>
-              <a:rPr sz="1600" b="0">
-                <a:solidFill>
-                  <a:srgbClr val="F2F3E9"/>
-                </a:solidFill>
-                <a:latin typeface="Noto Sans SC"/>
-                <a:ea typeface="Noto Sans SC"/>
-              </a:rPr>
-              <a:t>E</a:t>
-            </a:r>
-          </a:p>
-        </p:txBody>
-      </p:sp>
-      <p:sp>
-        <p:nvSpPr>
           <p:cNvPr id="30" name="TextBox 29"/>
-          <p:cNvSpPr txBox="1"/>
-          <p:nvPr/>
-        </p:nvSpPr>
-        <p:spPr>
-          <a:xfrm>
-            <a:off x="7482840" y="3602736"/>
-            <a:ext cx="234696" cy="274320"/>
-          </a:xfrm>
-          <a:prstGeom prst="rect">
-            <a:avLst/>
-          </a:prstGeom>
-          <a:noFill/>
-        </p:spPr>
-        <p:txBody>
-          <a:bodyPr wrap="none" lIns="0" rIns="0" tIns="0" bIns="0">
-            <a:spAutoFit/>
-          </a:bodyPr>
-          <a:lstStyle/>
-          <a:p>
-            <a:pPr algn="l"/>
-            <a:r>
-              <a:rPr sz="1600" b="0">
-                <a:solidFill>
-                  <a:srgbClr val="F2F3E9"/>
-                </a:solidFill>
-                <a:latin typeface="Noto Sans SC"/>
-                <a:ea typeface="Noto Sans SC"/>
-              </a:rPr>
-              <a:t>6</a:t>
-            </a:r>
-          </a:p>
-        </p:txBody>
-      </p:sp>
-      <p:sp>
-        <p:nvSpPr>
-          <p:cNvPr id="31" name="TextBox 30"/>
           <p:cNvSpPr txBox="1"/>
           <p:nvPr/>
         </p:nvSpPr>
@@ -17949,13 +17517,13 @@
       </p:sp>
       <p:sp>
         <p:nvSpPr>
-          <p:cNvPr id="32" name="TextBox 31"/>
-          <p:cNvSpPr txBox="1"/>
-          <p:nvPr/>
-        </p:nvSpPr>
-        <p:spPr>
-          <a:xfrm>
-            <a:off x="8246745" y="4657598"/>
+          <p:cNvPr id="31" name="TextBox 30"/>
+          <p:cNvSpPr txBox="1"/>
+          <p:nvPr/>
+        </p:nvSpPr>
+        <p:spPr>
+          <a:xfrm>
+            <a:off x="8500745" y="4657598"/>
             <a:ext cx="429259" cy="222885"/>
           </a:xfrm>
           <a:prstGeom prst="rect">
@@ -17985,14 +17553,14 @@
       </p:sp>
       <p:cxnSp>
         <p:nvCxnSpPr>
-          <p:cNvPr id="33" name="Connector 32"/>
+          <p:cNvPr id="32" name="Connector 31"/>
           <p:cNvCxnSpPr/>
           <p:nvPr/>
         </p:nvCxnSpPr>
         <p:spPr>
           <a:xfrm>
             <a:off x="6311900" y="4927600"/>
-            <a:ext cx="3340100" cy="0"/>
+            <a:ext cx="3594100" cy="0"/>
           </a:xfrm>
           <a:prstGeom prst="line">
             <a:avLst/>
@@ -18020,7 +17588,7 @@
       </p:cxnSp>
       <p:sp>
         <p:nvSpPr>
-          <p:cNvPr id="34" name="TextBox 33"/>
+          <p:cNvPr id="33" name="TextBox 32"/>
           <p:cNvSpPr txBox="1"/>
           <p:nvPr/>
         </p:nvSpPr>
@@ -18056,43 +17624,43 @@
       </p:sp>
       <p:sp>
         <p:nvSpPr>
+          <p:cNvPr id="34" name="TextBox 33"/>
+          <p:cNvSpPr txBox="1"/>
+          <p:nvPr/>
+        </p:nvSpPr>
+        <p:spPr>
+          <a:xfrm>
+            <a:off x="8499475" y="5012690"/>
+            <a:ext cx="768350" cy="257175"/>
+          </a:xfrm>
+          <a:prstGeom prst="rect">
+            <a:avLst/>
+          </a:prstGeom>
+          <a:noFill/>
+        </p:spPr>
+        <p:txBody>
+          <a:bodyPr wrap="none" lIns="0" rIns="0" tIns="0" bIns="0">
+            <a:spAutoFit/>
+          </a:bodyPr>
+          <a:lstStyle/>
+          <a:p>
+            <a:pPr algn="l"/>
+            <a:r>
+              <a:rPr sz="1500" b="0">
+                <a:solidFill>
+                  <a:srgbClr val="F2F3E9"/>
+                </a:solidFill>
+                <a:latin typeface="Noto Sans SC"/>
+                <a:ea typeface="Noto Sans SC"/>
+              </a:rPr>
+              <a:t>3.8e-15</a:t>
+            </a:r>
+          </a:p>
+        </p:txBody>
+      </p:sp>
+      <p:sp>
+        <p:nvSpPr>
           <p:cNvPr id="35" name="TextBox 34"/>
-          <p:cNvSpPr txBox="1"/>
-          <p:nvPr/>
-        </p:nvSpPr>
-        <p:spPr>
-          <a:xfrm>
-            <a:off x="8245475" y="5012690"/>
-            <a:ext cx="761809" cy="257175"/>
-          </a:xfrm>
-          <a:prstGeom prst="rect">
-            <a:avLst/>
-          </a:prstGeom>
-          <a:noFill/>
-        </p:spPr>
-        <p:txBody>
-          <a:bodyPr wrap="none" lIns="0" rIns="0" tIns="0" bIns="0">
-            <a:spAutoFit/>
-          </a:bodyPr>
-          <a:lstStyle/>
-          <a:p>
-            <a:pPr algn="l"/>
-            <a:r>
-              <a:rPr sz="1500" b="0">
-                <a:solidFill>
-                  <a:srgbClr val="F2F3E9"/>
-                </a:solidFill>
-                <a:latin typeface="Noto Sans SC"/>
-                <a:ea typeface="Noto Sans SC"/>
-              </a:rPr>
-              <a:t>3.8e-15</a:t>
-            </a:r>
-          </a:p>
-        </p:txBody>
-      </p:sp>
-      <p:sp>
-        <p:nvSpPr>
-          <p:cNvPr id="36" name="TextBox 35"/>
           <p:cNvSpPr txBox="1"/>
           <p:nvPr/>
         </p:nvSpPr>
@@ -18128,14 +17696,14 @@
       </p:sp>
       <p:sp>
         <p:nvSpPr>
-          <p:cNvPr id="37" name="TextBox 36"/>
-          <p:cNvSpPr txBox="1"/>
-          <p:nvPr/>
-        </p:nvSpPr>
-        <p:spPr>
-          <a:xfrm>
-            <a:off x="8245475" y="5393690"/>
-            <a:ext cx="695896" cy="257175"/>
+          <p:cNvPr id="36" name="TextBox 35"/>
+          <p:cNvSpPr txBox="1"/>
+          <p:nvPr/>
+        </p:nvSpPr>
+        <p:spPr>
+          <a:xfrm>
+            <a:off x="8499475" y="5393690"/>
+            <a:ext cx="704850" cy="257175"/>
           </a:xfrm>
           <a:prstGeom prst="rect">
             <a:avLst/>
@@ -18388,7 +17956,7 @@
         <p:spPr>
           <a:xfrm>
             <a:off x="563880" y="6512052"/>
-            <a:ext cx="1503426" cy="205740"/>
+            <a:ext cx="1494790" cy="205740"/>
           </a:xfrm>
           <a:prstGeom prst="rect">
             <a:avLst/>
@@ -18423,8 +17991,8 @@
         </p:nvSpPr>
         <p:spPr>
           <a:xfrm>
-            <a:off x="11108524" y="6499098"/>
-            <a:ext cx="561505" cy="222885"/>
+            <a:off x="11113770" y="6499098"/>
+            <a:ext cx="556260" cy="222885"/>
           </a:xfrm>
           <a:prstGeom prst="rect">
             <a:avLst/>
@@ -18453,43 +18021,7 @@
       </p:sp>
       <p:sp>
         <p:nvSpPr>
-          <p:cNvPr id="9" name="TextBox 8"/>
-          <p:cNvSpPr txBox="1"/>
-          <p:nvPr/>
-        </p:nvSpPr>
-        <p:spPr>
-          <a:xfrm>
-            <a:off x="10855147" y="377952"/>
-            <a:ext cx="811072" cy="205740"/>
-          </a:xfrm>
-          <a:prstGeom prst="rect">
-            <a:avLst/>
-          </a:prstGeom>
-          <a:noFill/>
-        </p:spPr>
-        <p:txBody>
-          <a:bodyPr wrap="none" lIns="0" rIns="0" tIns="0" bIns="0">
-            <a:spAutoFit/>
-          </a:bodyPr>
-          <a:lstStyle/>
-          <a:p>
-            <a:pPr algn="r"/>
-            <a:r>
-              <a:rPr sz="1200" b="0">
-                <a:solidFill>
-                  <a:srgbClr val="6F8F8F"/>
-                </a:solidFill>
-                <a:latin typeface="Noto Sans SC"/>
-                <a:ea typeface="Noto Sans SC"/>
-              </a:rPr>
-              <a:t>影片 02:57</a:t>
-            </a:r>
-          </a:p>
-        </p:txBody>
-      </p:sp>
-      <p:sp>
-        <p:nvSpPr>
-          <p:cNvPr id="10" name="Oval 9"/>
+          <p:cNvPr id="9" name="Oval 8"/>
           <p:cNvSpPr/>
           <p:nvPr/>
         </p:nvSpPr>
@@ -18531,7 +18063,7 @@
       </p:sp>
       <p:sp>
         <p:nvSpPr>
-          <p:cNvPr id="11" name="TextBox 10"/>
+          <p:cNvPr id="10" name="TextBox 9"/>
           <p:cNvSpPr txBox="1"/>
           <p:nvPr/>
         </p:nvSpPr>
@@ -18571,7 +18103,7 @@
       </p:sp>
       <p:sp>
         <p:nvSpPr>
-          <p:cNvPr id="12" name="Oval 11"/>
+          <p:cNvPr id="11" name="Oval 10"/>
           <p:cNvSpPr/>
           <p:nvPr/>
         </p:nvSpPr>
@@ -18613,7 +18145,7 @@
       </p:sp>
       <p:sp>
         <p:nvSpPr>
-          <p:cNvPr id="13" name="TextBox 12"/>
+          <p:cNvPr id="12" name="TextBox 11"/>
           <p:cNvSpPr txBox="1"/>
           <p:nvPr/>
         </p:nvSpPr>
@@ -18653,7 +18185,7 @@
       </p:sp>
       <p:sp>
         <p:nvSpPr>
-          <p:cNvPr id="14" name="Oval 13"/>
+          <p:cNvPr id="13" name="Oval 12"/>
           <p:cNvSpPr/>
           <p:nvPr/>
         </p:nvSpPr>
@@ -18695,7 +18227,7 @@
       </p:sp>
       <p:sp>
         <p:nvSpPr>
-          <p:cNvPr id="15" name="TextBox 14"/>
+          <p:cNvPr id="14" name="TextBox 13"/>
           <p:cNvSpPr txBox="1"/>
           <p:nvPr/>
         </p:nvSpPr>
@@ -18735,7 +18267,7 @@
       </p:sp>
       <p:sp>
         <p:nvSpPr>
-          <p:cNvPr id="16" name="Oval 15"/>
+          <p:cNvPr id="15" name="Oval 14"/>
           <p:cNvSpPr/>
           <p:nvPr/>
         </p:nvSpPr>
@@ -18777,7 +18309,7 @@
       </p:sp>
       <p:sp>
         <p:nvSpPr>
-          <p:cNvPr id="17" name="TextBox 16"/>
+          <p:cNvPr id="16" name="TextBox 15"/>
           <p:cNvSpPr txBox="1"/>
           <p:nvPr/>
         </p:nvSpPr>
@@ -18817,7 +18349,7 @@
       </p:sp>
       <p:cxnSp>
         <p:nvCxnSpPr>
-          <p:cNvPr id="18" name="Connector 17"/>
+          <p:cNvPr id="17" name="Connector 16"/>
           <p:cNvCxnSpPr/>
           <p:nvPr/>
         </p:nvCxnSpPr>
@@ -18852,7 +18384,7 @@
       </p:cxnSp>
       <p:sp>
         <p:nvSpPr>
-          <p:cNvPr id="19" name="Oval 18"/>
+          <p:cNvPr id="18" name="Oval 17"/>
           <p:cNvSpPr/>
           <p:nvPr/>
         </p:nvSpPr>
@@ -18896,14 +18428,14 @@
       </p:sp>
       <p:sp>
         <p:nvSpPr>
-          <p:cNvPr id="20" name="TextBox 19"/>
-          <p:cNvSpPr txBox="1"/>
-          <p:nvPr/>
-        </p:nvSpPr>
-        <p:spPr>
-          <a:xfrm>
-            <a:off x="6867266" y="2042775"/>
-            <a:ext cx="241808" cy="274320"/>
+          <p:cNvPr id="19" name="TextBox 18"/>
+          <p:cNvSpPr txBox="1"/>
+          <p:nvPr/>
+        </p:nvSpPr>
+        <p:spPr>
+          <a:xfrm>
+            <a:off x="6866885" y="2042775"/>
+            <a:ext cx="242570" cy="274320"/>
           </a:xfrm>
           <a:prstGeom prst="rect">
             <a:avLst/>
@@ -18932,7 +18464,7 @@
       </p:sp>
       <p:cxnSp>
         <p:nvCxnSpPr>
-          <p:cNvPr id="21" name="Connector 20"/>
+          <p:cNvPr id="20" name="Connector 19"/>
           <p:cNvCxnSpPr/>
           <p:nvPr/>
         </p:nvCxnSpPr>
@@ -18967,7 +18499,7 @@
       </p:cxnSp>
       <p:sp>
         <p:nvSpPr>
-          <p:cNvPr id="22" name="Oval 21"/>
+          <p:cNvPr id="21" name="Oval 20"/>
           <p:cNvSpPr/>
           <p:nvPr/>
         </p:nvSpPr>
@@ -19011,14 +18543,14 @@
       </p:sp>
       <p:sp>
         <p:nvSpPr>
-          <p:cNvPr id="23" name="TextBox 22"/>
-          <p:cNvSpPr txBox="1"/>
-          <p:nvPr/>
-        </p:nvSpPr>
-        <p:spPr>
-          <a:xfrm>
-            <a:off x="7610299" y="2803720"/>
-            <a:ext cx="241808" cy="274320"/>
+          <p:cNvPr id="22" name="TextBox 21"/>
+          <p:cNvSpPr txBox="1"/>
+          <p:nvPr/>
+        </p:nvSpPr>
+        <p:spPr>
+          <a:xfrm>
+            <a:off x="7609918" y="2803720"/>
+            <a:ext cx="242570" cy="274320"/>
           </a:xfrm>
           <a:prstGeom prst="rect">
             <a:avLst/>
@@ -19047,7 +18579,7 @@
       </p:sp>
       <p:cxnSp>
         <p:nvCxnSpPr>
-          <p:cNvPr id="24" name="Connector 23"/>
+          <p:cNvPr id="23" name="Connector 22"/>
           <p:cNvCxnSpPr/>
           <p:nvPr/>
         </p:nvCxnSpPr>
@@ -19082,7 +18614,7 @@
       </p:cxnSp>
       <p:sp>
         <p:nvSpPr>
-          <p:cNvPr id="25" name="Oval 24"/>
+          <p:cNvPr id="24" name="Oval 23"/>
           <p:cNvSpPr/>
           <p:nvPr/>
         </p:nvSpPr>
@@ -19126,14 +18658,14 @@
       </p:sp>
       <p:sp>
         <p:nvSpPr>
-          <p:cNvPr id="26" name="TextBox 25"/>
-          <p:cNvSpPr txBox="1"/>
-          <p:nvPr/>
-        </p:nvSpPr>
-        <p:spPr>
-          <a:xfrm>
-            <a:off x="6883132" y="2920480"/>
-            <a:ext cx="241808" cy="274320"/>
+          <p:cNvPr id="25" name="TextBox 24"/>
+          <p:cNvSpPr txBox="1"/>
+          <p:nvPr/>
+        </p:nvSpPr>
+        <p:spPr>
+          <a:xfrm>
+            <a:off x="6882751" y="2920480"/>
+            <a:ext cx="242570" cy="274320"/>
           </a:xfrm>
           <a:prstGeom prst="rect">
             <a:avLst/>
@@ -19162,7 +18694,7 @@
       </p:sp>
       <p:cxnSp>
         <p:nvCxnSpPr>
-          <p:cNvPr id="27" name="Connector 26"/>
+          <p:cNvPr id="26" name="Connector 25"/>
           <p:cNvCxnSpPr/>
           <p:nvPr/>
         </p:nvCxnSpPr>
@@ -19197,7 +18729,7 @@
       </p:cxnSp>
       <p:sp>
         <p:nvSpPr>
-          <p:cNvPr id="28" name="Oval 27"/>
+          <p:cNvPr id="27" name="Oval 26"/>
           <p:cNvSpPr/>
           <p:nvPr/>
         </p:nvSpPr>
@@ -19241,14 +18773,14 @@
       </p:sp>
       <p:sp>
         <p:nvSpPr>
-          <p:cNvPr id="29" name="TextBox 28"/>
-          <p:cNvSpPr txBox="1"/>
-          <p:nvPr/>
-        </p:nvSpPr>
-        <p:spPr>
-          <a:xfrm>
-            <a:off x="10314409" y="2042775"/>
-            <a:ext cx="241808" cy="274320"/>
+          <p:cNvPr id="28" name="TextBox 27"/>
+          <p:cNvSpPr txBox="1"/>
+          <p:nvPr/>
+        </p:nvSpPr>
+        <p:spPr>
+          <a:xfrm>
+            <a:off x="10314028" y="2042775"/>
+            <a:ext cx="242570" cy="274320"/>
           </a:xfrm>
           <a:prstGeom prst="rect">
             <a:avLst/>
@@ -19277,7 +18809,7 @@
       </p:sp>
       <p:cxnSp>
         <p:nvCxnSpPr>
-          <p:cNvPr id="30" name="Connector 29"/>
+          <p:cNvPr id="29" name="Connector 28"/>
           <p:cNvCxnSpPr/>
           <p:nvPr/>
         </p:nvCxnSpPr>
@@ -19312,7 +18844,7 @@
       </p:cxnSp>
       <p:sp>
         <p:nvSpPr>
-          <p:cNvPr id="31" name="Oval 30"/>
+          <p:cNvPr id="30" name="Oval 29"/>
           <p:cNvSpPr/>
           <p:nvPr/>
         </p:nvSpPr>
@@ -19356,14 +18888,14 @@
       </p:sp>
       <p:sp>
         <p:nvSpPr>
-          <p:cNvPr id="32" name="TextBox 31"/>
-          <p:cNvSpPr txBox="1"/>
-          <p:nvPr/>
-        </p:nvSpPr>
-        <p:spPr>
-          <a:xfrm>
-            <a:off x="11057442" y="2803720"/>
-            <a:ext cx="241808" cy="274320"/>
+          <p:cNvPr id="31" name="TextBox 30"/>
+          <p:cNvSpPr txBox="1"/>
+          <p:nvPr/>
+        </p:nvSpPr>
+        <p:spPr>
+          <a:xfrm>
+            <a:off x="11057061" y="2803720"/>
+            <a:ext cx="242570" cy="274320"/>
           </a:xfrm>
           <a:prstGeom prst="rect">
             <a:avLst/>
@@ -19392,7 +18924,7 @@
       </p:sp>
       <p:cxnSp>
         <p:nvCxnSpPr>
-          <p:cNvPr id="33" name="Connector 32"/>
+          <p:cNvPr id="32" name="Connector 31"/>
           <p:cNvCxnSpPr/>
           <p:nvPr/>
         </p:nvCxnSpPr>
@@ -19427,7 +18959,7 @@
       </p:cxnSp>
       <p:sp>
         <p:nvSpPr>
-          <p:cNvPr id="34" name="Oval 33"/>
+          <p:cNvPr id="33" name="Oval 32"/>
           <p:cNvSpPr/>
           <p:nvPr/>
         </p:nvSpPr>
@@ -19471,14 +19003,14 @@
       </p:sp>
       <p:sp>
         <p:nvSpPr>
-          <p:cNvPr id="35" name="TextBox 34"/>
-          <p:cNvSpPr txBox="1"/>
-          <p:nvPr/>
-        </p:nvSpPr>
-        <p:spPr>
-          <a:xfrm>
-            <a:off x="10330275" y="2920480"/>
-            <a:ext cx="241808" cy="274320"/>
+          <p:cNvPr id="34" name="TextBox 33"/>
+          <p:cNvSpPr txBox="1"/>
+          <p:nvPr/>
+        </p:nvSpPr>
+        <p:spPr>
+          <a:xfrm>
+            <a:off x="10329894" y="2920480"/>
+            <a:ext cx="242570" cy="274320"/>
           </a:xfrm>
           <a:prstGeom prst="rect">
             <a:avLst/>
@@ -19507,7 +19039,7 @@
       </p:sp>
       <p:sp>
         <p:nvSpPr>
-          <p:cNvPr id="36" name="Oval 35"/>
+          <p:cNvPr id="35" name="Oval 34"/>
           <p:cNvSpPr/>
           <p:nvPr/>
         </p:nvSpPr>
@@ -19551,14 +19083,14 @@
       </p:sp>
       <p:sp>
         <p:nvSpPr>
-          <p:cNvPr id="37" name="TextBox 36"/>
-          <p:cNvSpPr txBox="1"/>
-          <p:nvPr/>
-        </p:nvSpPr>
-        <p:spPr>
-          <a:xfrm>
-            <a:off x="6215170" y="2497291"/>
-            <a:ext cx="269659" cy="291465"/>
+          <p:cNvPr id="36" name="TextBox 35"/>
+          <p:cNvSpPr txBox="1"/>
+          <p:nvPr/>
+        </p:nvSpPr>
+        <p:spPr>
+          <a:xfrm>
+            <a:off x="6215380" y="2497291"/>
+            <a:ext cx="269240" cy="291465"/>
           </a:xfrm>
           <a:prstGeom prst="rect">
             <a:avLst/>
@@ -19587,7 +19119,7 @@
       </p:sp>
       <p:sp>
         <p:nvSpPr>
-          <p:cNvPr id="38" name="Oval 37"/>
+          <p:cNvPr id="37" name="Oval 36"/>
           <p:cNvSpPr/>
           <p:nvPr/>
         </p:nvSpPr>
@@ -19631,14 +19163,14 @@
       </p:sp>
       <p:sp>
         <p:nvSpPr>
-          <p:cNvPr id="39" name="TextBox 38"/>
-          <p:cNvSpPr txBox="1"/>
-          <p:nvPr/>
-        </p:nvSpPr>
-        <p:spPr>
-          <a:xfrm>
-            <a:off x="7590573" y="2004842"/>
-            <a:ext cx="276567" cy="291465"/>
+          <p:cNvPr id="38" name="TextBox 37"/>
+          <p:cNvSpPr txBox="1"/>
+          <p:nvPr/>
+        </p:nvSpPr>
+        <p:spPr>
+          <a:xfrm>
+            <a:off x="7591062" y="2004842"/>
+            <a:ext cx="275590" cy="291465"/>
           </a:xfrm>
           <a:prstGeom prst="rect">
             <a:avLst/>
@@ -19667,7 +19199,7 @@
       </p:sp>
       <p:sp>
         <p:nvSpPr>
-          <p:cNvPr id="40" name="Oval 39"/>
+          <p:cNvPr id="39" name="Oval 38"/>
           <p:cNvSpPr/>
           <p:nvPr/>
         </p:nvSpPr>
@@ -19711,14 +19243,14 @@
       </p:sp>
       <p:sp>
         <p:nvSpPr>
-          <p:cNvPr id="41" name="TextBox 40"/>
-          <p:cNvSpPr txBox="1"/>
-          <p:nvPr/>
-        </p:nvSpPr>
-        <p:spPr>
-          <a:xfrm>
-            <a:off x="7297802" y="3679169"/>
-            <a:ext cx="271170" cy="291465"/>
+          <p:cNvPr id="40" name="TextBox 39"/>
+          <p:cNvSpPr txBox="1"/>
+          <p:nvPr/>
+        </p:nvSpPr>
+        <p:spPr>
+          <a:xfrm>
+            <a:off x="7298767" y="3679169"/>
+            <a:ext cx="269240" cy="291465"/>
           </a:xfrm>
           <a:prstGeom prst="rect">
             <a:avLst/>
@@ -19747,7 +19279,7 @@
       </p:sp>
       <p:sp>
         <p:nvSpPr>
-          <p:cNvPr id="42" name="Oval 41"/>
+          <p:cNvPr id="41" name="Oval 40"/>
           <p:cNvSpPr/>
           <p:nvPr/>
         </p:nvSpPr>
@@ -19791,14 +19323,14 @@
       </p:sp>
       <p:sp>
         <p:nvSpPr>
-          <p:cNvPr id="43" name="TextBox 42"/>
-          <p:cNvSpPr txBox="1"/>
-          <p:nvPr/>
-        </p:nvSpPr>
-        <p:spPr>
-          <a:xfrm>
-            <a:off x="9655296" y="2497291"/>
-            <a:ext cx="283692" cy="291465"/>
+          <p:cNvPr id="42" name="TextBox 41"/>
+          <p:cNvSpPr txBox="1"/>
+          <p:nvPr/>
+        </p:nvSpPr>
+        <p:spPr>
+          <a:xfrm>
+            <a:off x="9656172" y="2497291"/>
+            <a:ext cx="281939" cy="291465"/>
           </a:xfrm>
           <a:prstGeom prst="rect">
             <a:avLst/>
@@ -19827,7 +19359,7 @@
       </p:sp>
       <p:sp>
         <p:nvSpPr>
-          <p:cNvPr id="44" name="Oval 43"/>
+          <p:cNvPr id="43" name="Oval 42"/>
           <p:cNvSpPr/>
           <p:nvPr/>
         </p:nvSpPr>
@@ -19871,14 +19403,14 @@
       </p:sp>
       <p:sp>
         <p:nvSpPr>
-          <p:cNvPr id="45" name="TextBox 44"/>
-          <p:cNvSpPr txBox="1"/>
-          <p:nvPr/>
-        </p:nvSpPr>
-        <p:spPr>
-          <a:xfrm>
-            <a:off x="11044840" y="2004842"/>
-            <a:ext cx="262318" cy="291465"/>
+          <p:cNvPr id="44" name="TextBox 43"/>
+          <p:cNvSpPr txBox="1"/>
+          <p:nvPr/>
+        </p:nvSpPr>
+        <p:spPr>
+          <a:xfrm>
+            <a:off x="11044555" y="2004842"/>
+            <a:ext cx="262890" cy="291465"/>
           </a:xfrm>
           <a:prstGeom prst="rect">
             <a:avLst/>
@@ -19907,7 +19439,7 @@
       </p:sp>
       <p:sp>
         <p:nvSpPr>
-          <p:cNvPr id="46" name="Oval 45"/>
+          <p:cNvPr id="45" name="Oval 44"/>
           <p:cNvSpPr/>
           <p:nvPr/>
         </p:nvSpPr>
@@ -19951,14 +19483,14 @@
       </p:sp>
       <p:sp>
         <p:nvSpPr>
-          <p:cNvPr id="47" name="TextBox 46"/>
-          <p:cNvSpPr txBox="1"/>
-          <p:nvPr/>
-        </p:nvSpPr>
-        <p:spPr>
-          <a:xfrm>
-            <a:off x="10752609" y="3679169"/>
-            <a:ext cx="255841" cy="291465"/>
+          <p:cNvPr id="46" name="TextBox 45"/>
+          <p:cNvSpPr txBox="1"/>
+          <p:nvPr/>
+        </p:nvSpPr>
+        <p:spPr>
+          <a:xfrm>
+            <a:off x="10752260" y="3679169"/>
+            <a:ext cx="256540" cy="291465"/>
           </a:xfrm>
           <a:prstGeom prst="rect">
             <a:avLst/>
@@ -19987,14 +19519,14 @@
       </p:sp>
       <p:sp>
         <p:nvSpPr>
-          <p:cNvPr id="48" name="Rounded Rectangle 47"/>
+          <p:cNvPr id="47" name="Rounded Rectangle 46"/>
           <p:cNvSpPr/>
           <p:nvPr/>
         </p:nvSpPr>
         <p:spPr>
           <a:xfrm>
-            <a:off x="7423391" y="4991100"/>
-            <a:ext cx="2679217" cy="292100"/>
+            <a:off x="7426325" y="4991100"/>
+            <a:ext cx="2673350" cy="292100"/>
           </a:xfrm>
           <a:prstGeom prst="roundRect">
             <a:avLst>
@@ -20033,14 +19565,14 @@
       </p:sp>
       <p:sp>
         <p:nvSpPr>
-          <p:cNvPr id="49" name="TextBox 48"/>
-          <p:cNvSpPr txBox="1"/>
-          <p:nvPr/>
-        </p:nvSpPr>
-        <p:spPr>
-          <a:xfrm>
-            <a:off x="7469111" y="5051298"/>
-            <a:ext cx="2587777" cy="222885"/>
+          <p:cNvPr id="48" name="TextBox 47"/>
+          <p:cNvSpPr txBox="1"/>
+          <p:nvPr/>
+        </p:nvSpPr>
+        <p:spPr>
+          <a:xfrm>
+            <a:off x="7472045" y="5051298"/>
+            <a:ext cx="2581910" cy="222885"/>
           </a:xfrm>
           <a:prstGeom prst="rect">
             <a:avLst/>
@@ -20293,7 +19825,7 @@
         <p:spPr>
           <a:xfrm>
             <a:off x="563880" y="6512052"/>
-            <a:ext cx="1503426" cy="205740"/>
+            <a:ext cx="1494790" cy="205740"/>
           </a:xfrm>
           <a:prstGeom prst="rect">
             <a:avLst/>
@@ -20328,8 +19860,8 @@
         </p:nvSpPr>
         <p:spPr>
           <a:xfrm>
-            <a:off x="11108524" y="6499098"/>
-            <a:ext cx="561505" cy="222885"/>
+            <a:off x="11113770" y="6499098"/>
+            <a:ext cx="556260" cy="222885"/>
           </a:xfrm>
           <a:prstGeom prst="rect">
             <a:avLst/>
@@ -20358,43 +19890,7 @@
       </p:sp>
       <p:sp>
         <p:nvSpPr>
-          <p:cNvPr id="9" name="TextBox 8"/>
-          <p:cNvSpPr txBox="1"/>
-          <p:nvPr/>
-        </p:nvSpPr>
-        <p:spPr>
-          <a:xfrm>
-            <a:off x="10855147" y="377952"/>
-            <a:ext cx="811072" cy="205740"/>
-          </a:xfrm>
-          <a:prstGeom prst="rect">
-            <a:avLst/>
-          </a:prstGeom>
-          <a:noFill/>
-        </p:spPr>
-        <p:txBody>
-          <a:bodyPr wrap="none" lIns="0" rIns="0" tIns="0" bIns="0">
-            <a:spAutoFit/>
-          </a:bodyPr>
-          <a:lstStyle/>
-          <a:p>
-            <a:pPr algn="r"/>
-            <a:r>
-              <a:rPr sz="1200" b="0">
-                <a:solidFill>
-                  <a:srgbClr val="6F8F8F"/>
-                </a:solidFill>
-                <a:latin typeface="Noto Sans SC"/>
-                <a:ea typeface="Noto Sans SC"/>
-              </a:rPr>
-              <a:t>影片 03:08</a:t>
-            </a:r>
-          </a:p>
-        </p:txBody>
-      </p:sp>
-      <p:sp>
-        <p:nvSpPr>
-          <p:cNvPr id="10" name="Oval 9"/>
+          <p:cNvPr id="9" name="Oval 8"/>
           <p:cNvSpPr/>
           <p:nvPr/>
         </p:nvSpPr>
@@ -20436,7 +19932,7 @@
       </p:sp>
       <p:sp>
         <p:nvSpPr>
-          <p:cNvPr id="11" name="TextBox 10"/>
+          <p:cNvPr id="10" name="TextBox 9"/>
           <p:cNvSpPr txBox="1"/>
           <p:nvPr/>
         </p:nvSpPr>
@@ -20476,7 +19972,7 @@
       </p:sp>
       <p:sp>
         <p:nvSpPr>
-          <p:cNvPr id="12" name="Oval 11"/>
+          <p:cNvPr id="11" name="Oval 10"/>
           <p:cNvSpPr/>
           <p:nvPr/>
         </p:nvSpPr>
@@ -20518,7 +20014,7 @@
       </p:sp>
       <p:sp>
         <p:nvSpPr>
-          <p:cNvPr id="13" name="TextBox 12"/>
+          <p:cNvPr id="12" name="TextBox 11"/>
           <p:cNvSpPr txBox="1"/>
           <p:nvPr/>
         </p:nvSpPr>
@@ -20558,7 +20054,7 @@
       </p:sp>
       <p:sp>
         <p:nvSpPr>
-          <p:cNvPr id="14" name="Oval 13"/>
+          <p:cNvPr id="13" name="Oval 12"/>
           <p:cNvSpPr/>
           <p:nvPr/>
         </p:nvSpPr>
@@ -20600,7 +20096,7 @@
       </p:sp>
       <p:sp>
         <p:nvSpPr>
-          <p:cNvPr id="15" name="TextBox 14"/>
+          <p:cNvPr id="14" name="TextBox 13"/>
           <p:cNvSpPr txBox="1"/>
           <p:nvPr/>
         </p:nvSpPr>
@@ -20640,7 +20136,7 @@
       </p:sp>
       <p:sp>
         <p:nvSpPr>
-          <p:cNvPr id="16" name="Oval 15"/>
+          <p:cNvPr id="15" name="Oval 14"/>
           <p:cNvSpPr/>
           <p:nvPr/>
         </p:nvSpPr>
@@ -20682,7 +20178,7 @@
       </p:sp>
       <p:sp>
         <p:nvSpPr>
-          <p:cNvPr id="17" name="TextBox 16"/>
+          <p:cNvPr id="16" name="TextBox 15"/>
           <p:cNvSpPr txBox="1"/>
           <p:nvPr/>
         </p:nvSpPr>
@@ -20722,7 +20218,7 @@
       </p:sp>
       <p:sp>
         <p:nvSpPr>
-          <p:cNvPr id="18" name="Rounded Rectangle 17"/>
+          <p:cNvPr id="17" name="Rounded Rectangle 16"/>
           <p:cNvSpPr/>
           <p:nvPr/>
         </p:nvSpPr>
@@ -20768,14 +20264,50 @@
       </p:sp>
       <p:sp>
         <p:nvSpPr>
+          <p:cNvPr id="18" name="TextBox 17"/>
+          <p:cNvSpPr txBox="1"/>
+          <p:nvPr/>
+        </p:nvSpPr>
+        <p:spPr>
+          <a:xfrm>
+            <a:off x="5898832" y="1768983"/>
+            <a:ext cx="156210" cy="180022"/>
+          </a:xfrm>
+          <a:prstGeom prst="rect">
+            <a:avLst/>
+          </a:prstGeom>
+          <a:noFill/>
+        </p:spPr>
+        <p:txBody>
+          <a:bodyPr wrap="none" lIns="0" rIns="0" tIns="0" bIns="0">
+            <a:spAutoFit/>
+          </a:bodyPr>
+          <a:lstStyle/>
+          <a:p>
+            <a:pPr algn="l"/>
+            <a:r>
+              <a:rPr sz="1050" b="0">
+                <a:solidFill>
+                  <a:srgbClr val="6F8F8F"/>
+                </a:solidFill>
+                <a:latin typeface="Noto Sans SC"/>
+                <a:ea typeface="Noto Sans SC"/>
+              </a:rPr>
+              <a:t>1</a:t>
+            </a:r>
+          </a:p>
+        </p:txBody>
+      </p:sp>
+      <p:sp>
+        <p:nvSpPr>
           <p:cNvPr id="19" name="TextBox 18"/>
           <p:cNvSpPr txBox="1"/>
           <p:nvPr/>
         </p:nvSpPr>
         <p:spPr>
           <a:xfrm>
-            <a:off x="5898832" y="1768983"/>
-            <a:ext cx="154019" cy="180022"/>
+            <a:off x="6189027" y="1730120"/>
+            <a:ext cx="236220" cy="231457"/>
           </a:xfrm>
           <a:prstGeom prst="rect">
             <a:avLst/>
@@ -20790,6 +20322,294 @@
           <a:p>
             <a:pPr algn="l"/>
             <a:r>
+              <a:rPr sz="1350" b="0">
+                <a:solidFill>
+                  <a:srgbClr val="DFEADF"/>
+                </a:solidFill>
+                <a:latin typeface="Noto Sans SC"/>
+                <a:ea typeface="Noto Sans SC"/>
+              </a:rPr>
+              <a:t>L </a:t>
+            </a:r>
+          </a:p>
+        </p:txBody>
+      </p:sp>
+      <p:sp>
+        <p:nvSpPr>
+          <p:cNvPr id="20" name="TextBox 19"/>
+          <p:cNvSpPr txBox="1"/>
+          <p:nvPr/>
+        </p:nvSpPr>
+        <p:spPr>
+          <a:xfrm>
+            <a:off x="6322377" y="1730120"/>
+            <a:ext cx="274320" cy="231457"/>
+          </a:xfrm>
+          <a:prstGeom prst="rect">
+            <a:avLst/>
+          </a:prstGeom>
+          <a:noFill/>
+        </p:spPr>
+        <p:txBody>
+          <a:bodyPr wrap="none" lIns="0" rIns="0" tIns="0" bIns="0">
+            <a:spAutoFit/>
+          </a:bodyPr>
+          <a:lstStyle/>
+          <a:p>
+            <a:pPr algn="l"/>
+            <a:r>
+              <a:rPr sz="1350" b="0">
+                <a:solidFill>
+                  <a:srgbClr val="DFEADF"/>
+                </a:solidFill>
+                <a:latin typeface="Noto Sans SC"/>
+                <a:ea typeface="Noto Sans SC"/>
+              </a:rPr>
+              <a:t>←</a:t>
+            </a:r>
+          </a:p>
+        </p:txBody>
+      </p:sp>
+      <p:sp>
+        <p:nvSpPr>
+          <p:cNvPr id="21" name="TextBox 20"/>
+          <p:cNvSpPr txBox="1"/>
+          <p:nvPr/>
+        </p:nvSpPr>
+        <p:spPr>
+          <a:xfrm>
+            <a:off x="6493827" y="1730120"/>
+            <a:ext cx="299720" cy="231457"/>
+          </a:xfrm>
+          <a:prstGeom prst="rect">
+            <a:avLst/>
+          </a:prstGeom>
+          <a:noFill/>
+        </p:spPr>
+        <p:txBody>
+          <a:bodyPr wrap="none" lIns="0" rIns="0" tIns="0" bIns="0">
+            <a:spAutoFit/>
+          </a:bodyPr>
+          <a:lstStyle/>
+          <a:p>
+            <a:pPr algn="l"/>
+            <a:r>
+              <a:rPr sz="1350" b="0">
+                <a:solidFill>
+                  <a:srgbClr val="DFEADF"/>
+                </a:solidFill>
+                <a:latin typeface="Noto Sans SC"/>
+                <a:ea typeface="Noto Sans SC"/>
+              </a:rPr>
+              <a:t> D </a:t>
+            </a:r>
+          </a:p>
+        </p:txBody>
+      </p:sp>
+      <p:sp>
+        <p:nvSpPr>
+          <p:cNvPr id="22" name="TextBox 21"/>
+          <p:cNvSpPr txBox="1"/>
+          <p:nvPr/>
+        </p:nvSpPr>
+        <p:spPr>
+          <a:xfrm>
+            <a:off x="6690677" y="1730120"/>
+            <a:ext cx="198120" cy="231457"/>
+          </a:xfrm>
+          <a:prstGeom prst="rect">
+            <a:avLst/>
+          </a:prstGeom>
+          <a:noFill/>
+        </p:spPr>
+        <p:txBody>
+          <a:bodyPr wrap="none" lIns="0" rIns="0" tIns="0" bIns="0">
+            <a:spAutoFit/>
+          </a:bodyPr>
+          <a:lstStyle/>
+          <a:p>
+            <a:pPr algn="l"/>
+            <a:r>
+              <a:rPr sz="1350" b="0">
+                <a:solidFill>
+                  <a:srgbClr val="DFEADF"/>
+                </a:solidFill>
+                <a:latin typeface="Noto Sans SC"/>
+                <a:ea typeface="Noto Sans SC"/>
+              </a:rPr>
+              <a:t>−</a:t>
+            </a:r>
+          </a:p>
+        </p:txBody>
+      </p:sp>
+      <p:sp>
+        <p:nvSpPr>
+          <p:cNvPr id="23" name="TextBox 22"/>
+          <p:cNvSpPr txBox="1"/>
+          <p:nvPr/>
+        </p:nvSpPr>
+        <p:spPr>
+          <a:xfrm>
+            <a:off x="6785927" y="1730120"/>
+            <a:ext cx="242570" cy="231457"/>
+          </a:xfrm>
+          <a:prstGeom prst="rect">
+            <a:avLst/>
+          </a:prstGeom>
+          <a:noFill/>
+        </p:spPr>
+        <p:txBody>
+          <a:bodyPr wrap="none" lIns="0" rIns="0" tIns="0" bIns="0">
+            <a:spAutoFit/>
+          </a:bodyPr>
+          <a:lstStyle/>
+          <a:p>
+            <a:pPr algn="l"/>
+            <a:r>
+              <a:rPr sz="1350" b="0">
+                <a:solidFill>
+                  <a:srgbClr val="DFEADF"/>
+                </a:solidFill>
+                <a:latin typeface="Noto Sans SC"/>
+                <a:ea typeface="Noto Sans SC"/>
+              </a:rPr>
+              <a:t> A</a:t>
+            </a:r>
+          </a:p>
+        </p:txBody>
+      </p:sp>
+      <p:sp>
+        <p:nvSpPr>
+          <p:cNvPr id="24" name="TextBox 23"/>
+          <p:cNvSpPr txBox="1"/>
+          <p:nvPr/>
+        </p:nvSpPr>
+        <p:spPr>
+          <a:xfrm>
+            <a:off x="6925627" y="1730120"/>
+            <a:ext cx="1474470" cy="231457"/>
+          </a:xfrm>
+          <a:prstGeom prst="rect">
+            <a:avLst/>
+          </a:prstGeom>
+          <a:noFill/>
+        </p:spPr>
+        <p:txBody>
+          <a:bodyPr wrap="none" lIns="0" rIns="0" tIns="0" bIns="0">
+            <a:spAutoFit/>
+          </a:bodyPr>
+          <a:lstStyle/>
+          <a:p>
+            <a:pPr algn="l"/>
+            <a:r>
+              <a:rPr sz="1350" b="0">
+                <a:solidFill>
+                  <a:srgbClr val="DFEADF"/>
+                </a:solidFill>
+                <a:latin typeface="Noto Sans SC"/>
+                <a:ea typeface="Noto Sans SC"/>
+              </a:rPr>
+              <a:t>（检查对称、行和</a:t>
+            </a:r>
+          </a:p>
+        </p:txBody>
+      </p:sp>
+      <p:sp>
+        <p:nvSpPr>
+          <p:cNvPr id="25" name="TextBox 24"/>
+          <p:cNvSpPr txBox="1"/>
+          <p:nvPr/>
+        </p:nvSpPr>
+        <p:spPr>
+          <a:xfrm>
+            <a:off x="8297227" y="1730120"/>
+            <a:ext cx="236220" cy="231457"/>
+          </a:xfrm>
+          <a:prstGeom prst="rect">
+            <a:avLst/>
+          </a:prstGeom>
+          <a:noFill/>
+        </p:spPr>
+        <p:txBody>
+          <a:bodyPr wrap="none" lIns="0" rIns="0" tIns="0" bIns="0">
+            <a:spAutoFit/>
+          </a:bodyPr>
+          <a:lstStyle/>
+          <a:p>
+            <a:pPr algn="l"/>
+            <a:r>
+              <a:rPr sz="1350" b="0">
+                <a:solidFill>
+                  <a:srgbClr val="DFEADF"/>
+                </a:solidFill>
+                <a:latin typeface="Noto Sans SC"/>
+                <a:ea typeface="Noto Sans SC"/>
+              </a:rPr>
+              <a:t> 0</a:t>
+            </a:r>
+          </a:p>
+        </p:txBody>
+      </p:sp>
+      <p:sp>
+        <p:nvSpPr>
+          <p:cNvPr id="26" name="TextBox 25"/>
+          <p:cNvSpPr txBox="1"/>
+          <p:nvPr/>
+        </p:nvSpPr>
+        <p:spPr>
+          <a:xfrm>
+            <a:off x="8430577" y="1730120"/>
+            <a:ext cx="274320" cy="231457"/>
+          </a:xfrm>
+          <a:prstGeom prst="rect">
+            <a:avLst/>
+          </a:prstGeom>
+          <a:noFill/>
+        </p:spPr>
+        <p:txBody>
+          <a:bodyPr wrap="none" lIns="0" rIns="0" tIns="0" bIns="0">
+            <a:spAutoFit/>
+          </a:bodyPr>
+          <a:lstStyle/>
+          <a:p>
+            <a:pPr algn="l"/>
+            <a:r>
+              <a:rPr sz="1350" b="0">
+                <a:solidFill>
+                  <a:srgbClr val="DFEADF"/>
+                </a:solidFill>
+                <a:latin typeface="Noto Sans SC"/>
+                <a:ea typeface="Noto Sans SC"/>
+              </a:rPr>
+              <a:t>）</a:t>
+            </a:r>
+          </a:p>
+        </p:txBody>
+      </p:sp>
+      <p:sp>
+        <p:nvSpPr>
+          <p:cNvPr id="27" name="TextBox 26"/>
+          <p:cNvSpPr txBox="1"/>
+          <p:nvPr/>
+        </p:nvSpPr>
+        <p:spPr>
+          <a:xfrm>
+            <a:off x="5898832" y="2188083"/>
+            <a:ext cx="156210" cy="180022"/>
+          </a:xfrm>
+          <a:prstGeom prst="rect">
+            <a:avLst/>
+          </a:prstGeom>
+          <a:noFill/>
+        </p:spPr>
+        <p:txBody>
+          <a:bodyPr wrap="none" lIns="0" rIns="0" tIns="0" bIns="0">
+            <a:spAutoFit/>
+          </a:bodyPr>
+          <a:lstStyle/>
+          <a:p>
+            <a:pPr algn="l"/>
+            <a:r>
               <a:rPr sz="1050" b="0">
                 <a:solidFill>
                   <a:srgbClr val="6F8F8F"/>
@@ -20797,21 +20617,21 @@
                 <a:latin typeface="Noto Sans SC"/>
                 <a:ea typeface="Noto Sans SC"/>
               </a:rPr>
-              <a:t>1</a:t>
-            </a:r>
-          </a:p>
-        </p:txBody>
-      </p:sp>
-      <p:sp>
-        <p:nvSpPr>
-          <p:cNvPr id="20" name="TextBox 19"/>
-          <p:cNvSpPr txBox="1"/>
-          <p:nvPr/>
-        </p:nvSpPr>
-        <p:spPr>
-          <a:xfrm>
-            <a:off x="6189027" y="1730120"/>
-            <a:ext cx="234372" cy="231457"/>
+              <a:t>2</a:t>
+            </a:r>
+          </a:p>
+        </p:txBody>
+      </p:sp>
+      <p:sp>
+        <p:nvSpPr>
+          <p:cNvPr id="28" name="TextBox 27"/>
+          <p:cNvSpPr txBox="1"/>
+          <p:nvPr/>
+        </p:nvSpPr>
+        <p:spPr>
+          <a:xfrm>
+            <a:off x="6189027" y="2149221"/>
+            <a:ext cx="160020" cy="231457"/>
           </a:xfrm>
           <a:prstGeom prst="rect">
             <a:avLst/>
@@ -20833,20 +20653,92 @@
                 <a:latin typeface="Noto Sans SC"/>
                 <a:ea typeface="Noto Sans SC"/>
               </a:rPr>
-              <a:t>L </a:t>
-            </a:r>
-          </a:p>
-        </p:txBody>
-      </p:sp>
-      <p:sp>
-        <p:nvSpPr>
-          <p:cNvPr id="21" name="TextBox 20"/>
-          <p:cNvSpPr txBox="1"/>
-          <p:nvPr/>
-        </p:nvSpPr>
-        <p:spPr>
-          <a:xfrm>
-            <a:off x="6320529" y="1730120"/>
+              <a:t>(</a:t>
+            </a:r>
+          </a:p>
+        </p:txBody>
+      </p:sp>
+      <p:sp>
+        <p:nvSpPr>
+          <p:cNvPr id="29" name="TextBox 28"/>
+          <p:cNvSpPr txBox="1"/>
+          <p:nvPr/>
+        </p:nvSpPr>
+        <p:spPr>
+          <a:xfrm>
+            <a:off x="6246177" y="2149221"/>
+            <a:ext cx="198120" cy="231457"/>
+          </a:xfrm>
+          <a:prstGeom prst="rect">
+            <a:avLst/>
+          </a:prstGeom>
+          <a:noFill/>
+        </p:spPr>
+        <p:txBody>
+          <a:bodyPr wrap="none" lIns="0" rIns="0" tIns="0" bIns="0">
+            <a:spAutoFit/>
+          </a:bodyPr>
+          <a:lstStyle/>
+          <a:p>
+            <a:pPr algn="l"/>
+            <a:r>
+              <a:rPr sz="1350" b="0">
+                <a:solidFill>
+                  <a:srgbClr val="DFEADF"/>
+                </a:solidFill>
+                <a:latin typeface="Noto Sans SC"/>
+                <a:ea typeface="Noto Sans SC"/>
+              </a:rPr>
+              <a:t>λ</a:t>
+            </a:r>
+          </a:p>
+        </p:txBody>
+      </p:sp>
+      <p:sp>
+        <p:nvSpPr>
+          <p:cNvPr id="30" name="TextBox 29"/>
+          <p:cNvSpPr txBox="1"/>
+          <p:nvPr/>
+        </p:nvSpPr>
+        <p:spPr>
+          <a:xfrm>
+            <a:off x="6341427" y="2149221"/>
+            <a:ext cx="369570" cy="231457"/>
+          </a:xfrm>
+          <a:prstGeom prst="rect">
+            <a:avLst/>
+          </a:prstGeom>
+          <a:noFill/>
+        </p:spPr>
+        <p:txBody>
+          <a:bodyPr wrap="none" lIns="0" rIns="0" tIns="0" bIns="0">
+            <a:spAutoFit/>
+          </a:bodyPr>
+          <a:lstStyle/>
+          <a:p>
+            <a:pPr algn="l"/>
+            <a:r>
+              <a:rPr sz="1350" b="0">
+                <a:solidFill>
+                  <a:srgbClr val="DFEADF"/>
+                </a:solidFill>
+                <a:latin typeface="Noto Sans SC"/>
+                <a:ea typeface="Noto Sans SC"/>
+              </a:rPr>
+              <a:t>, x) </a:t>
+            </a:r>
+          </a:p>
+        </p:txBody>
+      </p:sp>
+      <p:sp>
+        <p:nvSpPr>
+          <p:cNvPr id="31" name="TextBox 30"/>
+          <p:cNvSpPr txBox="1"/>
+          <p:nvPr/>
+        </p:nvSpPr>
+        <p:spPr>
+          <a:xfrm>
+            <a:off x="6608127" y="2149221"/>
             <a:ext cx="274320" cy="231457"/>
           </a:xfrm>
           <a:prstGeom prst="rect">
@@ -20876,14 +20768,14 @@
       </p:sp>
       <p:sp>
         <p:nvSpPr>
-          <p:cNvPr id="22" name="TextBox 21"/>
-          <p:cNvSpPr txBox="1"/>
-          <p:nvPr/>
-        </p:nvSpPr>
-        <p:spPr>
-          <a:xfrm>
-            <a:off x="6491979" y="1730120"/>
-            <a:ext cx="297637" cy="231457"/>
+          <p:cNvPr id="32" name="TextBox 31"/>
+          <p:cNvSpPr txBox="1"/>
+          <p:nvPr/>
+        </p:nvSpPr>
+        <p:spPr>
+          <a:xfrm>
+            <a:off x="6779577" y="2149221"/>
+            <a:ext cx="140970" cy="231457"/>
           </a:xfrm>
           <a:prstGeom prst="rect">
             <a:avLst/>
@@ -20905,21 +20797,21 @@
                 <a:latin typeface="Noto Sans SC"/>
                 <a:ea typeface="Noto Sans SC"/>
               </a:rPr>
-              <a:t> D </a:t>
-            </a:r>
-          </a:p>
-        </p:txBody>
-      </p:sp>
-      <p:sp>
-        <p:nvSpPr>
-          <p:cNvPr id="23" name="TextBox 22"/>
-          <p:cNvSpPr txBox="1"/>
-          <p:nvPr/>
-        </p:nvSpPr>
-        <p:spPr>
-          <a:xfrm>
-            <a:off x="6686746" y="1730120"/>
-            <a:ext cx="198024" cy="231457"/>
+              <a:t> </a:t>
+            </a:r>
+          </a:p>
+        </p:txBody>
+      </p:sp>
+      <p:sp>
+        <p:nvSpPr>
+          <p:cNvPr id="33" name="TextBox 32"/>
+          <p:cNvSpPr txBox="1"/>
+          <p:nvPr/>
+        </p:nvSpPr>
+        <p:spPr>
+          <a:xfrm>
+            <a:off x="6817677" y="2149221"/>
+            <a:ext cx="1303020" cy="231457"/>
           </a:xfrm>
           <a:prstGeom prst="rect">
             <a:avLst/>
@@ -20941,21 +20833,21 @@
                 <a:latin typeface="Noto Sans SC"/>
                 <a:ea typeface="Noto Sans SC"/>
               </a:rPr>
-              <a:t>−</a:t>
-            </a:r>
-          </a:p>
-        </p:txBody>
-      </p:sp>
-      <p:sp>
-        <p:nvSpPr>
-          <p:cNvPr id="24" name="TextBox 23"/>
-          <p:cNvSpPr txBox="1"/>
-          <p:nvPr/>
-        </p:nvSpPr>
-        <p:spPr>
-          <a:xfrm>
-            <a:off x="6781901" y="1730120"/>
-            <a:ext cx="245516" cy="231457"/>
+              <a:t>特征分解，升序</a:t>
+            </a:r>
+          </a:p>
+        </p:txBody>
+      </p:sp>
+      <p:sp>
+        <p:nvSpPr>
+          <p:cNvPr id="34" name="TextBox 33"/>
+          <p:cNvSpPr txBox="1"/>
+          <p:nvPr/>
+        </p:nvSpPr>
+        <p:spPr>
+          <a:xfrm>
+            <a:off x="5898832" y="2607183"/>
+            <a:ext cx="156210" cy="180022"/>
           </a:xfrm>
           <a:prstGeom prst="rect">
             <a:avLst/>
@@ -20970,150 +20862,6 @@
           <a:p>
             <a:pPr algn="l"/>
             <a:r>
-              <a:rPr sz="1350" b="0">
-                <a:solidFill>
-                  <a:srgbClr val="DFEADF"/>
-                </a:solidFill>
-                <a:latin typeface="Noto Sans SC"/>
-                <a:ea typeface="Noto Sans SC"/>
-              </a:rPr>
-              <a:t> A</a:t>
-            </a:r>
-          </a:p>
-        </p:txBody>
-      </p:sp>
-      <p:sp>
-        <p:nvSpPr>
-          <p:cNvPr id="25" name="TextBox 24"/>
-          <p:cNvSpPr txBox="1"/>
-          <p:nvPr/>
-        </p:nvSpPr>
-        <p:spPr>
-          <a:xfrm>
-            <a:off x="6924548" y="1730120"/>
-            <a:ext cx="1474470" cy="231457"/>
-          </a:xfrm>
-          <a:prstGeom prst="rect">
-            <a:avLst/>
-          </a:prstGeom>
-          <a:noFill/>
-        </p:spPr>
-        <p:txBody>
-          <a:bodyPr wrap="none" lIns="0" rIns="0" tIns="0" bIns="0">
-            <a:spAutoFit/>
-          </a:bodyPr>
-          <a:lstStyle/>
-          <a:p>
-            <a:pPr algn="l"/>
-            <a:r>
-              <a:rPr sz="1350" b="0">
-                <a:solidFill>
-                  <a:srgbClr val="DFEADF"/>
-                </a:solidFill>
-                <a:latin typeface="Noto Sans SC"/>
-                <a:ea typeface="Noto Sans SC"/>
-              </a:rPr>
-              <a:t>（检查对称、行和</a:t>
-            </a:r>
-          </a:p>
-        </p:txBody>
-      </p:sp>
-      <p:sp>
-        <p:nvSpPr>
-          <p:cNvPr id="26" name="TextBox 25"/>
-          <p:cNvSpPr txBox="1"/>
-          <p:nvPr/>
-        </p:nvSpPr>
-        <p:spPr>
-          <a:xfrm>
-            <a:off x="8296148" y="1730120"/>
-            <a:ext cx="236429" cy="231457"/>
-          </a:xfrm>
-          <a:prstGeom prst="rect">
-            <a:avLst/>
-          </a:prstGeom>
-          <a:noFill/>
-        </p:spPr>
-        <p:txBody>
-          <a:bodyPr wrap="none" lIns="0" rIns="0" tIns="0" bIns="0">
-            <a:spAutoFit/>
-          </a:bodyPr>
-          <a:lstStyle/>
-          <a:p>
-            <a:pPr algn="l"/>
-            <a:r>
-              <a:rPr sz="1350" b="0">
-                <a:solidFill>
-                  <a:srgbClr val="DFEADF"/>
-                </a:solidFill>
-                <a:latin typeface="Noto Sans SC"/>
-                <a:ea typeface="Noto Sans SC"/>
-              </a:rPr>
-              <a:t> 0</a:t>
-            </a:r>
-          </a:p>
-        </p:txBody>
-      </p:sp>
-      <p:sp>
-        <p:nvSpPr>
-          <p:cNvPr id="27" name="TextBox 26"/>
-          <p:cNvSpPr txBox="1"/>
-          <p:nvPr/>
-        </p:nvSpPr>
-        <p:spPr>
-          <a:xfrm>
-            <a:off x="8429707" y="1730120"/>
-            <a:ext cx="274320" cy="231457"/>
-          </a:xfrm>
-          <a:prstGeom prst="rect">
-            <a:avLst/>
-          </a:prstGeom>
-          <a:noFill/>
-        </p:spPr>
-        <p:txBody>
-          <a:bodyPr wrap="none" lIns="0" rIns="0" tIns="0" bIns="0">
-            <a:spAutoFit/>
-          </a:bodyPr>
-          <a:lstStyle/>
-          <a:p>
-            <a:pPr algn="l"/>
-            <a:r>
-              <a:rPr sz="1350" b="0">
-                <a:solidFill>
-                  <a:srgbClr val="DFEADF"/>
-                </a:solidFill>
-                <a:latin typeface="Noto Sans SC"/>
-                <a:ea typeface="Noto Sans SC"/>
-              </a:rPr>
-              <a:t>）</a:t>
-            </a:r>
-          </a:p>
-        </p:txBody>
-      </p:sp>
-      <p:sp>
-        <p:nvSpPr>
-          <p:cNvPr id="28" name="TextBox 27"/>
-          <p:cNvSpPr txBox="1"/>
-          <p:nvPr/>
-        </p:nvSpPr>
-        <p:spPr>
-          <a:xfrm>
-            <a:off x="5898832" y="2188083"/>
-            <a:ext cx="154019" cy="180022"/>
-          </a:xfrm>
-          <a:prstGeom prst="rect">
-            <a:avLst/>
-          </a:prstGeom>
-          <a:noFill/>
-        </p:spPr>
-        <p:txBody>
-          <a:bodyPr wrap="none" lIns="0" rIns="0" tIns="0" bIns="0">
-            <a:spAutoFit/>
-          </a:bodyPr>
-          <a:lstStyle/>
-          <a:p>
-            <a:pPr algn="l"/>
-            <a:r>
               <a:rPr sz="1050" b="0">
                 <a:solidFill>
                   <a:srgbClr val="6F8F8F"/>
@@ -21121,223 +20869,7 @@
                 <a:latin typeface="Noto Sans SC"/>
                 <a:ea typeface="Noto Sans SC"/>
               </a:rPr>
-              <a:t>2</a:t>
-            </a:r>
-          </a:p>
-        </p:txBody>
-      </p:sp>
-      <p:sp>
-        <p:nvSpPr>
-          <p:cNvPr id="29" name="TextBox 28"/>
-          <p:cNvSpPr txBox="1"/>
-          <p:nvPr/>
-        </p:nvSpPr>
-        <p:spPr>
-          <a:xfrm>
-            <a:off x="6189027" y="2149221"/>
-            <a:ext cx="160820" cy="231457"/>
-          </a:xfrm>
-          <a:prstGeom prst="rect">
-            <a:avLst/>
-          </a:prstGeom>
-          <a:noFill/>
-        </p:spPr>
-        <p:txBody>
-          <a:bodyPr wrap="none" lIns="0" rIns="0" tIns="0" bIns="0">
-            <a:spAutoFit/>
-          </a:bodyPr>
-          <a:lstStyle/>
-          <a:p>
-            <a:pPr algn="l"/>
-            <a:r>
-              <a:rPr sz="1350" b="0">
-                <a:solidFill>
-                  <a:srgbClr val="DFEADF"/>
-                </a:solidFill>
-                <a:latin typeface="Noto Sans SC"/>
-                <a:ea typeface="Noto Sans SC"/>
-              </a:rPr>
-              <a:t>(</a:t>
-            </a:r>
-          </a:p>
-        </p:txBody>
-      </p:sp>
-      <p:sp>
-        <p:nvSpPr>
-          <p:cNvPr id="30" name="TextBox 29"/>
-          <p:cNvSpPr txBox="1"/>
-          <p:nvPr/>
-        </p:nvSpPr>
-        <p:spPr>
-          <a:xfrm>
-            <a:off x="6246977" y="2149221"/>
-            <a:ext cx="197510" cy="231457"/>
-          </a:xfrm>
-          <a:prstGeom prst="rect">
-            <a:avLst/>
-          </a:prstGeom>
-          <a:noFill/>
-        </p:spPr>
-        <p:txBody>
-          <a:bodyPr wrap="none" lIns="0" rIns="0" tIns="0" bIns="0">
-            <a:spAutoFit/>
-          </a:bodyPr>
-          <a:lstStyle/>
-          <a:p>
-            <a:pPr algn="l"/>
-            <a:r>
-              <a:rPr sz="1350" b="0">
-                <a:solidFill>
-                  <a:srgbClr val="DFEADF"/>
-                </a:solidFill>
-                <a:latin typeface="Noto Sans SC"/>
-                <a:ea typeface="Noto Sans SC"/>
-              </a:rPr>
-              <a:t>λ</a:t>
-            </a:r>
-          </a:p>
-        </p:txBody>
-      </p:sp>
-      <p:sp>
-        <p:nvSpPr>
-          <p:cNvPr id="31" name="TextBox 30"/>
-          <p:cNvSpPr txBox="1"/>
-          <p:nvPr/>
-        </p:nvSpPr>
-        <p:spPr>
-          <a:xfrm>
-            <a:off x="6341618" y="2149221"/>
-            <a:ext cx="370674" cy="231457"/>
-          </a:xfrm>
-          <a:prstGeom prst="rect">
-            <a:avLst/>
-          </a:prstGeom>
-          <a:noFill/>
-        </p:spPr>
-        <p:txBody>
-          <a:bodyPr wrap="none" lIns="0" rIns="0" tIns="0" bIns="0">
-            <a:spAutoFit/>
-          </a:bodyPr>
-          <a:lstStyle/>
-          <a:p>
-            <a:pPr algn="l"/>
-            <a:r>
-              <a:rPr sz="1350" b="0">
-                <a:solidFill>
-                  <a:srgbClr val="DFEADF"/>
-                </a:solidFill>
-                <a:latin typeface="Noto Sans SC"/>
-                <a:ea typeface="Noto Sans SC"/>
-              </a:rPr>
-              <a:t>, x) </a:t>
-            </a:r>
-          </a:p>
-        </p:txBody>
-      </p:sp>
-      <p:sp>
-        <p:nvSpPr>
-          <p:cNvPr id="32" name="TextBox 31"/>
-          <p:cNvSpPr txBox="1"/>
-          <p:nvPr/>
-        </p:nvSpPr>
-        <p:spPr>
-          <a:xfrm>
-            <a:off x="6609422" y="2149221"/>
-            <a:ext cx="274320" cy="231457"/>
-          </a:xfrm>
-          <a:prstGeom prst="rect">
-            <a:avLst/>
-          </a:prstGeom>
-          <a:noFill/>
-        </p:spPr>
-        <p:txBody>
-          <a:bodyPr wrap="none" lIns="0" rIns="0" tIns="0" bIns="0">
-            <a:spAutoFit/>
-          </a:bodyPr>
-          <a:lstStyle/>
-          <a:p>
-            <a:pPr algn="l"/>
-            <a:r>
-              <a:rPr sz="1350" b="0">
-                <a:solidFill>
-                  <a:srgbClr val="DFEADF"/>
-                </a:solidFill>
-                <a:latin typeface="Noto Sans SC"/>
-                <a:ea typeface="Noto Sans SC"/>
-              </a:rPr>
-              <a:t>←</a:t>
-            </a:r>
-          </a:p>
-        </p:txBody>
-      </p:sp>
-      <p:sp>
-        <p:nvSpPr>
-          <p:cNvPr id="33" name="TextBox 32"/>
-          <p:cNvSpPr txBox="1"/>
-          <p:nvPr/>
-        </p:nvSpPr>
-        <p:spPr>
-          <a:xfrm>
-            <a:off x="6780872" y="2149221"/>
-            <a:ext cx="141274" cy="231457"/>
-          </a:xfrm>
-          <a:prstGeom prst="rect">
-            <a:avLst/>
-          </a:prstGeom>
-          <a:noFill/>
-        </p:spPr>
-        <p:txBody>
-          <a:bodyPr wrap="none" lIns="0" rIns="0" tIns="0" bIns="0">
-            <a:spAutoFit/>
-          </a:bodyPr>
-          <a:lstStyle/>
-          <a:p>
-            <a:pPr algn="l"/>
-            <a:r>
-              <a:rPr sz="1350" b="0">
-                <a:solidFill>
-                  <a:srgbClr val="DFEADF"/>
-                </a:solidFill>
-                <a:latin typeface="Noto Sans SC"/>
-                <a:ea typeface="Noto Sans SC"/>
-              </a:rPr>
-              <a:t> </a:t>
-            </a:r>
-          </a:p>
-        </p:txBody>
-      </p:sp>
-      <p:sp>
-        <p:nvSpPr>
-          <p:cNvPr id="34" name="TextBox 33"/>
-          <p:cNvSpPr txBox="1"/>
-          <p:nvPr/>
-        </p:nvSpPr>
-        <p:spPr>
-          <a:xfrm>
-            <a:off x="6819277" y="2149221"/>
-            <a:ext cx="1303020" cy="231457"/>
-          </a:xfrm>
-          <a:prstGeom prst="rect">
-            <a:avLst/>
-          </a:prstGeom>
-          <a:noFill/>
-        </p:spPr>
-        <p:txBody>
-          <a:bodyPr wrap="none" lIns="0" rIns="0" tIns="0" bIns="0">
-            <a:spAutoFit/>
-          </a:bodyPr>
-          <a:lstStyle/>
-          <a:p>
-            <a:pPr algn="l"/>
-            <a:r>
-              <a:rPr sz="1350" b="0">
-                <a:solidFill>
-                  <a:srgbClr val="DFEADF"/>
-                </a:solidFill>
-                <a:latin typeface="Noto Sans SC"/>
-                <a:ea typeface="Noto Sans SC"/>
-              </a:rPr>
-              <a:t>特征分解，升序</a:t>
+              <a:t>3</a:t>
             </a:r>
           </a:p>
         </p:txBody>
@@ -21345,42 +20877,6 @@
       <p:sp>
         <p:nvSpPr>
           <p:cNvPr id="35" name="TextBox 34"/>
-          <p:cNvSpPr txBox="1"/>
-          <p:nvPr/>
-        </p:nvSpPr>
-        <p:spPr>
-          <a:xfrm>
-            <a:off x="5898832" y="2607183"/>
-            <a:ext cx="154019" cy="180022"/>
-          </a:xfrm>
-          <a:prstGeom prst="rect">
-            <a:avLst/>
-          </a:prstGeom>
-          <a:noFill/>
-        </p:spPr>
-        <p:txBody>
-          <a:bodyPr wrap="none" lIns="0" rIns="0" tIns="0" bIns="0">
-            <a:spAutoFit/>
-          </a:bodyPr>
-          <a:lstStyle/>
-          <a:p>
-            <a:pPr algn="l"/>
-            <a:r>
-              <a:rPr sz="1050" b="0">
-                <a:solidFill>
-                  <a:srgbClr val="6F8F8F"/>
-                </a:solidFill>
-                <a:latin typeface="Noto Sans SC"/>
-                <a:ea typeface="Noto Sans SC"/>
-              </a:rPr>
-              <a:t>3</a:t>
-            </a:r>
-          </a:p>
-        </p:txBody>
-      </p:sp>
-      <p:sp>
-        <p:nvSpPr>
-          <p:cNvPr id="36" name="TextBox 35"/>
           <p:cNvSpPr txBox="1"/>
           <p:nvPr/>
         </p:nvSpPr>
@@ -21416,14 +20912,50 @@
       </p:sp>
       <p:sp>
         <p:nvSpPr>
+          <p:cNvPr id="36" name="TextBox 35"/>
+          <p:cNvSpPr txBox="1"/>
+          <p:nvPr/>
+        </p:nvSpPr>
+        <p:spPr>
+          <a:xfrm>
+            <a:off x="6531927" y="2568321"/>
+            <a:ext cx="140970" cy="231457"/>
+          </a:xfrm>
+          <a:prstGeom prst="rect">
+            <a:avLst/>
+          </a:prstGeom>
+          <a:noFill/>
+        </p:spPr>
+        <p:txBody>
+          <a:bodyPr wrap="none" lIns="0" rIns="0" tIns="0" bIns="0">
+            <a:spAutoFit/>
+          </a:bodyPr>
+          <a:lstStyle/>
+          <a:p>
+            <a:pPr algn="l"/>
+            <a:r>
+              <a:rPr sz="1350" b="0">
+                <a:solidFill>
+                  <a:srgbClr val="DFEADF"/>
+                </a:solidFill>
+                <a:latin typeface="Noto Sans SC"/>
+                <a:ea typeface="Noto Sans SC"/>
+              </a:rPr>
+              <a:t> </a:t>
+            </a:r>
+          </a:p>
+        </p:txBody>
+      </p:sp>
+      <p:sp>
+        <p:nvSpPr>
           <p:cNvPr id="37" name="TextBox 36"/>
           <p:cNvSpPr txBox="1"/>
           <p:nvPr/>
         </p:nvSpPr>
         <p:spPr>
           <a:xfrm>
-            <a:off x="6531927" y="2568321"/>
-            <a:ext cx="141274" cy="231457"/>
+            <a:off x="6570027" y="2568321"/>
+            <a:ext cx="1474470" cy="231457"/>
           </a:xfrm>
           <a:prstGeom prst="rect">
             <a:avLst/>
@@ -21445,6 +20977,150 @@
                 <a:latin typeface="Noto Sans SC"/>
                 <a:ea typeface="Noto Sans SC"/>
               </a:rPr>
+              <a:t>连通、简并、残差</a:t>
+            </a:r>
+          </a:p>
+        </p:txBody>
+      </p:sp>
+      <p:sp>
+        <p:nvSpPr>
+          <p:cNvPr id="38" name="TextBox 37"/>
+          <p:cNvSpPr txBox="1"/>
+          <p:nvPr/>
+        </p:nvSpPr>
+        <p:spPr>
+          <a:xfrm>
+            <a:off x="5898832" y="3026283"/>
+            <a:ext cx="156210" cy="180022"/>
+          </a:xfrm>
+          <a:prstGeom prst="rect">
+            <a:avLst/>
+          </a:prstGeom>
+          <a:noFill/>
+        </p:spPr>
+        <p:txBody>
+          <a:bodyPr wrap="none" lIns="0" rIns="0" tIns="0" bIns="0">
+            <a:spAutoFit/>
+          </a:bodyPr>
+          <a:lstStyle/>
+          <a:p>
+            <a:pPr algn="l"/>
+            <a:r>
+              <a:rPr sz="1050" b="0">
+                <a:solidFill>
+                  <a:srgbClr val="6F8F8F"/>
+                </a:solidFill>
+                <a:latin typeface="Noto Sans SC"/>
+                <a:ea typeface="Noto Sans SC"/>
+              </a:rPr>
+              <a:t>4</a:t>
+            </a:r>
+          </a:p>
+        </p:txBody>
+      </p:sp>
+      <p:sp>
+        <p:nvSpPr>
+          <p:cNvPr id="39" name="TextBox 38"/>
+          <p:cNvSpPr txBox="1"/>
+          <p:nvPr/>
+        </p:nvSpPr>
+        <p:spPr>
+          <a:xfrm>
+            <a:off x="6189027" y="2987421"/>
+            <a:ext cx="198120" cy="231457"/>
+          </a:xfrm>
+          <a:prstGeom prst="rect">
+            <a:avLst/>
+          </a:prstGeom>
+          <a:noFill/>
+        </p:spPr>
+        <p:txBody>
+          <a:bodyPr wrap="none" lIns="0" rIns="0" tIns="0" bIns="0">
+            <a:spAutoFit/>
+          </a:bodyPr>
+          <a:lstStyle/>
+          <a:p>
+            <a:pPr algn="l"/>
+            <a:r>
+              <a:rPr sz="1350" b="0">
+                <a:solidFill>
+                  <a:srgbClr val="DFEADF"/>
+                </a:solidFill>
+                <a:latin typeface="Noto Sans SC"/>
+                <a:ea typeface="Noto Sans SC"/>
+              </a:rPr>
+              <a:t>f </a:t>
+            </a:r>
+          </a:p>
+        </p:txBody>
+      </p:sp>
+      <p:sp>
+        <p:nvSpPr>
+          <p:cNvPr id="40" name="TextBox 39"/>
+          <p:cNvSpPr txBox="1"/>
+          <p:nvPr/>
+        </p:nvSpPr>
+        <p:spPr>
+          <a:xfrm>
+            <a:off x="6284277" y="2987421"/>
+            <a:ext cx="274320" cy="231457"/>
+          </a:xfrm>
+          <a:prstGeom prst="rect">
+            <a:avLst/>
+          </a:prstGeom>
+          <a:noFill/>
+        </p:spPr>
+        <p:txBody>
+          <a:bodyPr wrap="none" lIns="0" rIns="0" tIns="0" bIns="0">
+            <a:spAutoFit/>
+          </a:bodyPr>
+          <a:lstStyle/>
+          <a:p>
+            <a:pPr algn="l"/>
+            <a:r>
+              <a:rPr sz="1350" b="0">
+                <a:solidFill>
+                  <a:srgbClr val="DFEADF"/>
+                </a:solidFill>
+                <a:latin typeface="Noto Sans SC"/>
+                <a:ea typeface="Noto Sans SC"/>
+              </a:rPr>
+              <a:t>←</a:t>
+            </a:r>
+          </a:p>
+        </p:txBody>
+      </p:sp>
+      <p:sp>
+        <p:nvSpPr>
+          <p:cNvPr id="41" name="TextBox 40"/>
+          <p:cNvSpPr txBox="1"/>
+          <p:nvPr/>
+        </p:nvSpPr>
+        <p:spPr>
+          <a:xfrm>
+            <a:off x="6455727" y="2987421"/>
+            <a:ext cx="140970" cy="231457"/>
+          </a:xfrm>
+          <a:prstGeom prst="rect">
+            <a:avLst/>
+          </a:prstGeom>
+          <a:noFill/>
+        </p:spPr>
+        <p:txBody>
+          <a:bodyPr wrap="none" lIns="0" rIns="0" tIns="0" bIns="0">
+            <a:spAutoFit/>
+          </a:bodyPr>
+          <a:lstStyle/>
+          <a:p>
+            <a:pPr algn="l"/>
+            <a:r>
+              <a:rPr sz="1350" b="0">
+                <a:solidFill>
+                  <a:srgbClr val="DFEADF"/>
+                </a:solidFill>
+                <a:latin typeface="Noto Sans SC"/>
+                <a:ea typeface="Noto Sans SC"/>
+              </a:rPr>
               <a:t> </a:t>
             </a:r>
           </a:p>
@@ -21452,14 +21128,14 @@
       </p:sp>
       <p:sp>
         <p:nvSpPr>
-          <p:cNvPr id="38" name="TextBox 37"/>
-          <p:cNvSpPr txBox="1"/>
-          <p:nvPr/>
-        </p:nvSpPr>
-        <p:spPr>
-          <a:xfrm>
-            <a:off x="6570332" y="2568321"/>
-            <a:ext cx="1474470" cy="231457"/>
+          <p:cNvPr id="42" name="TextBox 41"/>
+          <p:cNvSpPr txBox="1"/>
+          <p:nvPr/>
+        </p:nvSpPr>
+        <p:spPr>
+          <a:xfrm>
+            <a:off x="6493827" y="2987421"/>
+            <a:ext cx="198120" cy="231457"/>
           </a:xfrm>
           <a:prstGeom prst="rect">
             <a:avLst/>
@@ -21481,21 +21157,21 @@
                 <a:latin typeface="Noto Sans SC"/>
                 <a:ea typeface="Noto Sans SC"/>
               </a:rPr>
-              <a:t>连通、简并、残差</a:t>
-            </a:r>
-          </a:p>
-        </p:txBody>
-      </p:sp>
-      <p:sp>
-        <p:nvSpPr>
-          <p:cNvPr id="39" name="TextBox 38"/>
-          <p:cNvSpPr txBox="1"/>
-          <p:nvPr/>
-        </p:nvSpPr>
-        <p:spPr>
-          <a:xfrm>
-            <a:off x="5898832" y="3026283"/>
-            <a:ext cx="154019" cy="180022"/>
+              <a:t>λ</a:t>
+            </a:r>
+          </a:p>
+        </p:txBody>
+      </p:sp>
+      <p:sp>
+        <p:nvSpPr>
+          <p:cNvPr id="43" name="TextBox 42"/>
+          <p:cNvSpPr txBox="1"/>
+          <p:nvPr/>
+        </p:nvSpPr>
+        <p:spPr>
+          <a:xfrm>
+            <a:off x="6589077" y="2987421"/>
+            <a:ext cx="236220" cy="231457"/>
           </a:xfrm>
           <a:prstGeom prst="rect">
             <a:avLst/>
@@ -21510,28 +21186,28 @@
           <a:p>
             <a:pPr algn="l"/>
             <a:r>
-              <a:rPr sz="1050" b="0">
-                <a:solidFill>
-                  <a:srgbClr val="6F8F8F"/>
-                </a:solidFill>
-                <a:latin typeface="Noto Sans SC"/>
-                <a:ea typeface="Noto Sans SC"/>
-              </a:rPr>
-              <a:t>4</a:t>
-            </a:r>
-          </a:p>
-        </p:txBody>
-      </p:sp>
-      <p:sp>
-        <p:nvSpPr>
-          <p:cNvPr id="40" name="TextBox 39"/>
-          <p:cNvSpPr txBox="1"/>
-          <p:nvPr/>
-        </p:nvSpPr>
-        <p:spPr>
-          <a:xfrm>
-            <a:off x="6189027" y="2987421"/>
-            <a:ext cx="196996" cy="231457"/>
+              <a:rPr sz="1350" b="0">
+                <a:solidFill>
+                  <a:srgbClr val="DFEADF"/>
+                </a:solidFill>
+                <a:latin typeface="Noto Sans SC"/>
+                <a:ea typeface="Noto Sans SC"/>
+              </a:rPr>
+              <a:t>2 </a:t>
+            </a:r>
+          </a:p>
+        </p:txBody>
+      </p:sp>
+      <p:sp>
+        <p:nvSpPr>
+          <p:cNvPr id="44" name="TextBox 43"/>
+          <p:cNvSpPr txBox="1"/>
+          <p:nvPr/>
+        </p:nvSpPr>
+        <p:spPr>
+          <a:xfrm>
+            <a:off x="6722427" y="2987421"/>
+            <a:ext cx="1988820" cy="231457"/>
           </a:xfrm>
           <a:prstGeom prst="rect">
             <a:avLst/>
@@ -21553,186 +21229,6 @@
                 <a:latin typeface="Noto Sans SC"/>
                 <a:ea typeface="Noto Sans SC"/>
               </a:rPr>
-              <a:t>f </a:t>
-            </a:r>
-          </a:p>
-        </p:txBody>
-      </p:sp>
-      <p:sp>
-        <p:nvSpPr>
-          <p:cNvPr id="41" name="TextBox 40"/>
-          <p:cNvSpPr txBox="1"/>
-          <p:nvPr/>
-        </p:nvSpPr>
-        <p:spPr>
-          <a:xfrm>
-            <a:off x="6283153" y="2987421"/>
-            <a:ext cx="274320" cy="231457"/>
-          </a:xfrm>
-          <a:prstGeom prst="rect">
-            <a:avLst/>
-          </a:prstGeom>
-          <a:noFill/>
-        </p:spPr>
-        <p:txBody>
-          <a:bodyPr wrap="none" lIns="0" rIns="0" tIns="0" bIns="0">
-            <a:spAutoFit/>
-          </a:bodyPr>
-          <a:lstStyle/>
-          <a:p>
-            <a:pPr algn="l"/>
-            <a:r>
-              <a:rPr sz="1350" b="0">
-                <a:solidFill>
-                  <a:srgbClr val="DFEADF"/>
-                </a:solidFill>
-                <a:latin typeface="Noto Sans SC"/>
-                <a:ea typeface="Noto Sans SC"/>
-              </a:rPr>
-              <a:t>←</a:t>
-            </a:r>
-          </a:p>
-        </p:txBody>
-      </p:sp>
-      <p:sp>
-        <p:nvSpPr>
-          <p:cNvPr id="42" name="TextBox 41"/>
-          <p:cNvSpPr txBox="1"/>
-          <p:nvPr/>
-        </p:nvSpPr>
-        <p:spPr>
-          <a:xfrm>
-            <a:off x="6454603" y="2987421"/>
-            <a:ext cx="141274" cy="231457"/>
-          </a:xfrm>
-          <a:prstGeom prst="rect">
-            <a:avLst/>
-          </a:prstGeom>
-          <a:noFill/>
-        </p:spPr>
-        <p:txBody>
-          <a:bodyPr wrap="none" lIns="0" rIns="0" tIns="0" bIns="0">
-            <a:spAutoFit/>
-          </a:bodyPr>
-          <a:lstStyle/>
-          <a:p>
-            <a:pPr algn="l"/>
-            <a:r>
-              <a:rPr sz="1350" b="0">
-                <a:solidFill>
-                  <a:srgbClr val="DFEADF"/>
-                </a:solidFill>
-                <a:latin typeface="Noto Sans SC"/>
-                <a:ea typeface="Noto Sans SC"/>
-              </a:rPr>
-              <a:t> </a:t>
-            </a:r>
-          </a:p>
-        </p:txBody>
-      </p:sp>
-      <p:sp>
-        <p:nvSpPr>
-          <p:cNvPr id="43" name="TextBox 42"/>
-          <p:cNvSpPr txBox="1"/>
-          <p:nvPr/>
-        </p:nvSpPr>
-        <p:spPr>
-          <a:xfrm>
-            <a:off x="6493008" y="2987421"/>
-            <a:ext cx="197510" cy="231457"/>
-          </a:xfrm>
-          <a:prstGeom prst="rect">
-            <a:avLst/>
-          </a:prstGeom>
-          <a:noFill/>
-        </p:spPr>
-        <p:txBody>
-          <a:bodyPr wrap="none" lIns="0" rIns="0" tIns="0" bIns="0">
-            <a:spAutoFit/>
-          </a:bodyPr>
-          <a:lstStyle/>
-          <a:p>
-            <a:pPr algn="l"/>
-            <a:r>
-              <a:rPr sz="1350" b="0">
-                <a:solidFill>
-                  <a:srgbClr val="DFEADF"/>
-                </a:solidFill>
-                <a:latin typeface="Noto Sans SC"/>
-                <a:ea typeface="Noto Sans SC"/>
-              </a:rPr>
-              <a:t>λ</a:t>
-            </a:r>
-          </a:p>
-        </p:txBody>
-      </p:sp>
-      <p:sp>
-        <p:nvSpPr>
-          <p:cNvPr id="44" name="TextBox 43"/>
-          <p:cNvSpPr txBox="1"/>
-          <p:nvPr/>
-        </p:nvSpPr>
-        <p:spPr>
-          <a:xfrm>
-            <a:off x="6587648" y="2987421"/>
-            <a:ext cx="236429" cy="231457"/>
-          </a:xfrm>
-          <a:prstGeom prst="rect">
-            <a:avLst/>
-          </a:prstGeom>
-          <a:noFill/>
-        </p:spPr>
-        <p:txBody>
-          <a:bodyPr wrap="none" lIns="0" rIns="0" tIns="0" bIns="0">
-            <a:spAutoFit/>
-          </a:bodyPr>
-          <a:lstStyle/>
-          <a:p>
-            <a:pPr algn="l"/>
-            <a:r>
-              <a:rPr sz="1350" b="0">
-                <a:solidFill>
-                  <a:srgbClr val="DFEADF"/>
-                </a:solidFill>
-                <a:latin typeface="Noto Sans SC"/>
-                <a:ea typeface="Noto Sans SC"/>
-              </a:rPr>
-              <a:t>2 </a:t>
-            </a:r>
-          </a:p>
-        </p:txBody>
-      </p:sp>
-      <p:sp>
-        <p:nvSpPr>
-          <p:cNvPr id="45" name="TextBox 44"/>
-          <p:cNvSpPr txBox="1"/>
-          <p:nvPr/>
-        </p:nvSpPr>
-        <p:spPr>
-          <a:xfrm>
-            <a:off x="6721208" y="2987421"/>
-            <a:ext cx="1988820" cy="231457"/>
-          </a:xfrm>
-          <a:prstGeom prst="rect">
-            <a:avLst/>
-          </a:prstGeom>
-          <a:noFill/>
-        </p:spPr>
-        <p:txBody>
-          <a:bodyPr wrap="none" lIns="0" rIns="0" tIns="0" bIns="0">
-            <a:spAutoFit/>
-          </a:bodyPr>
-          <a:lstStyle/>
-          <a:p>
-            <a:pPr algn="l"/>
-            <a:r>
-              <a:rPr sz="1350" b="0">
-                <a:solidFill>
-                  <a:srgbClr val="DFEADF"/>
-                </a:solidFill>
-                <a:latin typeface="Noto Sans SC"/>
-                <a:ea typeface="Noto Sans SC"/>
-              </a:rPr>
               <a:t>的特征向量（统一符号）</a:t>
             </a:r>
           </a:p>
@@ -21740,7 +21236,7 @@
       </p:sp>
       <p:sp>
         <p:nvSpPr>
-          <p:cNvPr id="46" name="Rectangle 45"/>
+          <p:cNvPr id="45" name="Rectangle 44"/>
           <p:cNvSpPr/>
           <p:nvPr/>
         </p:nvSpPr>
@@ -21782,7 +21278,7 @@
       </p:sp>
       <p:sp>
         <p:nvSpPr>
-          <p:cNvPr id="47" name="Rectangle 46"/>
+          <p:cNvPr id="46" name="Rectangle 45"/>
           <p:cNvSpPr/>
           <p:nvPr/>
         </p:nvSpPr>
@@ -21824,14 +21320,50 @@
       </p:sp>
       <p:sp>
         <p:nvSpPr>
+          <p:cNvPr id="47" name="TextBox 46"/>
+          <p:cNvSpPr txBox="1"/>
+          <p:nvPr/>
+        </p:nvSpPr>
+        <p:spPr>
+          <a:xfrm>
+            <a:off x="5898832" y="3445383"/>
+            <a:ext cx="156210" cy="180022"/>
+          </a:xfrm>
+          <a:prstGeom prst="rect">
+            <a:avLst/>
+          </a:prstGeom>
+          <a:noFill/>
+        </p:spPr>
+        <p:txBody>
+          <a:bodyPr wrap="none" lIns="0" rIns="0" tIns="0" bIns="0">
+            <a:spAutoFit/>
+          </a:bodyPr>
+          <a:lstStyle/>
+          <a:p>
+            <a:pPr algn="l"/>
+            <a:r>
+              <a:rPr sz="1050" b="0">
+                <a:solidFill>
+                  <a:srgbClr val="6F8F8F"/>
+                </a:solidFill>
+                <a:latin typeface="Noto Sans SC"/>
+                <a:ea typeface="Noto Sans SC"/>
+              </a:rPr>
+              <a:t>5</a:t>
+            </a:r>
+          </a:p>
+        </p:txBody>
+      </p:sp>
+      <p:sp>
+        <p:nvSpPr>
           <p:cNvPr id="48" name="TextBox 47"/>
           <p:cNvSpPr txBox="1"/>
           <p:nvPr/>
         </p:nvSpPr>
         <p:spPr>
           <a:xfrm>
-            <a:off x="5898832" y="3445383"/>
-            <a:ext cx="154019" cy="180022"/>
+            <a:off x="6189027" y="3406521"/>
+            <a:ext cx="572770" cy="231457"/>
           </a:xfrm>
           <a:prstGeom prst="rect">
             <a:avLst/>
@@ -21846,14 +21378,14 @@
           <a:p>
             <a:pPr algn="l"/>
             <a:r>
-              <a:rPr sz="1050" b="0">
-                <a:solidFill>
-                  <a:srgbClr val="6F8F8F"/>
-                </a:solidFill>
-                <a:latin typeface="Noto Sans SC"/>
-                <a:ea typeface="Noto Sans SC"/>
-              </a:rPr>
-              <a:t>5</a:t>
+              <a:rPr sz="1350" b="0">
+                <a:solidFill>
+                  <a:srgbClr val="D8BB78"/>
+                </a:solidFill>
+                <a:latin typeface="Noto Sans SC"/>
+                <a:ea typeface="Noto Sans SC"/>
+              </a:rPr>
+              <a:t>order </a:t>
             </a:r>
           </a:p>
         </p:txBody>
@@ -21866,8 +21398,8 @@
         </p:nvSpPr>
         <p:spPr>
           <a:xfrm>
-            <a:off x="6189027" y="3406521"/>
-            <a:ext cx="579501" cy="231457"/>
+            <a:off x="6658927" y="3406521"/>
+            <a:ext cx="274320" cy="231457"/>
           </a:xfrm>
           <a:prstGeom prst="rect">
             <a:avLst/>
@@ -21889,7 +21421,7 @@
                 <a:latin typeface="Noto Sans SC"/>
                 <a:ea typeface="Noto Sans SC"/>
               </a:rPr>
-              <a:t>order </a:t>
+              <a:t>←</a:t>
             </a:r>
           </a:p>
         </p:txBody>
@@ -21902,7 +21434,43 @@
         </p:nvSpPr>
         <p:spPr>
           <a:xfrm>
-            <a:off x="6665658" y="3406521"/>
+            <a:off x="6830377" y="3406521"/>
+            <a:ext cx="140970" cy="231457"/>
+          </a:xfrm>
+          <a:prstGeom prst="rect">
+            <a:avLst/>
+          </a:prstGeom>
+          <a:noFill/>
+        </p:spPr>
+        <p:txBody>
+          <a:bodyPr wrap="none" lIns="0" rIns="0" tIns="0" bIns="0">
+            <a:spAutoFit/>
+          </a:bodyPr>
+          <a:lstStyle/>
+          <a:p>
+            <a:pPr algn="l"/>
+            <a:r>
+              <a:rPr sz="1350" b="0">
+                <a:solidFill>
+                  <a:srgbClr val="D8BB78"/>
+                </a:solidFill>
+                <a:latin typeface="Noto Sans SC"/>
+                <a:ea typeface="Noto Sans SC"/>
+              </a:rPr>
+              <a:t> </a:t>
+            </a:r>
+          </a:p>
+        </p:txBody>
+      </p:sp>
+      <p:sp>
+        <p:nvSpPr>
+          <p:cNvPr id="51" name="TextBox 50"/>
+          <p:cNvSpPr txBox="1"/>
+          <p:nvPr/>
+        </p:nvSpPr>
+        <p:spPr>
+          <a:xfrm>
+            <a:off x="6868477" y="3406521"/>
             <a:ext cx="274320" cy="231457"/>
           </a:xfrm>
           <a:prstGeom prst="rect">
@@ -21925,21 +21493,21 @@
                 <a:latin typeface="Noto Sans SC"/>
                 <a:ea typeface="Noto Sans SC"/>
               </a:rPr>
-              <a:t>←</a:t>
-            </a:r>
-          </a:p>
-        </p:txBody>
-      </p:sp>
-      <p:sp>
-        <p:nvSpPr>
-          <p:cNvPr id="51" name="TextBox 50"/>
-          <p:cNvSpPr txBox="1"/>
-          <p:nvPr/>
-        </p:nvSpPr>
-        <p:spPr>
-          <a:xfrm>
-            <a:off x="6837108" y="3406521"/>
-            <a:ext cx="141274" cy="231457"/>
+              <a:t>按</a:t>
+            </a:r>
+          </a:p>
+        </p:txBody>
+      </p:sp>
+      <p:sp>
+        <p:nvSpPr>
+          <p:cNvPr id="52" name="TextBox 51"/>
+          <p:cNvSpPr txBox="1"/>
+          <p:nvPr/>
+        </p:nvSpPr>
+        <p:spPr>
+          <a:xfrm>
+            <a:off x="7039927" y="3406521"/>
+            <a:ext cx="236220" cy="231457"/>
           </a:xfrm>
           <a:prstGeom prst="rect">
             <a:avLst/>
@@ -21961,21 +21529,21 @@
                 <a:latin typeface="Noto Sans SC"/>
                 <a:ea typeface="Noto Sans SC"/>
               </a:rPr>
-              <a:t> </a:t>
-            </a:r>
-          </a:p>
-        </p:txBody>
-      </p:sp>
-      <p:sp>
-        <p:nvSpPr>
-          <p:cNvPr id="52" name="TextBox 51"/>
-          <p:cNvSpPr txBox="1"/>
-          <p:nvPr/>
-        </p:nvSpPr>
-        <p:spPr>
-          <a:xfrm>
-            <a:off x="6875513" y="3406521"/>
-            <a:ext cx="274320" cy="231457"/>
+              <a:t> f </a:t>
+            </a:r>
+          </a:p>
+        </p:txBody>
+      </p:sp>
+      <p:sp>
+        <p:nvSpPr>
+          <p:cNvPr id="53" name="TextBox 52"/>
+          <p:cNvSpPr txBox="1"/>
+          <p:nvPr/>
+        </p:nvSpPr>
+        <p:spPr>
+          <a:xfrm>
+            <a:off x="7173277" y="3406521"/>
+            <a:ext cx="445770" cy="231457"/>
           </a:xfrm>
           <a:prstGeom prst="rect">
             <a:avLst/>
@@ -21997,78 +21565,6 @@
                 <a:latin typeface="Noto Sans SC"/>
                 <a:ea typeface="Noto Sans SC"/>
               </a:rPr>
-              <a:t>按</a:t>
-            </a:r>
-          </a:p>
-        </p:txBody>
-      </p:sp>
-      <p:sp>
-        <p:nvSpPr>
-          <p:cNvPr id="53" name="TextBox 52"/>
-          <p:cNvSpPr txBox="1"/>
-          <p:nvPr/>
-        </p:nvSpPr>
-        <p:spPr>
-          <a:xfrm>
-            <a:off x="7046963" y="3406521"/>
-            <a:ext cx="235400" cy="231457"/>
-          </a:xfrm>
-          <a:prstGeom prst="rect">
-            <a:avLst/>
-          </a:prstGeom>
-          <a:noFill/>
-        </p:spPr>
-        <p:txBody>
-          <a:bodyPr wrap="none" lIns="0" rIns="0" tIns="0" bIns="0">
-            <a:spAutoFit/>
-          </a:bodyPr>
-          <a:lstStyle/>
-          <a:p>
-            <a:pPr algn="l"/>
-            <a:r>
-              <a:rPr sz="1350" b="0">
-                <a:solidFill>
-                  <a:srgbClr val="D8BB78"/>
-                </a:solidFill>
-                <a:latin typeface="Noto Sans SC"/>
-                <a:ea typeface="Noto Sans SC"/>
-              </a:rPr>
-              <a:t> f </a:t>
-            </a:r>
-          </a:p>
-        </p:txBody>
-      </p:sp>
-      <p:sp>
-        <p:nvSpPr>
-          <p:cNvPr id="54" name="TextBox 53"/>
-          <p:cNvSpPr txBox="1"/>
-          <p:nvPr/>
-        </p:nvSpPr>
-        <p:spPr>
-          <a:xfrm>
-            <a:off x="7179494" y="3406521"/>
-            <a:ext cx="445770" cy="231457"/>
-          </a:xfrm>
-          <a:prstGeom prst="rect">
-            <a:avLst/>
-          </a:prstGeom>
-          <a:noFill/>
-        </p:spPr>
-        <p:txBody>
-          <a:bodyPr wrap="none" lIns="0" rIns="0" tIns="0" bIns="0">
-            <a:spAutoFit/>
-          </a:bodyPr>
-          <a:lstStyle/>
-          <a:p>
-            <a:pPr algn="l"/>
-            <a:r>
-              <a:rPr sz="1350" b="0">
-                <a:solidFill>
-                  <a:srgbClr val="D8BB78"/>
-                </a:solidFill>
-                <a:latin typeface="Noto Sans SC"/>
-                <a:ea typeface="Noto Sans SC"/>
-              </a:rPr>
               <a:t>升序</a:t>
             </a:r>
           </a:p>
@@ -22076,7 +21572,7 @@
       </p:sp>
       <p:sp>
         <p:nvSpPr>
-          <p:cNvPr id="55" name="Rectangle 54"/>
+          <p:cNvPr id="54" name="Rectangle 53"/>
           <p:cNvSpPr/>
           <p:nvPr/>
         </p:nvSpPr>
@@ -22118,7 +21614,7 @@
       </p:sp>
       <p:sp>
         <p:nvSpPr>
-          <p:cNvPr id="56" name="Rectangle 55"/>
+          <p:cNvPr id="55" name="Rectangle 54"/>
           <p:cNvSpPr/>
           <p:nvPr/>
         </p:nvSpPr>
@@ -22160,14 +21656,50 @@
       </p:sp>
       <p:sp>
         <p:nvSpPr>
+          <p:cNvPr id="56" name="TextBox 55"/>
+          <p:cNvSpPr txBox="1"/>
+          <p:nvPr/>
+        </p:nvSpPr>
+        <p:spPr>
+          <a:xfrm>
+            <a:off x="5898832" y="3864483"/>
+            <a:ext cx="156210" cy="180022"/>
+          </a:xfrm>
+          <a:prstGeom prst="rect">
+            <a:avLst/>
+          </a:prstGeom>
+          <a:noFill/>
+        </p:spPr>
+        <p:txBody>
+          <a:bodyPr wrap="none" lIns="0" rIns="0" tIns="0" bIns="0">
+            <a:spAutoFit/>
+          </a:bodyPr>
+          <a:lstStyle/>
+          <a:p>
+            <a:pPr algn="l"/>
+            <a:r>
+              <a:rPr sz="1050" b="0">
+                <a:solidFill>
+                  <a:srgbClr val="6F8F8F"/>
+                </a:solidFill>
+                <a:latin typeface="Noto Sans SC"/>
+                <a:ea typeface="Noto Sans SC"/>
+              </a:rPr>
+              <a:t>6</a:t>
+            </a:r>
+          </a:p>
+        </p:txBody>
+      </p:sp>
+      <p:sp>
+        <p:nvSpPr>
           <p:cNvPr id="57" name="TextBox 56"/>
           <p:cNvSpPr txBox="1"/>
           <p:nvPr/>
         </p:nvSpPr>
         <p:spPr>
           <a:xfrm>
-            <a:off x="5898832" y="3864483"/>
-            <a:ext cx="154019" cy="180022"/>
+            <a:off x="6189027" y="3825621"/>
+            <a:ext cx="763270" cy="231457"/>
           </a:xfrm>
           <a:prstGeom prst="rect">
             <a:avLst/>
@@ -22182,14 +21714,14 @@
           <a:p>
             <a:pPr algn="l"/>
             <a:r>
-              <a:rPr sz="1050" b="0">
-                <a:solidFill>
-                  <a:srgbClr val="6F8F8F"/>
-                </a:solidFill>
-                <a:latin typeface="Noto Sans SC"/>
-                <a:ea typeface="Noto Sans SC"/>
-              </a:rPr>
-              <a:t>6</a:t>
+              <a:rPr sz="1350" b="0">
+                <a:solidFill>
+                  <a:srgbClr val="D8BB78"/>
+                </a:solidFill>
+                <a:latin typeface="Noto Sans SC"/>
+                <a:ea typeface="Noto Sans SC"/>
+              </a:rPr>
+              <a:t>for k = 1 </a:t>
             </a:r>
           </a:p>
         </p:txBody>
@@ -22202,8 +21734,8 @@
         </p:nvSpPr>
         <p:spPr>
           <a:xfrm>
-            <a:off x="6189027" y="3825621"/>
-            <a:ext cx="767581" cy="231457"/>
+            <a:off x="6849427" y="3825621"/>
+            <a:ext cx="274320" cy="231457"/>
           </a:xfrm>
           <a:prstGeom prst="rect">
             <a:avLst/>
@@ -22225,7 +21757,7 @@
                 <a:latin typeface="Noto Sans SC"/>
                 <a:ea typeface="Noto Sans SC"/>
               </a:rPr>
-              <a:t>for k = 1 </a:t>
+              <a:t>…</a:t>
             </a:r>
           </a:p>
         </p:txBody>
@@ -22238,8 +21770,8 @@
         </p:nvSpPr>
         <p:spPr>
           <a:xfrm>
-            <a:off x="6853739" y="3825621"/>
-            <a:ext cx="274320" cy="231457"/>
+            <a:off x="7020877" y="3825621"/>
+            <a:ext cx="242570" cy="231457"/>
           </a:xfrm>
           <a:prstGeom prst="rect">
             <a:avLst/>
@@ -22261,7 +21793,7 @@
                 <a:latin typeface="Noto Sans SC"/>
                 <a:ea typeface="Noto Sans SC"/>
               </a:rPr>
-              <a:t>…</a:t>
+              <a:t> n</a:t>
             </a:r>
           </a:p>
         </p:txBody>
@@ -22274,8 +21806,8 @@
         </p:nvSpPr>
         <p:spPr>
           <a:xfrm>
-            <a:off x="7025189" y="3825621"/>
-            <a:ext cx="245859" cy="231457"/>
+            <a:off x="7160577" y="3825621"/>
+            <a:ext cx="198120" cy="231457"/>
           </a:xfrm>
           <a:prstGeom prst="rect">
             <a:avLst/>
@@ -22297,7 +21829,7 @@
                 <a:latin typeface="Noto Sans SC"/>
                 <a:ea typeface="Noto Sans SC"/>
               </a:rPr>
-              <a:t> n</a:t>
+              <a:t>−</a:t>
             </a:r>
           </a:p>
         </p:txBody>
@@ -22310,8 +21842,8 @@
         </p:nvSpPr>
         <p:spPr>
           <a:xfrm>
-            <a:off x="7168178" y="3825621"/>
-            <a:ext cx="198024" cy="231457"/>
+            <a:off x="7255827" y="3825621"/>
+            <a:ext cx="198120" cy="231457"/>
           </a:xfrm>
           <a:prstGeom prst="rect">
             <a:avLst/>
@@ -22333,7 +21865,7 @@
                 <a:latin typeface="Noto Sans SC"/>
                 <a:ea typeface="Noto Sans SC"/>
               </a:rPr>
-              <a:t>−</a:t>
+              <a:t>1</a:t>
             </a:r>
           </a:p>
         </p:txBody>
@@ -22346,8 +21878,8 @@
         </p:nvSpPr>
         <p:spPr>
           <a:xfrm>
-            <a:off x="7263333" y="3825621"/>
-            <a:ext cx="198024" cy="231457"/>
+            <a:off x="7351077" y="3825621"/>
+            <a:ext cx="617220" cy="231457"/>
           </a:xfrm>
           <a:prstGeom prst="rect">
             <a:avLst/>
@@ -22369,7 +21901,7 @@
                 <a:latin typeface="Noto Sans SC"/>
                 <a:ea typeface="Noto Sans SC"/>
               </a:rPr>
-              <a:t>1</a:t>
+              <a:t>：计算</a:t>
             </a:r>
           </a:p>
         </p:txBody>
@@ -22382,8 +21914,8 @@
         </p:nvSpPr>
         <p:spPr>
           <a:xfrm>
-            <a:off x="7358487" y="3825621"/>
-            <a:ext cx="617220" cy="231457"/>
+            <a:off x="7865427" y="3825621"/>
+            <a:ext cx="394970" cy="231457"/>
           </a:xfrm>
           <a:prstGeom prst="rect">
             <a:avLst/>
@@ -22405,42 +21937,6 @@
                 <a:latin typeface="Noto Sans SC"/>
                 <a:ea typeface="Noto Sans SC"/>
               </a:rPr>
-              <a:t>：计算</a:t>
-            </a:r>
-          </a:p>
-        </p:txBody>
-      </p:sp>
-      <p:sp>
-        <p:nvSpPr>
-          <p:cNvPr id="64" name="TextBox 63"/>
-          <p:cNvSpPr txBox="1"/>
-          <p:nvPr/>
-        </p:nvSpPr>
-        <p:spPr>
-          <a:xfrm>
-            <a:off x="7872837" y="3825621"/>
-            <a:ext cx="397421" cy="231457"/>
-          </a:xfrm>
-          <a:prstGeom prst="rect">
-            <a:avLst/>
-          </a:prstGeom>
-          <a:noFill/>
-        </p:spPr>
-        <p:txBody>
-          <a:bodyPr wrap="none" lIns="0" rIns="0" tIns="0" bIns="0">
-            <a:spAutoFit/>
-          </a:bodyPr>
-          <a:lstStyle/>
-          <a:p>
-            <a:pPr algn="l"/>
-            <a:r>
-              <a:rPr sz="1350" b="0">
-                <a:solidFill>
-                  <a:srgbClr val="D8BB78"/>
-                </a:solidFill>
-                <a:latin typeface="Noto Sans SC"/>
-                <a:ea typeface="Noto Sans SC"/>
-              </a:rPr>
               <a:t> cut</a:t>
             </a:r>
           </a:p>
@@ -22448,7 +21944,7 @@
       </p:sp>
       <p:sp>
         <p:nvSpPr>
-          <p:cNvPr id="65" name="Rectangle 64"/>
+          <p:cNvPr id="64" name="Rectangle 63"/>
           <p:cNvSpPr/>
           <p:nvPr/>
         </p:nvSpPr>
@@ -22490,7 +21986,7 @@
       </p:sp>
       <p:sp>
         <p:nvSpPr>
-          <p:cNvPr id="66" name="Rectangle 65"/>
+          <p:cNvPr id="65" name="Rectangle 64"/>
           <p:cNvSpPr/>
           <p:nvPr/>
         </p:nvSpPr>
@@ -22532,43 +22028,43 @@
       </p:sp>
       <p:sp>
         <p:nvSpPr>
+          <p:cNvPr id="66" name="TextBox 65"/>
+          <p:cNvSpPr txBox="1"/>
+          <p:nvPr/>
+        </p:nvSpPr>
+        <p:spPr>
+          <a:xfrm>
+            <a:off x="5898832" y="4283583"/>
+            <a:ext cx="156210" cy="180022"/>
+          </a:xfrm>
+          <a:prstGeom prst="rect">
+            <a:avLst/>
+          </a:prstGeom>
+          <a:noFill/>
+        </p:spPr>
+        <p:txBody>
+          <a:bodyPr wrap="none" lIns="0" rIns="0" tIns="0" bIns="0">
+            <a:spAutoFit/>
+          </a:bodyPr>
+          <a:lstStyle/>
+          <a:p>
+            <a:pPr algn="l"/>
+            <a:r>
+              <a:rPr sz="1050" b="0">
+                <a:solidFill>
+                  <a:srgbClr val="6F8F8F"/>
+                </a:solidFill>
+                <a:latin typeface="Noto Sans SC"/>
+                <a:ea typeface="Noto Sans SC"/>
+              </a:rPr>
+              <a:t>7</a:t>
+            </a:r>
+          </a:p>
+        </p:txBody>
+      </p:sp>
+      <p:sp>
+        <p:nvSpPr>
           <p:cNvPr id="67" name="TextBox 66"/>
-          <p:cNvSpPr txBox="1"/>
-          <p:nvPr/>
-        </p:nvSpPr>
-        <p:spPr>
-          <a:xfrm>
-            <a:off x="5898832" y="4283583"/>
-            <a:ext cx="154019" cy="180022"/>
-          </a:xfrm>
-          <a:prstGeom prst="rect">
-            <a:avLst/>
-          </a:prstGeom>
-          <a:noFill/>
-        </p:spPr>
-        <p:txBody>
-          <a:bodyPr wrap="none" lIns="0" rIns="0" tIns="0" bIns="0">
-            <a:spAutoFit/>
-          </a:bodyPr>
-          <a:lstStyle/>
-          <a:p>
-            <a:pPr algn="l"/>
-            <a:r>
-              <a:rPr sz="1050" b="0">
-                <a:solidFill>
-                  <a:srgbClr val="6F8F8F"/>
-                </a:solidFill>
-                <a:latin typeface="Noto Sans SC"/>
-                <a:ea typeface="Noto Sans SC"/>
-              </a:rPr>
-              <a:t>7</a:t>
-            </a:r>
-          </a:p>
-        </p:txBody>
-      </p:sp>
-      <p:sp>
-        <p:nvSpPr>
-          <p:cNvPr id="68" name="TextBox 67"/>
           <p:cNvSpPr txBox="1"/>
           <p:nvPr/>
         </p:nvSpPr>
@@ -22604,14 +22100,50 @@
       </p:sp>
       <p:sp>
         <p:nvSpPr>
+          <p:cNvPr id="68" name="TextBox 67"/>
+          <p:cNvSpPr txBox="1"/>
+          <p:nvPr/>
+        </p:nvSpPr>
+        <p:spPr>
+          <a:xfrm>
+            <a:off x="7046277" y="4244721"/>
+            <a:ext cx="433070" cy="231457"/>
+          </a:xfrm>
+          <a:prstGeom prst="rect">
+            <a:avLst/>
+          </a:prstGeom>
+          <a:noFill/>
+        </p:spPr>
+        <p:txBody>
+          <a:bodyPr wrap="none" lIns="0" rIns="0" tIns="0" bIns="0">
+            <a:spAutoFit/>
+          </a:bodyPr>
+          <a:lstStyle/>
+          <a:p>
+            <a:pPr algn="l"/>
+            <a:r>
+              <a:rPr sz="1350" b="0">
+                <a:solidFill>
+                  <a:srgbClr val="D8BB78"/>
+                </a:solidFill>
+                <a:latin typeface="Noto Sans SC"/>
+                <a:ea typeface="Noto Sans SC"/>
+              </a:rPr>
+              <a:t> cut </a:t>
+            </a:r>
+          </a:p>
+        </p:txBody>
+      </p:sp>
+      <p:sp>
+        <p:nvSpPr>
           <p:cNvPr id="69" name="TextBox 68"/>
           <p:cNvSpPr txBox="1"/>
           <p:nvPr/>
         </p:nvSpPr>
         <p:spPr>
           <a:xfrm>
-            <a:off x="7046277" y="4244721"/>
-            <a:ext cx="435825" cy="231457"/>
+            <a:off x="7376477" y="4244721"/>
+            <a:ext cx="617220" cy="231457"/>
           </a:xfrm>
           <a:prstGeom prst="rect">
             <a:avLst/>
@@ -22633,7 +22165,7 @@
                 <a:latin typeface="Noto Sans SC"/>
                 <a:ea typeface="Noto Sans SC"/>
               </a:rPr>
-              <a:t> cut </a:t>
+              <a:t>最小的</a:t>
             </a:r>
           </a:p>
         </p:txBody>
@@ -22646,44 +22178,8 @@
         </p:nvSpPr>
         <p:spPr>
           <a:xfrm>
-            <a:off x="7379233" y="4244721"/>
-            <a:ext cx="617220" cy="231457"/>
-          </a:xfrm>
-          <a:prstGeom prst="rect">
-            <a:avLst/>
-          </a:prstGeom>
-          <a:noFill/>
-        </p:spPr>
-        <p:txBody>
-          <a:bodyPr wrap="none" lIns="0" rIns="0" tIns="0" bIns="0">
-            <a:spAutoFit/>
-          </a:bodyPr>
-          <a:lstStyle/>
-          <a:p>
-            <a:pPr algn="l"/>
-            <a:r>
-              <a:rPr sz="1350" b="0">
-                <a:solidFill>
-                  <a:srgbClr val="D8BB78"/>
-                </a:solidFill>
-                <a:latin typeface="Noto Sans SC"/>
-                <a:ea typeface="Noto Sans SC"/>
-              </a:rPr>
-              <a:t>最小的</a:t>
-            </a:r>
-          </a:p>
-        </p:txBody>
-      </p:sp>
-      <p:sp>
-        <p:nvSpPr>
-          <p:cNvPr id="71" name="TextBox 70"/>
-          <p:cNvSpPr txBox="1"/>
-          <p:nvPr/>
-        </p:nvSpPr>
-        <p:spPr>
-          <a:xfrm>
-            <a:off x="7893583" y="4244721"/>
-            <a:ext cx="235915" cy="231457"/>
+            <a:off x="7890827" y="4244721"/>
+            <a:ext cx="236220" cy="231457"/>
           </a:xfrm>
           <a:prstGeom prst="rect">
             <a:avLst/>
